--- a/applications/auc/documents/auc_ppt.pptx
+++ b/applications/auc/documents/auc_ppt.pptx
@@ -14,7 +14,6 @@
     <p:sldId id="262" r:id="rId13"/>
     <p:sldId id="263" r:id="rId14"/>
     <p:sldId id="264" r:id="rId15"/>
-    <p:sldId id="265" r:id="rId16"/>
   </p:sldIdLst>
   <p:sldSz cx="12191695" cy="6858000" type="screen4x3"/>
   <p:notesSz cx="6858000" cy="9144000"/>
@@ -3107,7 +3106,6 @@
         </p:nvPicPr>
         <p:blipFill>
           <a:blip r:embed="rId2"/>
-          <a:srcRect l="33" r="33"/>
           <a:stretch>
             <a:fillRect/>
           </a:stretch>
@@ -3130,8 +3128,8 @@
         </p:nvSpPr>
         <p:spPr>
           <a:xfrm>
-            <a:off x="0" y="3474720"/>
-            <a:ext cx="12191695" cy="3383280"/>
+            <a:off x="0" y="3657600"/>
+            <a:ext cx="12191695" cy="3200400"/>
           </a:xfrm>
           <a:prstGeom prst="rect">
             <a:avLst/>
@@ -3142,7 +3140,6 @@
           <a:ln>
             <a:noFill/>
           </a:ln>
-          <a:effectLst/>
         </p:spPr>
         <p:style>
           <a:lnRef idx="1">
@@ -3174,7 +3171,7 @@
         </p:nvSpPr>
         <p:spPr>
           <a:xfrm>
-            <a:off x="594360" y="3749040"/>
+            <a:off x="548640" y="3931920"/>
             <a:ext cx="10972800" cy="320040"/>
           </a:xfrm>
           <a:prstGeom prst="rect">
@@ -3183,16 +3180,12 @@
           <a:noFill/>
         </p:spPr>
         <p:txBody>
-          <a:bodyPr wrap="square" anchor="t">
+          <a:bodyPr wrap="square">
             <a:spAutoFit/>
           </a:bodyPr>
           <a:lstStyle/>
           <a:p>
-            <a:pPr algn="l">
-              <a:spcAft>
-                <a:spcPts val="0"/>
-              </a:spcAft>
-            </a:pPr>
+            <a:pPr algn="l"/>
             <a:r>
               <a:rPr sz="1300" b="1" i="0">
                 <a:solidFill>
@@ -3213,8 +3206,8 @@
         </p:nvSpPr>
         <p:spPr>
           <a:xfrm>
-            <a:off x="594360" y="4206240"/>
-            <a:ext cx="10972800" cy="640080"/>
+            <a:off x="548640" y="4389120"/>
+            <a:ext cx="10972800" cy="594360"/>
           </a:xfrm>
           <a:prstGeom prst="rect">
             <a:avLst/>
@@ -3222,16 +3215,12 @@
           <a:noFill/>
         </p:spPr>
         <p:txBody>
-          <a:bodyPr wrap="square" anchor="t">
+          <a:bodyPr wrap="square">
             <a:spAutoFit/>
           </a:bodyPr>
           <a:lstStyle/>
           <a:p>
-            <a:pPr algn="l">
-              <a:spcAft>
-                <a:spcPts val="0"/>
-              </a:spcAft>
-            </a:pPr>
+            <a:pPr algn="l"/>
             <a:r>
               <a:rPr sz="2600" b="1" i="0">
                 <a:solidFill>
@@ -3239,7 +3228,7 @@
                 </a:solidFill>
                 <a:latin typeface="Calibri"/>
               </a:rPr>
-              <a:t>FairBanks Community Health Intelligence Platform (FCHIP)</a:t>
+              <a:t>Fellowship Application — Women-Led HealthTech Leadership</a:t>
             </a:r>
           </a:p>
         </p:txBody>
@@ -3252,7 +3241,7 @@
         </p:nvSpPr>
         <p:spPr>
           <a:xfrm>
-            <a:off x="594360" y="4983481"/>
+            <a:off x="548640" y="5166360"/>
             <a:ext cx="10972800" cy="365760"/>
           </a:xfrm>
           <a:prstGeom prst="rect">
@@ -3261,337 +3250,12 @@
           <a:noFill/>
         </p:spPr>
         <p:txBody>
-          <a:bodyPr wrap="square" anchor="t">
+          <a:bodyPr wrap="square">
             <a:spAutoFit/>
           </a:bodyPr>
           <a:lstStyle/>
           <a:p>
-            <a:pPr algn="l">
-              <a:spcAft>
-                <a:spcPts val="0"/>
-              </a:spcAft>
-            </a:pPr>
-            <a:r>
-              <a:rPr sz="1500" b="0" i="1">
-                <a:solidFill>
-                  <a:srgbClr val="F2C79B"/>
-                </a:solidFill>
-                <a:latin typeface="Calibri"/>
-              </a:rPr>
-              <a:t>Women-led HealthTech ready for leadership, networks, and investment readiness</a:t>
-            </a:r>
-          </a:p>
-        </p:txBody>
-      </p:sp>
-      <p:sp>
-        <p:nvSpPr>
-          <p:cNvPr id="7" name="TextBox 6"/>
-          <p:cNvSpPr txBox="1"/>
-          <p:nvPr/>
-        </p:nvSpPr>
-        <p:spPr>
-          <a:xfrm>
-            <a:off x="594360" y="5532120"/>
-            <a:ext cx="10972800" cy="274320"/>
-          </a:xfrm>
-          <a:prstGeom prst="rect">
-            <a:avLst/>
-          </a:prstGeom>
-          <a:noFill/>
-        </p:spPr>
-        <p:txBody>
-          <a:bodyPr wrap="square" anchor="t">
-            <a:spAutoFit/>
-          </a:bodyPr>
-          <a:lstStyle/>
-          <a:p>
-            <a:pPr algn="l">
-              <a:spcAft>
-                <a:spcPts val="0"/>
-              </a:spcAft>
-            </a:pPr>
-            <a:r>
-              <a:rPr sz="1300" b="1" i="0">
-                <a:solidFill>
-                  <a:srgbClr val="FFFFFF"/>
-                </a:solidFill>
-                <a:latin typeface="Calibri"/>
-              </a:rPr>
-              <a:t>Your health, our mission.</a:t>
-            </a:r>
-          </a:p>
-        </p:txBody>
-      </p:sp>
-      <p:sp>
-        <p:nvSpPr>
-          <p:cNvPr id="8" name="TextBox 7"/>
-          <p:cNvSpPr txBox="1"/>
-          <p:nvPr/>
-        </p:nvSpPr>
-        <p:spPr>
-          <a:xfrm>
-            <a:off x="594360" y="5989320"/>
-            <a:ext cx="10972800" cy="365760"/>
-          </a:xfrm>
-          <a:prstGeom prst="rect">
-            <a:avLst/>
-          </a:prstGeom>
-          <a:noFill/>
-        </p:spPr>
-        <p:txBody>
-          <a:bodyPr wrap="square" anchor="t">
-            <a:spAutoFit/>
-          </a:bodyPr>
-          <a:lstStyle/>
-          <a:p>
-            <a:pPr algn="l">
-              <a:spcAft>
-                <a:spcPts val="0"/>
-              </a:spcAft>
-            </a:pPr>
-            <a:r>
-              <a:rPr sz="1200" b="0" i="0">
-                <a:solidFill>
-                  <a:srgbClr val="D0E8E8"/>
-                </a:solidFill>
-                <a:latin typeface="Calibri"/>
-              </a:rPr>
-              <a:t>Select our founder/team for the Women Innovation Fellowship cohort (1 Sep–31 Oct 2026).</a:t>
-            </a:r>
-          </a:p>
-        </p:txBody>
-      </p:sp>
-    </p:spTree>
-  </p:cSld>
-  <p:clrMapOvr>
-    <a:masterClrMapping/>
-  </p:clrMapOvr>
-</p:sld>
-</file>
-
-<file path=ppt/slides/slide10.xml><?xml version="1.0" encoding="utf-8"?>
-<p:sld xmlns:a="http://schemas.openxmlformats.org/drawingml/2006/main" xmlns:p="http://schemas.openxmlformats.org/presentationml/2006/main" xmlns:r="http://schemas.openxmlformats.org/officeDocument/2006/relationships">
-  <p:cSld>
-    <p:spTree>
-      <p:nvGrpSpPr>
-        <p:cNvPr id="1" name=""/>
-        <p:cNvGrpSpPr/>
-        <p:nvPr/>
-      </p:nvGrpSpPr>
-      <p:grpSpPr/>
-      <p:pic>
-        <p:nvPicPr>
-          <p:cNvPr id="2" name="Picture 1" descr="outreach_audience_full_group_01_opt.jpg"/>
-          <p:cNvPicPr>
-            <a:picLocks noChangeAspect="1"/>
-          </p:cNvPicPr>
-          <p:nvPr/>
-        </p:nvPicPr>
-        <p:blipFill>
-          <a:blip r:embed="rId2"/>
-          <a:srcRect t="7796" b="7796"/>
-          <a:stretch>
-            <a:fillRect/>
-          </a:stretch>
-        </p:blipFill>
-        <p:spPr>
-          <a:xfrm>
-            <a:off x="0" y="0"/>
-            <a:ext cx="12191695" cy="6858000"/>
-          </a:xfrm>
-          <a:prstGeom prst="rect">
-            <a:avLst/>
-          </a:prstGeom>
-        </p:spPr>
-      </p:pic>
-      <p:sp>
-        <p:nvSpPr>
-          <p:cNvPr id="3" name="Rectangle 2"/>
-          <p:cNvSpPr/>
-          <p:nvPr/>
-        </p:nvSpPr>
-        <p:spPr>
-          <a:xfrm>
-            <a:off x="0" y="3657600"/>
-            <a:ext cx="12191695" cy="3200400"/>
-          </a:xfrm>
-          <a:prstGeom prst="rect">
-            <a:avLst/>
-          </a:prstGeom>
-          <a:solidFill>
-            <a:srgbClr val="0A1F2E"/>
-          </a:solidFill>
-          <a:ln>
-            <a:noFill/>
-          </a:ln>
-          <a:effectLst/>
-        </p:spPr>
-        <p:style>
-          <a:lnRef idx="1">
-            <a:schemeClr val="accent1"/>
-          </a:lnRef>
-          <a:fillRef idx="3">
-            <a:schemeClr val="accent1"/>
-          </a:fillRef>
-          <a:effectRef idx="2">
-            <a:schemeClr val="accent1"/>
-          </a:effectRef>
-          <a:fontRef idx="minor">
-            <a:schemeClr val="lt1"/>
-          </a:fontRef>
-        </p:style>
-        <p:txBody>
-          <a:bodyPr rtlCol="0" anchor="ctr"/>
-          <a:lstStyle/>
-          <a:p>
-            <a:pPr algn="ctr"/>
-          </a:p>
-        </p:txBody>
-      </p:sp>
-      <p:sp>
-        <p:nvSpPr>
-          <p:cNvPr id="4" name="TextBox 3"/>
-          <p:cNvSpPr txBox="1"/>
-          <p:nvPr/>
-        </p:nvSpPr>
-        <p:spPr>
-          <a:xfrm>
-            <a:off x="594360" y="3931920"/>
-            <a:ext cx="10972800" cy="274320"/>
-          </a:xfrm>
-          <a:prstGeom prst="rect">
-            <a:avLst/>
-          </a:prstGeom>
-          <a:noFill/>
-        </p:spPr>
-        <p:txBody>
-          <a:bodyPr wrap="square" anchor="t">
-            <a:spAutoFit/>
-          </a:bodyPr>
-          <a:lstStyle/>
-          <a:p>
-            <a:pPr algn="l">
-              <a:spcAft>
-                <a:spcPts val="0"/>
-              </a:spcAft>
-            </a:pPr>
-            <a:r>
-              <a:rPr sz="1300" b="1" i="0">
-                <a:solidFill>
-                  <a:srgbClr val="14A3A3"/>
-                </a:solidFill>
-                <a:latin typeface="Calibri"/>
-              </a:rPr>
-              <a:t>The ask</a:t>
-            </a:r>
-          </a:p>
-        </p:txBody>
-      </p:sp>
-      <p:sp>
-        <p:nvSpPr>
-          <p:cNvPr id="5" name="TextBox 4"/>
-          <p:cNvSpPr txBox="1"/>
-          <p:nvPr/>
-        </p:nvSpPr>
-        <p:spPr>
-          <a:xfrm>
-            <a:off x="594360" y="4389120"/>
-            <a:ext cx="10972800" cy="822960"/>
-          </a:xfrm>
-          <a:prstGeom prst="rect">
-            <a:avLst/>
-          </a:prstGeom>
-          <a:noFill/>
-        </p:spPr>
-        <p:txBody>
-          <a:bodyPr wrap="square" anchor="t">
-            <a:spAutoFit/>
-          </a:bodyPr>
-          <a:lstStyle/>
-          <a:p>
-            <a:pPr algn="l">
-              <a:spcAft>
-                <a:spcPts val="0"/>
-              </a:spcAft>
-            </a:pPr>
-            <a:r>
-              <a:rPr sz="2200" b="1" i="0">
-                <a:solidFill>
-                  <a:srgbClr val="FFFFFF"/>
-                </a:solidFill>
-                <a:latin typeface="Calibri"/>
-              </a:rPr>
-              <a:t>Select our founder/team for the Women Innovation Fellowship cohort (1 Sep–31 Oct 2026).</a:t>
-            </a:r>
-          </a:p>
-        </p:txBody>
-      </p:sp>
-      <p:sp>
-        <p:nvSpPr>
-          <p:cNvPr id="6" name="TextBox 5"/>
-          <p:cNvSpPr txBox="1"/>
-          <p:nvPr/>
-        </p:nvSpPr>
-        <p:spPr>
-          <a:xfrm>
-            <a:off x="594360" y="5394960"/>
-            <a:ext cx="10972800" cy="365760"/>
-          </a:xfrm>
-          <a:prstGeom prst="rect">
-            <a:avLst/>
-          </a:prstGeom>
-          <a:noFill/>
-        </p:spPr>
-        <p:txBody>
-          <a:bodyPr wrap="square" anchor="t">
-            <a:spAutoFit/>
-          </a:bodyPr>
-          <a:lstStyle/>
-          <a:p>
-            <a:pPr algn="l">
-              <a:spcAft>
-                <a:spcPts val="0"/>
-              </a:spcAft>
-            </a:pPr>
-            <a:r>
-              <a:rPr sz="1400" b="0" i="1">
-                <a:solidFill>
-                  <a:srgbClr val="F2C79B"/>
-                </a:solidFill>
-                <a:latin typeface="Calibri"/>
-              </a:rPr>
-              <a:t>Women-led HealthTech ready for leadership, networks, and investment readiness</a:t>
-            </a:r>
-          </a:p>
-        </p:txBody>
-      </p:sp>
-      <p:sp>
-        <p:nvSpPr>
-          <p:cNvPr id="7" name="TextBox 6"/>
-          <p:cNvSpPr txBox="1"/>
-          <p:nvPr/>
-        </p:nvSpPr>
-        <p:spPr>
-          <a:xfrm>
-            <a:off x="594360" y="5943600"/>
-            <a:ext cx="10972800" cy="320040"/>
-          </a:xfrm>
-          <a:prstGeom prst="rect">
-            <a:avLst/>
-          </a:prstGeom>
-          <a:noFill/>
-        </p:spPr>
-        <p:txBody>
-          <a:bodyPr wrap="square" anchor="t">
-            <a:spAutoFit/>
-          </a:bodyPr>
-          <a:lstStyle/>
-          <a:p>
-            <a:pPr algn="l">
-              <a:spcAft>
-                <a:spcPts val="0"/>
-              </a:spcAft>
-            </a:pPr>
+            <a:pPr algn="l"/>
             <a:r>
               <a:rPr sz="1400" b="1" i="0">
                 <a:solidFill>
@@ -3600,6 +3264,41 @@
                 <a:latin typeface="Calibri"/>
               </a:rPr>
               <a:t>Your health, our mission.</a:t>
+            </a:r>
+          </a:p>
+        </p:txBody>
+      </p:sp>
+      <p:sp>
+        <p:nvSpPr>
+          <p:cNvPr id="7" name="TextBox 6"/>
+          <p:cNvSpPr txBox="1"/>
+          <p:nvPr/>
+        </p:nvSpPr>
+        <p:spPr>
+          <a:xfrm>
+            <a:off x="548640" y="5760720"/>
+            <a:ext cx="10972800" cy="320040"/>
+          </a:xfrm>
+          <a:prstGeom prst="rect">
+            <a:avLst/>
+          </a:prstGeom>
+          <a:noFill/>
+        </p:spPr>
+        <p:txBody>
+          <a:bodyPr wrap="square">
+            <a:spAutoFit/>
+          </a:bodyPr>
+          <a:lstStyle/>
+          <a:p>
+            <a:pPr algn="l"/>
+            <a:r>
+              <a:rPr sz="1200" b="0" i="0">
+                <a:solidFill>
+                  <a:srgbClr val="D0E8E8"/>
+                </a:solidFill>
+                <a:latin typeface="Calibri"/>
+              </a:rPr>
+              <a:t>Cairo, Egypt · 1 September – 31 October 2026</a:t>
             </a:r>
           </a:p>
         </p:txBody>
@@ -3631,7 +3330,7 @@
         <p:spPr>
           <a:xfrm>
             <a:off x="0" y="0"/>
-            <a:ext cx="12191695" cy="960120"/>
+            <a:ext cx="12191695" cy="914400"/>
           </a:xfrm>
           <a:prstGeom prst="rect">
             <a:avLst/>
@@ -3642,7 +3341,6 @@
           <a:ln>
             <a:noFill/>
           </a:ln>
-          <a:effectLst/>
         </p:spPr>
         <p:style>
           <a:lnRef idx="1">
@@ -3675,7 +3373,7 @@
         <p:spPr>
           <a:xfrm>
             <a:off x="0" y="0"/>
-            <a:ext cx="164592" cy="960120"/>
+            <a:ext cx="137160" cy="914400"/>
           </a:xfrm>
           <a:prstGeom prst="rect">
             <a:avLst/>
@@ -3686,7 +3384,6 @@
           <a:ln>
             <a:noFill/>
           </a:ln>
-          <a:effectLst/>
         </p:spPr>
         <p:style>
           <a:lnRef idx="1">
@@ -3718,8 +3415,8 @@
         </p:nvSpPr>
         <p:spPr>
           <a:xfrm>
-            <a:off x="457200" y="109728"/>
-            <a:ext cx="10972800" cy="256032"/>
+            <a:off x="411480" y="91440"/>
+            <a:ext cx="10972800" cy="274320"/>
           </a:xfrm>
           <a:prstGeom prst="rect">
             <a:avLst/>
@@ -3727,16 +3424,12 @@
           <a:noFill/>
         </p:spPr>
         <p:txBody>
-          <a:bodyPr wrap="square" anchor="t">
+          <a:bodyPr wrap="square">
             <a:spAutoFit/>
           </a:bodyPr>
           <a:lstStyle/>
           <a:p>
-            <a:pPr algn="l">
-              <a:spcAft>
-                <a:spcPts val="0"/>
-              </a:spcAft>
-            </a:pPr>
+            <a:pPr algn="l"/>
             <a:r>
               <a:rPr sz="1100" b="1" i="0">
                 <a:solidFill>
@@ -3744,7 +3437,7 @@
                 </a:solidFill>
                 <a:latin typeface="Calibri"/>
               </a:rPr>
-              <a:t>WIN-WIN</a:t>
+              <a:t>FELLOWSHIP FIT</a:t>
             </a:r>
           </a:p>
         </p:txBody>
@@ -3757,8 +3450,8 @@
         </p:nvSpPr>
         <p:spPr>
           <a:xfrm>
-            <a:off x="457200" y="384048"/>
-            <a:ext cx="11247120" cy="475488"/>
+            <a:off x="411480" y="384048"/>
+            <a:ext cx="10972800" cy="457200"/>
           </a:xfrm>
           <a:prstGeom prst="rect">
             <a:avLst/>
@@ -3766,24 +3459,20 @@
           <a:noFill/>
         </p:spPr>
         <p:txBody>
-          <a:bodyPr wrap="square" anchor="t">
+          <a:bodyPr wrap="square">
             <a:spAutoFit/>
           </a:bodyPr>
           <a:lstStyle/>
           <a:p>
-            <a:pPr algn="l">
-              <a:spcAft>
-                <a:spcPts val="0"/>
-              </a:spcAft>
-            </a:pPr>
-            <a:r>
-              <a:rPr sz="2200" b="1" i="0">
+            <a:pPr algn="l"/>
+            <a:r>
+              <a:rPr sz="2400" b="1" i="0">
                 <a:solidFill>
                   <a:srgbClr val="0A1F2E"/>
                 </a:solidFill>
                 <a:latin typeface="Calibri"/>
               </a:rPr>
-              <a:t>Mutual value for FairBanks and the programme</a:t>
+              <a:t>Cross-regional leadership for women in HealthTech</a:t>
             </a:r>
           </a:p>
         </p:txBody>
@@ -3796,8 +3485,8 @@
         </p:nvSpPr>
         <p:spPr>
           <a:xfrm>
-            <a:off x="457200" y="1143000"/>
-            <a:ext cx="5486400" cy="320040"/>
+            <a:off x="457200" y="1097280"/>
+            <a:ext cx="5669280" cy="5029200"/>
           </a:xfrm>
           <a:prstGeom prst="rect">
             <a:avLst/>
@@ -3805,251 +3494,60 @@
           <a:noFill/>
         </p:spPr>
         <p:txBody>
-          <a:bodyPr wrap="square" anchor="t">
+          <a:bodyPr wrap="square">
             <a:spAutoFit/>
           </a:bodyPr>
           <a:lstStyle/>
           <a:p>
-            <a:pPr algn="l">
-              <a:spcAft>
-                <a:spcPts val="0"/>
-              </a:spcAft>
-            </a:pPr>
-            <a:r>
-              <a:rPr sz="1600" b="1" i="0">
+            <a:pPr algn="l"/>
+            <a:r>
+              <a:rPr sz="1600" b="0" i="0">
                 <a:solidFill>
-                  <a:srgbClr val="0D6E6E"/>
+                  <a:srgbClr val="3A4A54"/>
                 </a:solidFill>
                 <a:latin typeface="Calibri"/>
               </a:rPr>
-              <a:t>What we gain</a:t>
-            </a:r>
-          </a:p>
-        </p:txBody>
-      </p:sp>
-      <p:sp>
-        <p:nvSpPr>
-          <p:cNvPr id="7" name="TextBox 6"/>
-          <p:cNvSpPr txBox="1"/>
-          <p:nvPr/>
-        </p:nvSpPr>
-        <p:spPr>
-          <a:xfrm>
-            <a:off x="457200" y="1508760"/>
-            <a:ext cx="5486400" cy="4800600"/>
-          </a:xfrm>
-          <a:prstGeom prst="rect">
-            <a:avLst/>
-          </a:prstGeom>
-          <a:noFill/>
-        </p:spPr>
-        <p:txBody>
-          <a:bodyPr wrap="square">
-            <a:spAutoFit/>
-          </a:bodyPr>
-          <a:lstStyle/>
-          <a:p>
-            <a:pPr>
-              <a:spcAft>
-                <a:spcPts val="800"/>
-              </a:spcAft>
-            </a:pPr>
-            <a:r>
-              <a:rPr sz="1300">
-                <a:solidFill>
-                  <a:srgbClr val="1E2F38"/>
-                </a:solidFill>
-                <a:latin typeface="Calibri"/>
-              </a:rPr>
-              <a:t>•  Leadership and investment-readiness coaching for a woman founder</a:t>
-            </a:r>
-          </a:p>
-          <a:p>
-            <a:pPr>
-              <a:spcAft>
-                <a:spcPts val="800"/>
-              </a:spcAft>
-            </a:pPr>
-            <a:r>
-              <a:rPr sz="1300">
-                <a:solidFill>
-                  <a:srgbClr val="1E2F38"/>
-                </a:solidFill>
-                <a:latin typeface="Calibri"/>
-              </a:rPr>
-              <a:t>•  Access to Egypt–Denmark innovation networks and mentors</a:t>
-            </a:r>
-          </a:p>
-          <a:p>
-            <a:pPr>
-              <a:spcAft>
-                <a:spcPts val="800"/>
-              </a:spcAft>
-            </a:pPr>
-            <a:r>
-              <a:rPr sz="1300">
-                <a:solidFill>
-                  <a:srgbClr val="1E2F38"/>
-                </a:solidFill>
-                <a:latin typeface="Calibri"/>
-              </a:rPr>
-              <a:t>•  Visibility that opens follow-on partners and capital conversations</a:t>
-            </a:r>
-          </a:p>
-          <a:p>
-            <a:pPr>
-              <a:spcAft>
-                <a:spcPts val="800"/>
-              </a:spcAft>
-            </a:pPr>
-            <a:r>
-              <a:rPr sz="1300">
-                <a:solidFill>
-                  <a:srgbClr val="1E2F38"/>
-                </a:solidFill>
-                <a:latin typeface="Calibri"/>
-              </a:rPr>
-              <a:t>•  Peer learning with other women innovators across sectors</a:t>
-            </a:r>
-          </a:p>
-        </p:txBody>
-      </p:sp>
-      <p:sp>
-        <p:nvSpPr>
-          <p:cNvPr id="8" name="TextBox 7"/>
-          <p:cNvSpPr txBox="1"/>
-          <p:nvPr/>
-        </p:nvSpPr>
-        <p:spPr>
-          <a:xfrm>
-            <a:off x="6309360" y="1143000"/>
-            <a:ext cx="5486400" cy="320040"/>
-          </a:xfrm>
-          <a:prstGeom prst="rect">
-            <a:avLst/>
-          </a:prstGeom>
-          <a:noFill/>
-        </p:spPr>
-        <p:txBody>
-          <a:bodyPr wrap="square" anchor="t">
-            <a:spAutoFit/>
-          </a:bodyPr>
-          <a:lstStyle/>
-          <a:p>
-            <a:pPr algn="l">
-              <a:spcAft>
-                <a:spcPts val="0"/>
-              </a:spcAft>
-            </a:pPr>
-            <a:r>
-              <a:rPr sz="1600" b="1" i="0">
-                <a:solidFill>
-                  <a:srgbClr val="0D6E6E"/>
-                </a:solidFill>
-                <a:latin typeface="Calibri"/>
-              </a:rPr>
-              <a:t>What they gain</a:t>
-            </a:r>
-          </a:p>
-        </p:txBody>
-      </p:sp>
-      <p:sp>
-        <p:nvSpPr>
-          <p:cNvPr id="9" name="TextBox 8"/>
-          <p:cNvSpPr txBox="1"/>
-          <p:nvPr/>
-        </p:nvSpPr>
-        <p:spPr>
-          <a:xfrm>
-            <a:off x="6309360" y="1508760"/>
-            <a:ext cx="5394960" cy="4800600"/>
-          </a:xfrm>
-          <a:prstGeom prst="rect">
-            <a:avLst/>
-          </a:prstGeom>
-          <a:noFill/>
-        </p:spPr>
-        <p:txBody>
-          <a:bodyPr wrap="square">
-            <a:spAutoFit/>
-          </a:bodyPr>
-          <a:lstStyle/>
-          <a:p>
-            <a:pPr>
-              <a:spcAft>
-                <a:spcPts val="800"/>
-              </a:spcAft>
-            </a:pPr>
-            <a:r>
-              <a:rPr sz="1300">
-                <a:solidFill>
-                  <a:srgbClr val="1E2F38"/>
-                </a:solidFill>
-                <a:latin typeface="Calibri"/>
-              </a:rPr>
-              <a:t>•  A real HealthTech / AI venture already serving communities in Uganda</a:t>
-            </a:r>
-          </a:p>
-          <a:p>
-            <a:pPr>
-              <a:spcAft>
-                <a:spcPts val="800"/>
-              </a:spcAft>
-            </a:pPr>
-            <a:r>
-              <a:rPr sz="1300">
-                <a:solidFill>
-                  <a:srgbClr val="1E2F38"/>
-                </a:solidFill>
-                <a:latin typeface="Calibri"/>
-              </a:rPr>
-              <a:t>•  Storytelling power: deep tech rooted in African primary care, not imported soft services</a:t>
-            </a:r>
-          </a:p>
-          <a:p>
-            <a:pPr>
-              <a:spcAft>
-                <a:spcPts val="800"/>
-              </a:spcAft>
-            </a:pPr>
-            <a:r>
-              <a:rPr sz="1300">
-                <a:solidFill>
-                  <a:srgbClr val="1E2F38"/>
-                </a:solidFill>
-                <a:latin typeface="Calibri"/>
-              </a:rPr>
-              <a:t>•  Contribution to gender-inclusive innovation across Africa and beyond Egypt</a:t>
-            </a:r>
-          </a:p>
-          <a:p>
-            <a:pPr>
-              <a:spcAft>
-                <a:spcPts val="800"/>
-              </a:spcAft>
-            </a:pPr>
-            <a:r>
-              <a:rPr sz="1300">
-                <a:solidFill>
-                  <a:srgbClr val="1E2F38"/>
-                </a:solidFill>
-                <a:latin typeface="Calibri"/>
-              </a:rPr>
-              <a:t>•  Alumni potential that can mentor future women founders in HealthTech</a:t>
-            </a:r>
-          </a:p>
-        </p:txBody>
-      </p:sp>
-      <p:sp>
-        <p:nvSpPr>
-          <p:cNvPr id="10" name="Rectangle 9"/>
+              <a:t>HealthTech that serves Africa needs leadership training and cross-regional networks — not code alone.
+AUC Venture Lab is Africa’s top accelerator heritage (440+ startups). Cairo connects North and East Africa.
+I bring live community health operations from Uganda; I seek mentor access and investor-ready discipline.</a:t>
+            </a:r>
+          </a:p>
+        </p:txBody>
+      </p:sp>
+      <p:pic>
+        <p:nvPicPr>
+          <p:cNvPr id="7" name="Picture 6" descr="staff_team_reception_opt.jpg"/>
+          <p:cNvPicPr>
+            <a:picLocks noChangeAspect="1"/>
+          </p:cNvPicPr>
+          <p:nvPr/>
+        </p:nvPicPr>
+        <p:blipFill>
+          <a:blip r:embed="rId2"/>
+          <a:stretch>
+            <a:fillRect/>
+          </a:stretch>
+        </p:blipFill>
+        <p:spPr>
+          <a:xfrm>
+            <a:off x="6400800" y="1844040"/>
+            <a:ext cx="5303520" cy="3535680"/>
+          </a:xfrm>
+          <a:prstGeom prst="rect">
+            <a:avLst/>
+          </a:prstGeom>
+        </p:spPr>
+      </p:pic>
+      <p:sp>
+        <p:nvSpPr>
+          <p:cNvPr id="8" name="Rectangle 7"/>
           <p:cNvSpPr/>
           <p:nvPr/>
         </p:nvSpPr>
         <p:spPr>
           <a:xfrm>
-            <a:off x="0" y="6565392"/>
-            <a:ext cx="12191695" cy="292608"/>
+            <a:off x="0" y="6583680"/>
+            <a:ext cx="12191695" cy="274320"/>
           </a:xfrm>
           <a:prstGeom prst="rect">
             <a:avLst/>
@@ -4060,7 +3558,6 @@
           <a:ln>
             <a:noFill/>
           </a:ln>
-          <a:effectLst/>
         </p:spPr>
         <p:style>
           <a:lnRef idx="1">
@@ -4086,14 +3583,14 @@
       </p:sp>
       <p:sp>
         <p:nvSpPr>
-          <p:cNvPr id="11" name="TextBox 10"/>
+          <p:cNvPr id="9" name="TextBox 8"/>
           <p:cNvSpPr txBox="1"/>
           <p:nvPr/>
         </p:nvSpPr>
         <p:spPr>
           <a:xfrm>
-            <a:off x="365760" y="6574536"/>
-            <a:ext cx="9144000" cy="274320"/>
+            <a:off x="365760" y="6592824"/>
+            <a:ext cx="9144000" cy="256032"/>
           </a:xfrm>
           <a:prstGeom prst="rect">
             <a:avLst/>
@@ -4101,16 +3598,12 @@
           <a:noFill/>
         </p:spPr>
         <p:txBody>
-          <a:bodyPr wrap="square" anchor="ctr">
+          <a:bodyPr wrap="square">
             <a:spAutoFit/>
           </a:bodyPr>
           <a:lstStyle/>
           <a:p>
-            <a:pPr algn="l">
-              <a:spcAft>
-                <a:spcPts val="0"/>
-              </a:spcAft>
-            </a:pPr>
+            <a:pPr algn="l"/>
             <a:r>
               <a:rPr sz="900" b="0" i="0">
                 <a:solidFill>
@@ -4118,21 +3611,21 @@
                 </a:solidFill>
                 <a:latin typeface="Calibri"/>
               </a:rPr>
-              <a:t>FairBanks FCHIP  |  AUC Venture Lab Women Innovation Fellows  |  Your health, our mission.</a:t>
-            </a:r>
-          </a:p>
-        </p:txBody>
-      </p:sp>
-      <p:sp>
-        <p:nvSpPr>
-          <p:cNvPr id="12" name="TextBox 11"/>
+              <a:t>FairBanks FCHIP | AUC Women Innovation Fellowship | Your health, our mission.</a:t>
+            </a:r>
+          </a:p>
+        </p:txBody>
+      </p:sp>
+      <p:sp>
+        <p:nvSpPr>
+          <p:cNvPr id="10" name="TextBox 9"/>
           <p:cNvSpPr txBox="1"/>
           <p:nvPr/>
         </p:nvSpPr>
         <p:spPr>
           <a:xfrm>
-            <a:off x="11094415" y="6574536"/>
-            <a:ext cx="731520" cy="274320"/>
+            <a:off x="11460175" y="6592824"/>
+            <a:ext cx="457200" cy="256032"/>
           </a:xfrm>
           <a:prstGeom prst="rect">
             <a:avLst/>
@@ -4140,16 +3633,12 @@
           <a:noFill/>
         </p:spPr>
         <p:txBody>
-          <a:bodyPr wrap="square" anchor="ctr">
+          <a:bodyPr wrap="square">
             <a:spAutoFit/>
           </a:bodyPr>
           <a:lstStyle/>
           <a:p>
-            <a:pPr algn="r">
-              <a:spcAft>
-                <a:spcPts val="0"/>
-              </a:spcAft>
-            </a:pPr>
+            <a:pPr algn="r"/>
             <a:r>
               <a:rPr sz="900" b="0" i="0">
                 <a:solidFill>
@@ -4189,7 +3678,7 @@
         <p:spPr>
           <a:xfrm>
             <a:off x="0" y="0"/>
-            <a:ext cx="12191695" cy="960120"/>
+            <a:ext cx="12191695" cy="914400"/>
           </a:xfrm>
           <a:prstGeom prst="rect">
             <a:avLst/>
@@ -4200,7 +3689,6 @@
           <a:ln>
             <a:noFill/>
           </a:ln>
-          <a:effectLst/>
         </p:spPr>
         <p:style>
           <a:lnRef idx="1">
@@ -4233,7 +3721,7 @@
         <p:spPr>
           <a:xfrm>
             <a:off x="0" y="0"/>
-            <a:ext cx="164592" cy="960120"/>
+            <a:ext cx="137160" cy="914400"/>
           </a:xfrm>
           <a:prstGeom prst="rect">
             <a:avLst/>
@@ -4244,7 +3732,6 @@
           <a:ln>
             <a:noFill/>
           </a:ln>
-          <a:effectLst/>
         </p:spPr>
         <p:style>
           <a:lnRef idx="1">
@@ -4276,8 +3763,8 @@
         </p:nvSpPr>
         <p:spPr>
           <a:xfrm>
-            <a:off x="457200" y="109728"/>
-            <a:ext cx="10972800" cy="256032"/>
+            <a:off x="411480" y="91440"/>
+            <a:ext cx="10972800" cy="274320"/>
           </a:xfrm>
           <a:prstGeom prst="rect">
             <a:avLst/>
@@ -4285,16 +3772,12 @@
           <a:noFill/>
         </p:spPr>
         <p:txBody>
-          <a:bodyPr wrap="square" anchor="t">
+          <a:bodyPr wrap="square">
             <a:spAutoFit/>
           </a:bodyPr>
           <a:lstStyle/>
           <a:p>
-            <a:pPr algn="l">
-              <a:spcAft>
-                <a:spcPts val="0"/>
-              </a:spcAft>
-            </a:pPr>
+            <a:pPr algn="l"/>
             <a:r>
               <a:rPr sz="1100" b="1" i="0">
                 <a:solidFill>
@@ -4302,7 +3785,7 @@
                 </a:solidFill>
                 <a:latin typeface="Calibri"/>
               </a:rPr>
-              <a:t>THE PROBLEM</a:t>
+              <a:t>LEADERSHIP</a:t>
             </a:r>
           </a:p>
         </p:txBody>
@@ -4315,8 +3798,8 @@
         </p:nvSpPr>
         <p:spPr>
           <a:xfrm>
-            <a:off x="457200" y="384048"/>
-            <a:ext cx="11247120" cy="475488"/>
+            <a:off x="411480" y="384048"/>
+            <a:ext cx="10972800" cy="457200"/>
           </a:xfrm>
           <a:prstGeom prst="rect">
             <a:avLst/>
@@ -4324,31 +3807,27 @@
           <a:noFill/>
         </p:spPr>
         <p:txBody>
-          <a:bodyPr wrap="square" anchor="t">
+          <a:bodyPr wrap="square">
             <a:spAutoFit/>
           </a:bodyPr>
           <a:lstStyle/>
           <a:p>
-            <a:pPr algn="l">
-              <a:spcAft>
-                <a:spcPts val="0"/>
-              </a:spcAft>
-            </a:pPr>
-            <a:r>
-              <a:rPr sz="2200" b="1" i="0">
+            <a:pPr algn="l"/>
+            <a:r>
+              <a:rPr sz="2400" b="1" i="0">
                 <a:solidFill>
                   <a:srgbClr val="0A1F2E"/>
                 </a:solidFill>
                 <a:latin typeface="Calibri"/>
               </a:rPr>
-              <a:t>Health systems react too late</a:t>
+              <a:t>Communities first — building trust before scale</a:t>
             </a:r>
           </a:p>
         </p:txBody>
       </p:sp>
       <p:pic>
         <p:nvPicPr>
-          <p:cNvPr id="6" name="Picture 5" descr="reactive_clinic_opt.jpg"/>
+          <p:cNvPr id="6" name="Picture 5" descr="outreach_facilitator_canopy_01_opt.jpg"/>
           <p:cNvPicPr>
             <a:picLocks noChangeAspect="1"/>
           </p:cNvPicPr>
@@ -4362,8 +3841,8 @@
         </p:blipFill>
         <p:spPr>
           <a:xfrm>
-            <a:off x="411480" y="2004691"/>
-            <a:ext cx="5303520" cy="3534417"/>
+            <a:off x="411480" y="1783733"/>
+            <a:ext cx="5486400" cy="3656293"/>
           </a:xfrm>
           <a:prstGeom prst="rect">
             <a:avLst/>
@@ -4378,8 +3857,8 @@
         </p:nvSpPr>
         <p:spPr>
           <a:xfrm>
-            <a:off x="6035040" y="1234440"/>
-            <a:ext cx="5669280" cy="5074920"/>
+            <a:off x="6217920" y="1097280"/>
+            <a:ext cx="5669280" cy="5029200"/>
           </a:xfrm>
           <a:prstGeom prst="rect">
             <a:avLst/>
@@ -4392,83 +3871,18 @@
           </a:bodyPr>
           <a:lstStyle/>
           <a:p>
-            <a:pPr>
-              <a:spcAft>
-                <a:spcPts val="800"/>
-              </a:spcAft>
-            </a:pPr>
-            <a:r>
-              <a:rPr sz="1400">
+            <a:pPr algn="l"/>
+            <a:r>
+              <a:rPr sz="1700" b="0" i="0">
                 <a:solidFill>
                   <a:srgbClr val="1E2F38"/>
                 </a:solidFill>
                 <a:latin typeface="Calibri"/>
               </a:rPr>
-              <a:t>•  Care often starts only after people fall sick</a:t>
-            </a:r>
-          </a:p>
-          <a:p>
-            <a:pPr>
-              <a:spcAft>
-                <a:spcPts val="800"/>
-              </a:spcAft>
-            </a:pPr>
-            <a:r>
-              <a:rPr sz="1400">
-                <a:solidFill>
-                  <a:srgbClr val="1E2F38"/>
-                </a:solidFill>
-                <a:latin typeface="Calibri"/>
-              </a:rPr>
-              <a:t>•  Community health data sits in paper registers and silos</a:t>
-            </a:r>
-          </a:p>
-          <a:p>
-            <a:pPr>
-              <a:spcAft>
-                <a:spcPts val="800"/>
-              </a:spcAft>
-            </a:pPr>
-            <a:r>
-              <a:rPr sz="1400">
-                <a:solidFill>
-                  <a:srgbClr val="1E2F38"/>
-                </a:solidFill>
-                <a:latin typeface="Calibri"/>
-              </a:rPr>
-              <a:t>•  High-risk pregnancies and NCDs are found too late</a:t>
-            </a:r>
-          </a:p>
-          <a:p>
-            <a:pPr>
-              <a:spcAft>
-                <a:spcPts val="800"/>
-              </a:spcAft>
-            </a:pPr>
-            <a:r>
-              <a:rPr sz="1400">
-                <a:solidFill>
-                  <a:srgbClr val="1E2F38"/>
-                </a:solidFill>
-                <a:latin typeface="Calibri"/>
-              </a:rPr>
-              <a:t>•  Medicine stock-outs hit hard during disease surges</a:t>
-            </a:r>
-          </a:p>
-          <a:p>
-            <a:pPr>
-              <a:spcAft>
-                <a:spcPts val="800"/>
-              </a:spcAft>
-            </a:pPr>
-            <a:r>
-              <a:rPr sz="1400">
-                <a:solidFill>
-                  <a:srgbClr val="1E2F38"/>
-                </a:solidFill>
-                <a:latin typeface="Calibri"/>
-              </a:rPr>
-              <a:t>•  Health shocks push poor families deeper into hardship</a:t>
+              <a:t>• CHW/VHT partnerships in Kampala communities
+• Maternal, adolescent, and chronic-care programmes
+• Clinical + community + product leadership combined
+• Decisions shaped by people who need care first</a:t>
             </a:r>
           </a:p>
         </p:txBody>
@@ -4481,8 +3895,8 @@
         </p:nvSpPr>
         <p:spPr>
           <a:xfrm>
-            <a:off x="0" y="6565392"/>
-            <a:ext cx="12191695" cy="292608"/>
+            <a:off x="0" y="6583680"/>
+            <a:ext cx="12191695" cy="274320"/>
           </a:xfrm>
           <a:prstGeom prst="rect">
             <a:avLst/>
@@ -4493,7 +3907,6 @@
           <a:ln>
             <a:noFill/>
           </a:ln>
-          <a:effectLst/>
         </p:spPr>
         <p:style>
           <a:lnRef idx="1">
@@ -4525,8 +3938,8 @@
         </p:nvSpPr>
         <p:spPr>
           <a:xfrm>
-            <a:off x="365760" y="6574536"/>
-            <a:ext cx="9144000" cy="274320"/>
+            <a:off x="365760" y="6592824"/>
+            <a:ext cx="9144000" cy="256032"/>
           </a:xfrm>
           <a:prstGeom prst="rect">
             <a:avLst/>
@@ -4534,16 +3947,12 @@
           <a:noFill/>
         </p:spPr>
         <p:txBody>
-          <a:bodyPr wrap="square" anchor="ctr">
+          <a:bodyPr wrap="square">
             <a:spAutoFit/>
           </a:bodyPr>
           <a:lstStyle/>
           <a:p>
-            <a:pPr algn="l">
-              <a:spcAft>
-                <a:spcPts val="0"/>
-              </a:spcAft>
-            </a:pPr>
+            <a:pPr algn="l"/>
             <a:r>
               <a:rPr sz="900" b="0" i="0">
                 <a:solidFill>
@@ -4551,7 +3960,7 @@
                 </a:solidFill>
                 <a:latin typeface="Calibri"/>
               </a:rPr>
-              <a:t>FairBanks FCHIP  |  AUC Venture Lab Women Innovation Fellows  |  Your health, our mission.</a:t>
+              <a:t>FairBanks FCHIP | AUC Women Innovation Fellowship | Your health, our mission.</a:t>
             </a:r>
           </a:p>
         </p:txBody>
@@ -4564,8 +3973,8 @@
         </p:nvSpPr>
         <p:spPr>
           <a:xfrm>
-            <a:off x="11094415" y="6574536"/>
-            <a:ext cx="731520" cy="274320"/>
+            <a:off x="11460175" y="6592824"/>
+            <a:ext cx="457200" cy="256032"/>
           </a:xfrm>
           <a:prstGeom prst="rect">
             <a:avLst/>
@@ -4573,16 +3982,12 @@
           <a:noFill/>
         </p:spPr>
         <p:txBody>
-          <a:bodyPr wrap="square" anchor="ctr">
+          <a:bodyPr wrap="square">
             <a:spAutoFit/>
           </a:bodyPr>
           <a:lstStyle/>
           <a:p>
-            <a:pPr algn="r">
-              <a:spcAft>
-                <a:spcPts val="0"/>
-              </a:spcAft>
-            </a:pPr>
+            <a:pPr algn="r"/>
             <a:r>
               <a:rPr sz="900" b="0" i="0">
                 <a:solidFill>
@@ -4622,7 +4027,7 @@
         <p:spPr>
           <a:xfrm>
             <a:off x="0" y="0"/>
-            <a:ext cx="12191695" cy="960120"/>
+            <a:ext cx="12191695" cy="914400"/>
           </a:xfrm>
           <a:prstGeom prst="rect">
             <a:avLst/>
@@ -4633,7 +4038,6 @@
           <a:ln>
             <a:noFill/>
           </a:ln>
-          <a:effectLst/>
         </p:spPr>
         <p:style>
           <a:lnRef idx="1">
@@ -4666,7 +4070,7 @@
         <p:spPr>
           <a:xfrm>
             <a:off x="0" y="0"/>
-            <a:ext cx="164592" cy="960120"/>
+            <a:ext cx="137160" cy="914400"/>
           </a:xfrm>
           <a:prstGeom prst="rect">
             <a:avLst/>
@@ -4677,7 +4081,6 @@
           <a:ln>
             <a:noFill/>
           </a:ln>
-          <a:effectLst/>
         </p:spPr>
         <p:style>
           <a:lnRef idx="1">
@@ -4709,8 +4112,8 @@
         </p:nvSpPr>
         <p:spPr>
           <a:xfrm>
-            <a:off x="457200" y="109728"/>
-            <a:ext cx="10972800" cy="256032"/>
+            <a:off x="411480" y="91440"/>
+            <a:ext cx="10972800" cy="274320"/>
           </a:xfrm>
           <a:prstGeom prst="rect">
             <a:avLst/>
@@ -4718,16 +4121,12 @@
           <a:noFill/>
         </p:spPr>
         <p:txBody>
-          <a:bodyPr wrap="square" anchor="t">
+          <a:bodyPr wrap="square">
             <a:spAutoFit/>
           </a:bodyPr>
           <a:lstStyle/>
           <a:p>
-            <a:pPr algn="l">
-              <a:spcAft>
-                <a:spcPts val="0"/>
-              </a:spcAft>
-            </a:pPr>
+            <a:pPr algn="l"/>
             <a:r>
               <a:rPr sz="1100" b="1" i="0">
                 <a:solidFill>
@@ -4735,7 +4134,7 @@
                 </a:solidFill>
                 <a:latin typeface="Calibri"/>
               </a:rPr>
-              <a:t>THE SOLUTION</a:t>
+              <a:t>INNOVATION</a:t>
             </a:r>
           </a:p>
         </p:txBody>
@@ -4748,8 +4147,8 @@
         </p:nvSpPr>
         <p:spPr>
           <a:xfrm>
-            <a:off x="457200" y="384048"/>
-            <a:ext cx="11247120" cy="475488"/>
+            <a:off x="411480" y="384048"/>
+            <a:ext cx="10972800" cy="457200"/>
           </a:xfrm>
           <a:prstGeom prst="rect">
             <a:avLst/>
@@ -4757,24 +4156,20 @@
           <a:noFill/>
         </p:spPr>
         <p:txBody>
-          <a:bodyPr wrap="square" anchor="t">
+          <a:bodyPr wrap="square">
             <a:spAutoFit/>
           </a:bodyPr>
           <a:lstStyle/>
           <a:p>
-            <a:pPr algn="l">
-              <a:spcAft>
-                <a:spcPts val="0"/>
-              </a:spcAft>
-            </a:pPr>
-            <a:r>
-              <a:rPr sz="2200" b="1" i="0">
+            <a:pPr algn="l"/>
+            <a:r>
+              <a:rPr sz="2400" b="1" i="0">
                 <a:solidFill>
                   <a:srgbClr val="0A1F2E"/>
                 </a:solidFill>
                 <a:latin typeface="Calibri"/>
               </a:rPr>
-              <a:t>FCHIP — community health intelligence</a:t>
+              <a:t>Women-led intelligence on a live community health cascade</a:t>
             </a:r>
           </a:p>
         </p:txBody>
@@ -4795,8 +4190,8 @@
         </p:blipFill>
         <p:spPr>
           <a:xfrm>
-            <a:off x="365760" y="1639062"/>
-            <a:ext cx="6400800" cy="4265676"/>
+            <a:off x="365760" y="1418104"/>
+            <a:ext cx="6583680" cy="4387552"/>
           </a:xfrm>
           <a:prstGeom prst="rect">
             <a:avLst/>
@@ -4811,8 +4206,8 @@
         </p:nvSpPr>
         <p:spPr>
           <a:xfrm>
-            <a:off x="7040880" y="1234440"/>
-            <a:ext cx="4754880" cy="5074920"/>
+            <a:off x="7223760" y="1097280"/>
+            <a:ext cx="4572000" cy="5029200"/>
           </a:xfrm>
           <a:prstGeom prst="rect">
             <a:avLst/>
@@ -4825,67 +4220,16 @@
           </a:bodyPr>
           <a:lstStyle/>
           <a:p>
-            <a:pPr>
-              <a:spcAft>
-                <a:spcPts val="800"/>
-              </a:spcAft>
-            </a:pPr>
-            <a:r>
-              <a:rPr sz="1400">
+            <a:pPr algn="l"/>
+            <a:r>
+              <a:rPr sz="1500" b="0" i="0">
                 <a:solidFill>
-                  <a:srgbClr val="1E2F38"/>
+                  <a:srgbClr val="3A4A54"/>
                 </a:solidFill>
                 <a:latin typeface="Calibri"/>
               </a:rPr>
-              <a:t>•  CHWs and VHTs capture structured data at household level</a:t>
-            </a:r>
-          </a:p>
-          <a:p>
-            <a:pPr>
-              <a:spcAft>
-                <a:spcPts val="800"/>
-              </a:spcAft>
-            </a:pPr>
-            <a:r>
-              <a:rPr sz="1400">
-                <a:solidFill>
-                  <a:srgbClr val="1E2F38"/>
-                </a:solidFill>
-                <a:latin typeface="Calibri"/>
-              </a:rPr>
-              <a:t>•  FCHIP applies AI, ML, and GIS to predict risk early</a:t>
-            </a:r>
-          </a:p>
-          <a:p>
-            <a:pPr>
-              <a:spcAft>
-                <a:spcPts val="800"/>
-              </a:spcAft>
-            </a:pPr>
-            <a:r>
-              <a:rPr sz="1400">
-                <a:solidFill>
-                  <a:srgbClr val="1E2F38"/>
-                </a:solidFill>
-                <a:latin typeface="Calibri"/>
-              </a:rPr>
-              <a:t>•  Alerts reach clinics, districts, and partners in time to act</a:t>
-            </a:r>
-          </a:p>
-          <a:p>
-            <a:pPr>
-              <a:spcAft>
-                <a:spcPts val="800"/>
-              </a:spcAft>
-            </a:pPr>
-            <a:r>
-              <a:rPr sz="1400">
-                <a:solidFill>
-                  <a:srgbClr val="1E2F38"/>
-                </a:solidFill>
-                <a:latin typeface="Calibri"/>
-              </a:rPr>
-              <a:t>•  Built on a live medical centre and community programmes</a:t>
+              <a:t>Offline capture → cloud intelligence → alerts to CHWs, clinics, districts.
+Predict outbreaks, maternal risk, NCD hotspots, child health gaps, stock-outs.</a:t>
             </a:r>
           </a:p>
         </p:txBody>
@@ -4898,8 +4242,8 @@
         </p:nvSpPr>
         <p:spPr>
           <a:xfrm>
-            <a:off x="0" y="6565392"/>
-            <a:ext cx="12191695" cy="292608"/>
+            <a:off x="0" y="6583680"/>
+            <a:ext cx="12191695" cy="274320"/>
           </a:xfrm>
           <a:prstGeom prst="rect">
             <a:avLst/>
@@ -4910,7 +4254,6 @@
           <a:ln>
             <a:noFill/>
           </a:ln>
-          <a:effectLst/>
         </p:spPr>
         <p:style>
           <a:lnRef idx="1">
@@ -4942,8 +4285,8 @@
         </p:nvSpPr>
         <p:spPr>
           <a:xfrm>
-            <a:off x="365760" y="6574536"/>
-            <a:ext cx="9144000" cy="274320"/>
+            <a:off x="365760" y="6592824"/>
+            <a:ext cx="9144000" cy="256032"/>
           </a:xfrm>
           <a:prstGeom prst="rect">
             <a:avLst/>
@@ -4951,16 +4294,12 @@
           <a:noFill/>
         </p:spPr>
         <p:txBody>
-          <a:bodyPr wrap="square" anchor="ctr">
+          <a:bodyPr wrap="square">
             <a:spAutoFit/>
           </a:bodyPr>
           <a:lstStyle/>
           <a:p>
-            <a:pPr algn="l">
-              <a:spcAft>
-                <a:spcPts val="0"/>
-              </a:spcAft>
-            </a:pPr>
+            <a:pPr algn="l"/>
             <a:r>
               <a:rPr sz="900" b="0" i="0">
                 <a:solidFill>
@@ -4968,7 +4307,7 @@
                 </a:solidFill>
                 <a:latin typeface="Calibri"/>
               </a:rPr>
-              <a:t>FairBanks FCHIP  |  AUC Venture Lab Women Innovation Fellows  |  Your health, our mission.</a:t>
+              <a:t>FairBanks FCHIP | AUC Women Innovation Fellowship | Your health, our mission.</a:t>
             </a:r>
           </a:p>
         </p:txBody>
@@ -4981,8 +4320,8 @@
         </p:nvSpPr>
         <p:spPr>
           <a:xfrm>
-            <a:off x="11094415" y="6574536"/>
-            <a:ext cx="731520" cy="274320"/>
+            <a:off x="11460175" y="6592824"/>
+            <a:ext cx="457200" cy="256032"/>
           </a:xfrm>
           <a:prstGeom prst="rect">
             <a:avLst/>
@@ -4990,16 +4329,12 @@
           <a:noFill/>
         </p:spPr>
         <p:txBody>
-          <a:bodyPr wrap="square" anchor="ctr">
+          <a:bodyPr wrap="square">
             <a:spAutoFit/>
           </a:bodyPr>
           <a:lstStyle/>
           <a:p>
-            <a:pPr algn="r">
-              <a:spcAft>
-                <a:spcPts val="0"/>
-              </a:spcAft>
-            </a:pPr>
+            <a:pPr algn="r"/>
             <a:r>
               <a:rPr sz="900" b="0" i="0">
                 <a:solidFill>
@@ -5039,7 +4374,7 @@
         <p:spPr>
           <a:xfrm>
             <a:off x="0" y="0"/>
-            <a:ext cx="12191695" cy="960120"/>
+            <a:ext cx="12191695" cy="914400"/>
           </a:xfrm>
           <a:prstGeom prst="rect">
             <a:avLst/>
@@ -5050,7 +4385,6 @@
           <a:ln>
             <a:noFill/>
           </a:ln>
-          <a:effectLst/>
         </p:spPr>
         <p:style>
           <a:lnRef idx="1">
@@ -5083,7 +4417,7 @@
         <p:spPr>
           <a:xfrm>
             <a:off x="0" y="0"/>
-            <a:ext cx="164592" cy="960120"/>
+            <a:ext cx="137160" cy="914400"/>
           </a:xfrm>
           <a:prstGeom prst="rect">
             <a:avLst/>
@@ -5094,7 +4428,6 @@
           <a:ln>
             <a:noFill/>
           </a:ln>
-          <a:effectLst/>
         </p:spPr>
         <p:style>
           <a:lnRef idx="1">
@@ -5126,8 +4459,8 @@
         </p:nvSpPr>
         <p:spPr>
           <a:xfrm>
-            <a:off x="457200" y="109728"/>
-            <a:ext cx="10972800" cy="256032"/>
+            <a:off x="411480" y="91440"/>
+            <a:ext cx="10972800" cy="274320"/>
           </a:xfrm>
           <a:prstGeom prst="rect">
             <a:avLst/>
@@ -5135,16 +4468,12 @@
           <a:noFill/>
         </p:spPr>
         <p:txBody>
-          <a:bodyPr wrap="square" anchor="t">
+          <a:bodyPr wrap="square">
             <a:spAutoFit/>
           </a:bodyPr>
           <a:lstStyle/>
           <a:p>
-            <a:pPr algn="l">
-              <a:spcAft>
-                <a:spcPts val="0"/>
-              </a:spcAft>
-            </a:pPr>
+            <a:pPr algn="l"/>
             <a:r>
               <a:rPr sz="1100" b="1" i="0">
                 <a:solidFill>
@@ -5152,7 +4481,7 @@
                 </a:solidFill>
                 <a:latin typeface="Calibri"/>
               </a:rPr>
-              <a:t>PROGRAMME FIT</a:t>
+              <a:t>GROWTH</a:t>
             </a:r>
           </a:p>
         </p:txBody>
@@ -5165,8 +4494,8 @@
         </p:nvSpPr>
         <p:spPr>
           <a:xfrm>
-            <a:off x="457200" y="384048"/>
-            <a:ext cx="11247120" cy="475488"/>
+            <a:off x="411480" y="384048"/>
+            <a:ext cx="10972800" cy="457200"/>
           </a:xfrm>
           <a:prstGeom prst="rect">
             <a:avLst/>
@@ -5174,84 +4503,34 @@
           <a:noFill/>
         </p:spPr>
         <p:txBody>
-          <a:bodyPr wrap="square" anchor="t">
+          <a:bodyPr wrap="square">
             <a:spAutoFit/>
           </a:bodyPr>
           <a:lstStyle/>
           <a:p>
-            <a:pPr algn="l">
-              <a:spcAft>
-                <a:spcPts val="0"/>
-              </a:spcAft>
-            </a:pPr>
-            <a:r>
-              <a:rPr sz="2200" b="1" i="0">
+            <a:pPr algn="l"/>
+            <a:r>
+              <a:rPr sz="2400" b="1" i="0">
                 <a:solidFill>
                   <a:srgbClr val="0A1F2E"/>
                 </a:solidFill>
                 <a:latin typeface="Calibri"/>
               </a:rPr>
-              <a:t>Why this call matches FCHIP</a:t>
-            </a:r>
-          </a:p>
-        </p:txBody>
-      </p:sp>
-      <p:sp>
-        <p:nvSpPr>
-          <p:cNvPr id="6" name="Rectangle 5"/>
-          <p:cNvSpPr/>
-          <p:nvPr/>
-        </p:nvSpPr>
-        <p:spPr>
-          <a:xfrm>
-            <a:off x="411480" y="1188720"/>
-            <a:ext cx="11338560" cy="1223010"/>
-          </a:xfrm>
-          <a:prstGeom prst="rect">
-            <a:avLst/>
-          </a:prstGeom>
-          <a:solidFill>
-            <a:srgbClr val="FFFFFF"/>
-          </a:solidFill>
-          <a:ln w="9525">
-            <a:solidFill>
-              <a:srgbClr val="D0DCDC"/>
-            </a:solidFill>
-          </a:ln>
-          <a:effectLst/>
-        </p:spPr>
-        <p:style>
-          <a:lnRef idx="1">
-            <a:schemeClr val="accent1"/>
-          </a:lnRef>
-          <a:fillRef idx="3">
-            <a:schemeClr val="accent1"/>
-          </a:fillRef>
-          <a:effectRef idx="2">
-            <a:schemeClr val="accent1"/>
-          </a:effectRef>
-          <a:fontRef idx="minor">
-            <a:schemeClr val="lt1"/>
-          </a:fontRef>
-        </p:style>
-        <p:txBody>
-          <a:bodyPr rtlCol="0" anchor="ctr"/>
-          <a:lstStyle/>
-          <a:p>
-            <a:pPr algn="ctr"/>
-          </a:p>
-        </p:txBody>
-      </p:sp>
-      <p:sp>
-        <p:nvSpPr>
-          <p:cNvPr id="7" name="TextBox 6"/>
+              <a:t>Mentorship, ecosystem, investor readiness</a:t>
+            </a:r>
+          </a:p>
+        </p:txBody>
+      </p:sp>
+      <p:sp>
+        <p:nvSpPr>
+          <p:cNvPr id="6" name="TextBox 5"/>
           <p:cNvSpPr txBox="1"/>
           <p:nvPr/>
         </p:nvSpPr>
         <p:spPr>
           <a:xfrm>
-            <a:off x="594360" y="1252728"/>
-            <a:ext cx="2926080" cy="1085850"/>
+            <a:off x="457200" y="1097280"/>
+            <a:ext cx="10972800" cy="5029200"/>
           </a:xfrm>
           <a:prstGeom prst="rect">
             <a:avLst/>
@@ -5259,449 +4538,59 @@
           <a:noFill/>
         </p:spPr>
         <p:txBody>
-          <a:bodyPr wrap="square" anchor="ctr">
+          <a:bodyPr wrap="square">
             <a:spAutoFit/>
           </a:bodyPr>
           <a:lstStyle/>
           <a:p>
-            <a:pPr algn="l">
-              <a:spcAft>
-                <a:spcPts val="0"/>
-              </a:spcAft>
-            </a:pPr>
-            <a:r>
-              <a:rPr sz="1300" b="1" i="0">
+            <a:pPr algn="l"/>
+            <a:r>
+              <a:rPr sz="1800" b="0" i="0">
                 <a:solidFill>
-                  <a:srgbClr val="0D6E6E"/>
+                  <a:srgbClr val="1E2F38"/>
                 </a:solidFill>
                 <a:latin typeface="Calibri"/>
               </a:rPr>
-              <a:t>Women entrepreneurs &amp; innovators</a:t>
-            </a:r>
-          </a:p>
-        </p:txBody>
-      </p:sp>
-      <p:sp>
-        <p:nvSpPr>
-          <p:cNvPr id="8" name="TextBox 7"/>
-          <p:cNvSpPr txBox="1"/>
-          <p:nvPr/>
-        </p:nvSpPr>
-        <p:spPr>
-          <a:xfrm>
-            <a:off x="3657600" y="1252728"/>
-            <a:ext cx="7772400" cy="1085850"/>
-          </a:xfrm>
-          <a:prstGeom prst="rect">
-            <a:avLst/>
-          </a:prstGeom>
-          <a:noFill/>
-        </p:spPr>
-        <p:txBody>
-          <a:bodyPr wrap="square" anchor="ctr">
-            <a:spAutoFit/>
-          </a:bodyPr>
-          <a:lstStyle/>
-          <a:p>
-            <a:pPr algn="l">
-              <a:spcAft>
-                <a:spcPts val="0"/>
-              </a:spcAft>
-            </a:pPr>
-            <a:r>
-              <a:rPr sz="1200" b="0" i="0">
-                <a:solidFill>
-                  <a:srgbClr val="3A4A54"/>
-                </a:solidFill>
-                <a:latin typeface="Calibri"/>
-              </a:rPr>
-              <a:t>Woman-led HealthTech venture with a clear founder growth need</a:t>
-            </a:r>
-          </a:p>
-        </p:txBody>
-      </p:sp>
-      <p:sp>
-        <p:nvSpPr>
-          <p:cNvPr id="9" name="Rectangle 8"/>
+              <a:t>Leadership development · Mentor hours · Ecosystem engagement · Cross-cultural collaboration
+From live pilot toward investment-ready venture across East Africa.</a:t>
+            </a:r>
+          </a:p>
+        </p:txBody>
+      </p:sp>
+      <p:pic>
+        <p:nvPicPr>
+          <p:cNvPr id="7" name="Picture 6" descr="indoor_training_staff_presenting_01_opt.jpg"/>
+          <p:cNvPicPr>
+            <a:picLocks noChangeAspect="1"/>
+          </p:cNvPicPr>
+          <p:nvPr/>
+        </p:nvPicPr>
+        <p:blipFill>
+          <a:blip r:embed="rId2"/>
+          <a:stretch>
+            <a:fillRect/>
+          </a:stretch>
+        </p:blipFill>
+        <p:spPr>
+          <a:xfrm>
+            <a:off x="7772400" y="2012170"/>
+            <a:ext cx="4114800" cy="2742220"/>
+          </a:xfrm>
+          <a:prstGeom prst="rect">
+            <a:avLst/>
+          </a:prstGeom>
+        </p:spPr>
+      </p:pic>
+      <p:sp>
+        <p:nvSpPr>
+          <p:cNvPr id="8" name="Rectangle 7"/>
           <p:cNvSpPr/>
           <p:nvPr/>
         </p:nvSpPr>
         <p:spPr>
           <a:xfrm>
-            <a:off x="411480" y="2503170"/>
-            <a:ext cx="11338560" cy="1223010"/>
-          </a:xfrm>
-          <a:prstGeom prst="rect">
-            <a:avLst/>
-          </a:prstGeom>
-          <a:solidFill>
-            <a:srgbClr val="FFFFFF"/>
-          </a:solidFill>
-          <a:ln w="9525">
-            <a:solidFill>
-              <a:srgbClr val="D0DCDC"/>
-            </a:solidFill>
-          </a:ln>
-          <a:effectLst/>
-        </p:spPr>
-        <p:style>
-          <a:lnRef idx="1">
-            <a:schemeClr val="accent1"/>
-          </a:lnRef>
-          <a:fillRef idx="3">
-            <a:schemeClr val="accent1"/>
-          </a:fillRef>
-          <a:effectRef idx="2">
-            <a:schemeClr val="accent1"/>
-          </a:effectRef>
-          <a:fontRef idx="minor">
-            <a:schemeClr val="lt1"/>
-          </a:fontRef>
-        </p:style>
-        <p:txBody>
-          <a:bodyPr rtlCol="0" anchor="ctr"/>
-          <a:lstStyle/>
-          <a:p>
-            <a:pPr algn="ctr"/>
-          </a:p>
-        </p:txBody>
-      </p:sp>
-      <p:sp>
-        <p:nvSpPr>
-          <p:cNvPr id="10" name="TextBox 9"/>
-          <p:cNvSpPr txBox="1"/>
-          <p:nvPr/>
-        </p:nvSpPr>
-        <p:spPr>
-          <a:xfrm>
-            <a:off x="594360" y="2567178"/>
-            <a:ext cx="2926080" cy="1085850"/>
-          </a:xfrm>
-          <a:prstGeom prst="rect">
-            <a:avLst/>
-          </a:prstGeom>
-          <a:noFill/>
-        </p:spPr>
-        <p:txBody>
-          <a:bodyPr wrap="square" anchor="ctr">
-            <a:spAutoFit/>
-          </a:bodyPr>
-          <a:lstStyle/>
-          <a:p>
-            <a:pPr algn="l">
-              <a:spcAft>
-                <a:spcPts val="0"/>
-              </a:spcAft>
-            </a:pPr>
-            <a:r>
-              <a:rPr sz="1300" b="1" i="0">
-                <a:solidFill>
-                  <a:srgbClr val="0D6E6E"/>
-                </a:solidFill>
-                <a:latin typeface="Calibri"/>
-              </a:rPr>
-              <a:t>HealthTech / AI / sustainability</a:t>
-            </a:r>
-          </a:p>
-        </p:txBody>
-      </p:sp>
-      <p:sp>
-        <p:nvSpPr>
-          <p:cNvPr id="11" name="TextBox 10"/>
-          <p:cNvSpPr txBox="1"/>
-          <p:nvPr/>
-        </p:nvSpPr>
-        <p:spPr>
-          <a:xfrm>
-            <a:off x="3657600" y="2567178"/>
-            <a:ext cx="7772400" cy="1085850"/>
-          </a:xfrm>
-          <a:prstGeom prst="rect">
-            <a:avLst/>
-          </a:prstGeom>
-          <a:noFill/>
-        </p:spPr>
-        <p:txBody>
-          <a:bodyPr wrap="square" anchor="ctr">
-            <a:spAutoFit/>
-          </a:bodyPr>
-          <a:lstStyle/>
-          <a:p>
-            <a:pPr algn="l">
-              <a:spcAft>
-                <a:spcPts val="0"/>
-              </a:spcAft>
-            </a:pPr>
-            <a:r>
-              <a:rPr sz="1200" b="0" i="0">
-                <a:solidFill>
-                  <a:srgbClr val="3A4A54"/>
-                </a:solidFill>
-                <a:latin typeface="Calibri"/>
-              </a:rPr>
-              <a:t>FCHIP is AI + community data for preventive primary care</a:t>
-            </a:r>
-          </a:p>
-        </p:txBody>
-      </p:sp>
-      <p:sp>
-        <p:nvSpPr>
-          <p:cNvPr id="12" name="Rectangle 11"/>
-          <p:cNvSpPr/>
-          <p:nvPr/>
-        </p:nvSpPr>
-        <p:spPr>
-          <a:xfrm>
-            <a:off x="411480" y="3817620"/>
-            <a:ext cx="11338560" cy="1223010"/>
-          </a:xfrm>
-          <a:prstGeom prst="rect">
-            <a:avLst/>
-          </a:prstGeom>
-          <a:solidFill>
-            <a:srgbClr val="FFFFFF"/>
-          </a:solidFill>
-          <a:ln w="9525">
-            <a:solidFill>
-              <a:srgbClr val="D0DCDC"/>
-            </a:solidFill>
-          </a:ln>
-          <a:effectLst/>
-        </p:spPr>
-        <p:style>
-          <a:lnRef idx="1">
-            <a:schemeClr val="accent1"/>
-          </a:lnRef>
-          <a:fillRef idx="3">
-            <a:schemeClr val="accent1"/>
-          </a:fillRef>
-          <a:effectRef idx="2">
-            <a:schemeClr val="accent1"/>
-          </a:effectRef>
-          <a:fontRef idx="minor">
-            <a:schemeClr val="lt1"/>
-          </a:fontRef>
-        </p:style>
-        <p:txBody>
-          <a:bodyPr rtlCol="0" anchor="ctr"/>
-          <a:lstStyle/>
-          <a:p>
-            <a:pPr algn="ctr"/>
-          </a:p>
-        </p:txBody>
-      </p:sp>
-      <p:sp>
-        <p:nvSpPr>
-          <p:cNvPr id="13" name="TextBox 12"/>
-          <p:cNvSpPr txBox="1"/>
-          <p:nvPr/>
-        </p:nvSpPr>
-        <p:spPr>
-          <a:xfrm>
-            <a:off x="594360" y="3881628"/>
-            <a:ext cx="2926080" cy="1085850"/>
-          </a:xfrm>
-          <a:prstGeom prst="rect">
-            <a:avLst/>
-          </a:prstGeom>
-          <a:noFill/>
-        </p:spPr>
-        <p:txBody>
-          <a:bodyPr wrap="square" anchor="ctr">
-            <a:spAutoFit/>
-          </a:bodyPr>
-          <a:lstStyle/>
-          <a:p>
-            <a:pPr algn="l">
-              <a:spcAft>
-                <a:spcPts val="0"/>
-              </a:spcAft>
-            </a:pPr>
-            <a:r>
-              <a:rPr sz="1300" b="1" i="0">
-                <a:solidFill>
-                  <a:srgbClr val="0D6E6E"/>
-                </a:solidFill>
-                <a:latin typeface="Calibri"/>
-              </a:rPr>
-              <a:t>Leadership &amp; ecosystem access</a:t>
-            </a:r>
-          </a:p>
-        </p:txBody>
-      </p:sp>
-      <p:sp>
-        <p:nvSpPr>
-          <p:cNvPr id="14" name="TextBox 13"/>
-          <p:cNvSpPr txBox="1"/>
-          <p:nvPr/>
-        </p:nvSpPr>
-        <p:spPr>
-          <a:xfrm>
-            <a:off x="3657600" y="3881628"/>
-            <a:ext cx="7772400" cy="1085850"/>
-          </a:xfrm>
-          <a:prstGeom prst="rect">
-            <a:avLst/>
-          </a:prstGeom>
-          <a:noFill/>
-        </p:spPr>
-        <p:txBody>
-          <a:bodyPr wrap="square" anchor="ctr">
-            <a:spAutoFit/>
-          </a:bodyPr>
-          <a:lstStyle/>
-          <a:p>
-            <a:pPr algn="l">
-              <a:spcAft>
-                <a:spcPts val="0"/>
-              </a:spcAft>
-            </a:pPr>
-            <a:r>
-              <a:rPr sz="1200" b="0" i="0">
-                <a:solidFill>
-                  <a:srgbClr val="3A4A54"/>
-                </a:solidFill>
-                <a:latin typeface="Calibri"/>
-              </a:rPr>
-              <a:t>We seek coaching, mentors, and Egypt–Denmark exposure</a:t>
-            </a:r>
-          </a:p>
-        </p:txBody>
-      </p:sp>
-      <p:sp>
-        <p:nvSpPr>
-          <p:cNvPr id="15" name="Rectangle 14"/>
-          <p:cNvSpPr/>
-          <p:nvPr/>
-        </p:nvSpPr>
-        <p:spPr>
-          <a:xfrm>
-            <a:off x="411480" y="5132070"/>
-            <a:ext cx="11338560" cy="1223010"/>
-          </a:xfrm>
-          <a:prstGeom prst="rect">
-            <a:avLst/>
-          </a:prstGeom>
-          <a:solidFill>
-            <a:srgbClr val="FFFFFF"/>
-          </a:solidFill>
-          <a:ln w="9525">
-            <a:solidFill>
-              <a:srgbClr val="D0DCDC"/>
-            </a:solidFill>
-          </a:ln>
-          <a:effectLst/>
-        </p:spPr>
-        <p:style>
-          <a:lnRef idx="1">
-            <a:schemeClr val="accent1"/>
-          </a:lnRef>
-          <a:fillRef idx="3">
-            <a:schemeClr val="accent1"/>
-          </a:fillRef>
-          <a:effectRef idx="2">
-            <a:schemeClr val="accent1"/>
-          </a:effectRef>
-          <a:fontRef idx="minor">
-            <a:schemeClr val="lt1"/>
-          </a:fontRef>
-        </p:style>
-        <p:txBody>
-          <a:bodyPr rtlCol="0" anchor="ctr"/>
-          <a:lstStyle/>
-          <a:p>
-            <a:pPr algn="ctr"/>
-          </a:p>
-        </p:txBody>
-      </p:sp>
-      <p:sp>
-        <p:nvSpPr>
-          <p:cNvPr id="16" name="TextBox 15"/>
-          <p:cNvSpPr txBox="1"/>
-          <p:nvPr/>
-        </p:nvSpPr>
-        <p:spPr>
-          <a:xfrm>
-            <a:off x="594360" y="5196078"/>
-            <a:ext cx="2926080" cy="1085850"/>
-          </a:xfrm>
-          <a:prstGeom prst="rect">
-            <a:avLst/>
-          </a:prstGeom>
-          <a:noFill/>
-        </p:spPr>
-        <p:txBody>
-          <a:bodyPr wrap="square" anchor="ctr">
-            <a:spAutoFit/>
-          </a:bodyPr>
-          <a:lstStyle/>
-          <a:p>
-            <a:pPr algn="l">
-              <a:spcAft>
-                <a:spcPts val="0"/>
-              </a:spcAft>
-            </a:pPr>
-            <a:r>
-              <a:rPr sz="1300" b="1" i="0">
-                <a:solidFill>
-                  <a:srgbClr val="0D6E6E"/>
-                </a:solidFill>
-                <a:latin typeface="Calibri"/>
-              </a:rPr>
-              <a:t>Beyond Egypt eligibility</a:t>
-            </a:r>
-          </a:p>
-        </p:txBody>
-      </p:sp>
-      <p:sp>
-        <p:nvSpPr>
-          <p:cNvPr id="17" name="TextBox 16"/>
-          <p:cNvSpPr txBox="1"/>
-          <p:nvPr/>
-        </p:nvSpPr>
-        <p:spPr>
-          <a:xfrm>
-            <a:off x="3657600" y="5196078"/>
-            <a:ext cx="7772400" cy="1085850"/>
-          </a:xfrm>
-          <a:prstGeom prst="rect">
-            <a:avLst/>
-          </a:prstGeom>
-          <a:noFill/>
-        </p:spPr>
-        <p:txBody>
-          <a:bodyPr wrap="square" anchor="ctr">
-            <a:spAutoFit/>
-          </a:bodyPr>
-          <a:lstStyle/>
-          <a:p>
-            <a:pPr algn="l">
-              <a:spcAft>
-                <a:spcPts val="0"/>
-              </a:spcAft>
-            </a:pPr>
-            <a:r>
-              <a:rPr sz="1200" b="0" i="0">
-                <a:solidFill>
-                  <a:srgbClr val="3A4A54"/>
-                </a:solidFill>
-                <a:latin typeface="Calibri"/>
-              </a:rPr>
-              <a:t>Ugandan women innovators are eligible; we bring East Africa context</a:t>
-            </a:r>
-          </a:p>
-        </p:txBody>
-      </p:sp>
-      <p:sp>
-        <p:nvSpPr>
-          <p:cNvPr id="18" name="Rectangle 17"/>
-          <p:cNvSpPr/>
-          <p:nvPr/>
-        </p:nvSpPr>
-        <p:spPr>
-          <a:xfrm>
-            <a:off x="0" y="6565392"/>
-            <a:ext cx="12191695" cy="292608"/>
+            <a:off x="0" y="6583680"/>
+            <a:ext cx="12191695" cy="274320"/>
           </a:xfrm>
           <a:prstGeom prst="rect">
             <a:avLst/>
@@ -5712,7 +4601,6 @@
           <a:ln>
             <a:noFill/>
           </a:ln>
-          <a:effectLst/>
         </p:spPr>
         <p:style>
           <a:lnRef idx="1">
@@ -5738,14 +4626,14 @@
       </p:sp>
       <p:sp>
         <p:nvSpPr>
-          <p:cNvPr id="19" name="TextBox 18"/>
+          <p:cNvPr id="9" name="TextBox 8"/>
           <p:cNvSpPr txBox="1"/>
           <p:nvPr/>
         </p:nvSpPr>
         <p:spPr>
           <a:xfrm>
-            <a:off x="365760" y="6574536"/>
-            <a:ext cx="9144000" cy="274320"/>
+            <a:off x="365760" y="6592824"/>
+            <a:ext cx="9144000" cy="256032"/>
           </a:xfrm>
           <a:prstGeom prst="rect">
             <a:avLst/>
@@ -5753,16 +4641,12 @@
           <a:noFill/>
         </p:spPr>
         <p:txBody>
-          <a:bodyPr wrap="square" anchor="ctr">
+          <a:bodyPr wrap="square">
             <a:spAutoFit/>
           </a:bodyPr>
           <a:lstStyle/>
           <a:p>
-            <a:pPr algn="l">
-              <a:spcAft>
-                <a:spcPts val="0"/>
-              </a:spcAft>
-            </a:pPr>
+            <a:pPr algn="l"/>
             <a:r>
               <a:rPr sz="900" b="0" i="0">
                 <a:solidFill>
@@ -5770,21 +4654,21 @@
                 </a:solidFill>
                 <a:latin typeface="Calibri"/>
               </a:rPr>
-              <a:t>FairBanks FCHIP  |  AUC Venture Lab Women Innovation Fellows  |  Your health, our mission.</a:t>
-            </a:r>
-          </a:p>
-        </p:txBody>
-      </p:sp>
-      <p:sp>
-        <p:nvSpPr>
-          <p:cNvPr id="20" name="TextBox 19"/>
+              <a:t>FairBanks FCHIP | AUC Women Innovation Fellowship | Your health, our mission.</a:t>
+            </a:r>
+          </a:p>
+        </p:txBody>
+      </p:sp>
+      <p:sp>
+        <p:nvSpPr>
+          <p:cNvPr id="10" name="TextBox 9"/>
           <p:cNvSpPr txBox="1"/>
           <p:nvPr/>
         </p:nvSpPr>
         <p:spPr>
           <a:xfrm>
-            <a:off x="11094415" y="6574536"/>
-            <a:ext cx="731520" cy="274320"/>
+            <a:off x="11460175" y="6592824"/>
+            <a:ext cx="457200" cy="256032"/>
           </a:xfrm>
           <a:prstGeom prst="rect">
             <a:avLst/>
@@ -5792,16 +4676,12 @@
           <a:noFill/>
         </p:spPr>
         <p:txBody>
-          <a:bodyPr wrap="square" anchor="ctr">
+          <a:bodyPr wrap="square">
             <a:spAutoFit/>
           </a:bodyPr>
           <a:lstStyle/>
           <a:p>
-            <a:pPr algn="r">
-              <a:spcAft>
-                <a:spcPts val="0"/>
-              </a:spcAft>
-            </a:pPr>
+            <a:pPr algn="r"/>
             <a:r>
               <a:rPr sz="900" b="0" i="0">
                 <a:solidFill>
@@ -5841,7 +4721,7 @@
         <p:spPr>
           <a:xfrm>
             <a:off x="0" y="0"/>
-            <a:ext cx="12191695" cy="960120"/>
+            <a:ext cx="12191695" cy="914400"/>
           </a:xfrm>
           <a:prstGeom prst="rect">
             <a:avLst/>
@@ -5852,7 +4732,6 @@
           <a:ln>
             <a:noFill/>
           </a:ln>
-          <a:effectLst/>
         </p:spPr>
         <p:style>
           <a:lnRef idx="1">
@@ -5885,7 +4764,7 @@
         <p:spPr>
           <a:xfrm>
             <a:off x="0" y="0"/>
-            <a:ext cx="164592" cy="960120"/>
+            <a:ext cx="137160" cy="914400"/>
           </a:xfrm>
           <a:prstGeom prst="rect">
             <a:avLst/>
@@ -5896,7 +4775,6 @@
           <a:ln>
             <a:noFill/>
           </a:ln>
-          <a:effectLst/>
         </p:spPr>
         <p:style>
           <a:lnRef idx="1">
@@ -5928,8 +4806,8 @@
         </p:nvSpPr>
         <p:spPr>
           <a:xfrm>
-            <a:off x="457200" y="109728"/>
-            <a:ext cx="10972800" cy="256032"/>
+            <a:off x="411480" y="91440"/>
+            <a:ext cx="10972800" cy="274320"/>
           </a:xfrm>
           <a:prstGeom prst="rect">
             <a:avLst/>
@@ -5937,16 +4815,12 @@
           <a:noFill/>
         </p:spPr>
         <p:txBody>
-          <a:bodyPr wrap="square" anchor="t">
+          <a:bodyPr wrap="square">
             <a:spAutoFit/>
           </a:bodyPr>
           <a:lstStyle/>
           <a:p>
-            <a:pPr algn="l">
-              <a:spcAft>
-                <a:spcPts val="0"/>
-              </a:spcAft>
-            </a:pPr>
+            <a:pPr algn="l"/>
             <a:r>
               <a:rPr sz="1100" b="1" i="0">
                 <a:solidFill>
@@ -5954,7 +4828,7 @@
                 </a:solidFill>
                 <a:latin typeface="Calibri"/>
               </a:rPr>
-              <a:t>WHY FAIRBANKS</a:t>
+              <a:t>COHORT VALUE</a:t>
             </a:r>
           </a:p>
         </p:txBody>
@@ -5967,8 +4841,8 @@
         </p:nvSpPr>
         <p:spPr>
           <a:xfrm>
-            <a:off x="457200" y="384048"/>
-            <a:ext cx="11247120" cy="475488"/>
+            <a:off x="411480" y="384048"/>
+            <a:ext cx="10972800" cy="457200"/>
           </a:xfrm>
           <a:prstGeom prst="rect">
             <a:avLst/>
@@ -5976,31 +4850,27 @@
           <a:noFill/>
         </p:spPr>
         <p:txBody>
-          <a:bodyPr wrap="square" anchor="t">
+          <a:bodyPr wrap="square">
             <a:spAutoFit/>
           </a:bodyPr>
           <a:lstStyle/>
           <a:p>
-            <a:pPr algn="l">
-              <a:spcAft>
-                <a:spcPts val="0"/>
-              </a:spcAft>
-            </a:pPr>
-            <a:r>
-              <a:rPr sz="2200" b="1" i="0">
+            <a:pPr algn="l"/>
+            <a:r>
+              <a:rPr sz="2400" b="1" i="0">
                 <a:solidFill>
                   <a:srgbClr val="0A1F2E"/>
                 </a:solidFill>
                 <a:latin typeface="Calibri"/>
               </a:rPr>
-              <a:t>A live community health ecosystem</a:t>
+              <a:t>Field validation Egypt–Africa cohorts can learn from</a:t>
             </a:r>
           </a:p>
         </p:txBody>
       </p:sp>
       <p:pic>
         <p:nvPicPr>
-          <p:cNvPr id="6" name="Picture 5" descr="outreach_facilitator_canopy_01_opt.jpg"/>
+          <p:cNvPr id="6" name="Picture 5" descr="outreach_mobile_phone_demo_01_opt.jpg"/>
           <p:cNvPicPr>
             <a:picLocks noChangeAspect="1"/>
           </p:cNvPicPr>
@@ -6014,8 +4884,8 @@
         </p:blipFill>
         <p:spPr>
           <a:xfrm>
-            <a:off x="411480" y="1943753"/>
-            <a:ext cx="5486400" cy="3656293"/>
+            <a:off x="411480" y="1844040"/>
+            <a:ext cx="5303520" cy="3535680"/>
           </a:xfrm>
           <a:prstGeom prst="rect">
             <a:avLst/>
@@ -6030,8 +4900,8 @@
         </p:nvSpPr>
         <p:spPr>
           <a:xfrm>
-            <a:off x="6217920" y="1234440"/>
-            <a:ext cx="5486400" cy="5074920"/>
+            <a:off x="5943600" y="1097280"/>
+            <a:ext cx="5760720" cy="5029200"/>
           </a:xfrm>
           <a:prstGeom prst="rect">
             <a:avLst/>
@@ -6044,99 +4914,19 @@
           </a:bodyPr>
           <a:lstStyle/>
           <a:p>
-            <a:pPr>
-              <a:spcAft>
-                <a:spcPts val="800"/>
-              </a:spcAft>
-            </a:pPr>
-            <a:r>
-              <a:rPr sz="1400">
+            <a:pPr algn="l"/>
+            <a:r>
+              <a:rPr sz="1700" b="0" i="0">
                 <a:solidFill>
                   <a:srgbClr val="1E2F38"/>
                 </a:solidFill>
                 <a:latin typeface="Calibri"/>
               </a:rPr>
-              <a:t>•  Functioning FairBanks Medical Centre with clinic, pharmacy, and diagnostics</a:t>
-            </a:r>
-          </a:p>
-          <a:p>
-            <a:pPr>
-              <a:spcAft>
-                <a:spcPts val="800"/>
-              </a:spcAft>
-            </a:pPr>
-            <a:r>
-              <a:rPr sz="1400">
-                <a:solidFill>
-                  <a:srgbClr val="1E2F38"/>
-                </a:solidFill>
-                <a:latin typeface="Calibri"/>
-              </a:rPr>
-              <a:t>•  Active Community Reach outreach in Bukoto, Kyebando, Kisaasi, Kamwokya, Kikaaya</a:t>
-            </a:r>
-          </a:p>
-          <a:p>
-            <a:pPr>
-              <a:spcAft>
-                <a:spcPts val="800"/>
-              </a:spcAft>
-            </a:pPr>
-            <a:r>
-              <a:rPr sz="1400">
-                <a:solidFill>
-                  <a:srgbClr val="1E2F38"/>
-                </a:solidFill>
-                <a:latin typeface="Calibri"/>
-              </a:rPr>
-              <a:t>•  Trusted CHW and VHT relationships for household visits and referrals</a:t>
-            </a:r>
-          </a:p>
-          <a:p>
-            <a:pPr>
-              <a:spcAft>
-                <a:spcPts val="800"/>
-              </a:spcAft>
-            </a:pPr>
-            <a:r>
-              <a:rPr sz="1400">
-                <a:solidFill>
-                  <a:srgbClr val="1E2F38"/>
-                </a:solidFill>
-                <a:latin typeface="Calibri"/>
-              </a:rPr>
-              <a:t>•  Live programmes: maternal &amp; child health, Gericare, chronic-disease screening</a:t>
-            </a:r>
-          </a:p>
-          <a:p>
-            <a:pPr>
-              <a:spcAft>
-                <a:spcPts val="800"/>
-              </a:spcAft>
-            </a:pPr>
-            <a:r>
-              <a:rPr sz="1400">
-                <a:solidFill>
-                  <a:srgbClr val="1E2F38"/>
-                </a:solidFill>
-                <a:latin typeface="Calibri"/>
-              </a:rPr>
-              <a:t>•  Digital health records and outreach data ready to feed FCHIP</a:t>
-            </a:r>
-          </a:p>
-          <a:p>
-            <a:pPr>
-              <a:spcAft>
-                <a:spcPts val="800"/>
-              </a:spcAft>
-            </a:pPr>
-            <a:r>
-              <a:rPr sz="1400">
-                <a:solidFill>
-                  <a:srgbClr val="1E2F38"/>
-                </a:solidFill>
-                <a:latin typeface="Calibri"/>
-              </a:rPr>
-              <a:t>•  Research and partnership mindset for ethical, evidence-based scale</a:t>
+              <a:t>• Functioning medical centre + pharmacy
+• Live outreach data pipelines
+• Trusted community relationships
+• FCHIP field validation
+• Grassroots ↔ continental bridge</a:t>
             </a:r>
           </a:p>
         </p:txBody>
@@ -6149,8 +4939,8 @@
         </p:nvSpPr>
         <p:spPr>
           <a:xfrm>
-            <a:off x="0" y="6565392"/>
-            <a:ext cx="12191695" cy="292608"/>
+            <a:off x="0" y="6583680"/>
+            <a:ext cx="12191695" cy="274320"/>
           </a:xfrm>
           <a:prstGeom prst="rect">
             <a:avLst/>
@@ -6161,7 +4951,6 @@
           <a:ln>
             <a:noFill/>
           </a:ln>
-          <a:effectLst/>
         </p:spPr>
         <p:style>
           <a:lnRef idx="1">
@@ -6193,8 +4982,8 @@
         </p:nvSpPr>
         <p:spPr>
           <a:xfrm>
-            <a:off x="365760" y="6574536"/>
-            <a:ext cx="9144000" cy="274320"/>
+            <a:off x="365760" y="6592824"/>
+            <a:ext cx="9144000" cy="256032"/>
           </a:xfrm>
           <a:prstGeom prst="rect">
             <a:avLst/>
@@ -6202,16 +4991,12 @@
           <a:noFill/>
         </p:spPr>
         <p:txBody>
-          <a:bodyPr wrap="square" anchor="ctr">
+          <a:bodyPr wrap="square">
             <a:spAutoFit/>
           </a:bodyPr>
           <a:lstStyle/>
           <a:p>
-            <a:pPr algn="l">
-              <a:spcAft>
-                <a:spcPts val="0"/>
-              </a:spcAft>
-            </a:pPr>
+            <a:pPr algn="l"/>
             <a:r>
               <a:rPr sz="900" b="0" i="0">
                 <a:solidFill>
@@ -6219,7 +5004,7 @@
                 </a:solidFill>
                 <a:latin typeface="Calibri"/>
               </a:rPr>
-              <a:t>FairBanks FCHIP  |  AUC Venture Lab Women Innovation Fellows  |  Your health, our mission.</a:t>
+              <a:t>FairBanks FCHIP | AUC Women Innovation Fellowship | Your health, our mission.</a:t>
             </a:r>
           </a:p>
         </p:txBody>
@@ -6232,8 +5017,8 @@
         </p:nvSpPr>
         <p:spPr>
           <a:xfrm>
-            <a:off x="11094415" y="6574536"/>
-            <a:ext cx="731520" cy="274320"/>
+            <a:off x="11460175" y="6592824"/>
+            <a:ext cx="457200" cy="256032"/>
           </a:xfrm>
           <a:prstGeom prst="rect">
             <a:avLst/>
@@ -6241,16 +5026,12 @@
           <a:noFill/>
         </p:spPr>
         <p:txBody>
-          <a:bodyPr wrap="square" anchor="ctr">
+          <a:bodyPr wrap="square">
             <a:spAutoFit/>
           </a:bodyPr>
           <a:lstStyle/>
           <a:p>
-            <a:pPr algn="r">
-              <a:spcAft>
-                <a:spcPts val="0"/>
-              </a:spcAft>
-            </a:pPr>
+            <a:pPr algn="r"/>
             <a:r>
               <a:rPr sz="900" b="0" i="0">
                 <a:solidFill>
@@ -6290,7 +5071,7 @@
         <p:spPr>
           <a:xfrm>
             <a:off x="0" y="0"/>
-            <a:ext cx="12191695" cy="960120"/>
+            <a:ext cx="12191695" cy="914400"/>
           </a:xfrm>
           <a:prstGeom prst="rect">
             <a:avLst/>
@@ -6301,7 +5082,6 @@
           <a:ln>
             <a:noFill/>
           </a:ln>
-          <a:effectLst/>
         </p:spPr>
         <p:style>
           <a:lnRef idx="1">
@@ -6334,7 +5114,7 @@
         <p:spPr>
           <a:xfrm>
             <a:off x="0" y="0"/>
-            <a:ext cx="164592" cy="960120"/>
+            <a:ext cx="137160" cy="914400"/>
           </a:xfrm>
           <a:prstGeom prst="rect">
             <a:avLst/>
@@ -6345,7 +5125,6 @@
           <a:ln>
             <a:noFill/>
           </a:ln>
-          <a:effectLst/>
         </p:spPr>
         <p:style>
           <a:lnRef idx="1">
@@ -6377,8 +5156,8 @@
         </p:nvSpPr>
         <p:spPr>
           <a:xfrm>
-            <a:off x="457200" y="109728"/>
-            <a:ext cx="10972800" cy="256032"/>
+            <a:off x="411480" y="91440"/>
+            <a:ext cx="10972800" cy="274320"/>
           </a:xfrm>
           <a:prstGeom prst="rect">
             <a:avLst/>
@@ -6386,16 +5165,12 @@
           <a:noFill/>
         </p:spPr>
         <p:txBody>
-          <a:bodyPr wrap="square" anchor="t">
+          <a:bodyPr wrap="square">
             <a:spAutoFit/>
           </a:bodyPr>
           <a:lstStyle/>
           <a:p>
-            <a:pPr algn="l">
-              <a:spcAft>
-                <a:spcPts val="0"/>
-              </a:spcAft>
-            </a:pPr>
+            <a:pPr algn="l"/>
             <a:r>
               <a:rPr sz="1100" b="1" i="0">
                 <a:solidFill>
@@ -6403,7 +5178,7 @@
                 </a:solidFill>
                 <a:latin typeface="Calibri"/>
               </a:rPr>
-              <a:t>THE PLAN</a:t>
+              <a:t>SEP–OCT 2026</a:t>
             </a:r>
           </a:p>
         </p:txBody>
@@ -6416,8 +5191,8 @@
         </p:nvSpPr>
         <p:spPr>
           <a:xfrm>
-            <a:off x="457200" y="384048"/>
-            <a:ext cx="11247120" cy="475488"/>
+            <a:off x="411480" y="384048"/>
+            <a:ext cx="10972800" cy="457200"/>
           </a:xfrm>
           <a:prstGeom prst="rect">
             <a:avLst/>
@@ -6425,38 +5200,122 @@
           <a:noFill/>
         </p:spPr>
         <p:txBody>
-          <a:bodyPr wrap="square" anchor="t">
+          <a:bodyPr wrap="square">
             <a:spAutoFit/>
           </a:bodyPr>
           <a:lstStyle/>
           <a:p>
-            <a:pPr algn="l">
-              <a:spcAft>
-                <a:spcPts val="0"/>
-              </a:spcAft>
-            </a:pPr>
-            <a:r>
-              <a:rPr sz="2200" b="1" i="0">
+            <a:pPr algn="l"/>
+            <a:r>
+              <a:rPr sz="2400" b="1" i="0">
                 <a:solidFill>
                   <a:srgbClr val="0A1F2E"/>
                 </a:solidFill>
                 <a:latin typeface="Calibri"/>
               </a:rPr>
-              <a:t>Fellowship journey and return plan</a:t>
-            </a:r>
-          </a:p>
-        </p:txBody>
-      </p:sp>
-      <p:sp>
-        <p:nvSpPr>
-          <p:cNvPr id="6" name="TextBox 5"/>
+              <a:t>September–October 2026 — concrete outcomes</a:t>
+            </a:r>
+          </a:p>
+        </p:txBody>
+      </p:sp>
+      <p:sp>
+        <p:nvSpPr>
+          <p:cNvPr id="6" name="Rectangle 5"/>
+          <p:cNvSpPr/>
+          <p:nvPr/>
+        </p:nvSpPr>
+        <p:spPr>
+          <a:xfrm>
+            <a:off x="457200" y="1143000"/>
+            <a:ext cx="11155680" cy="914400"/>
+          </a:xfrm>
+          <a:prstGeom prst="rect">
+            <a:avLst/>
+          </a:prstGeom>
+          <a:solidFill>
+            <a:srgbClr val="FFFFFF"/>
+          </a:solidFill>
+          <a:ln>
+            <a:solidFill>
+              <a:srgbClr val="D0DCDC"/>
+            </a:solidFill>
+          </a:ln>
+        </p:spPr>
+        <p:style>
+          <a:lnRef idx="1">
+            <a:schemeClr val="accent1"/>
+          </a:lnRef>
+          <a:fillRef idx="3">
+            <a:schemeClr val="accent1"/>
+          </a:fillRef>
+          <a:effectRef idx="2">
+            <a:schemeClr val="accent1"/>
+          </a:effectRef>
+          <a:fontRef idx="minor">
+            <a:schemeClr val="lt1"/>
+          </a:fontRef>
+        </p:style>
+        <p:txBody>
+          <a:bodyPr rtlCol="0" anchor="ctr"/>
+          <a:lstStyle/>
+          <a:p>
+            <a:pPr algn="ctr"/>
+          </a:p>
+        </p:txBody>
+      </p:sp>
+      <p:sp>
+        <p:nvSpPr>
+          <p:cNvPr id="7" name="Rectangle 6"/>
+          <p:cNvSpPr/>
+          <p:nvPr/>
+        </p:nvSpPr>
+        <p:spPr>
+          <a:xfrm>
+            <a:off x="457200" y="1143000"/>
+            <a:ext cx="109728" cy="914400"/>
+          </a:xfrm>
+          <a:prstGeom prst="rect">
+            <a:avLst/>
+          </a:prstGeom>
+          <a:solidFill>
+            <a:srgbClr val="0D6E6E"/>
+          </a:solidFill>
+          <a:ln>
+            <a:noFill/>
+          </a:ln>
+        </p:spPr>
+        <p:style>
+          <a:lnRef idx="1">
+            <a:schemeClr val="accent1"/>
+          </a:lnRef>
+          <a:fillRef idx="3">
+            <a:schemeClr val="accent1"/>
+          </a:fillRef>
+          <a:effectRef idx="2">
+            <a:schemeClr val="accent1"/>
+          </a:effectRef>
+          <a:fontRef idx="minor">
+            <a:schemeClr val="lt1"/>
+          </a:fontRef>
+        </p:style>
+        <p:txBody>
+          <a:bodyPr rtlCol="0" anchor="ctr"/>
+          <a:lstStyle/>
+          <a:p>
+            <a:pPr algn="ctr"/>
+          </a:p>
+        </p:txBody>
+      </p:sp>
+      <p:sp>
+        <p:nvSpPr>
+          <p:cNvPr id="8" name="TextBox 7"/>
           <p:cNvSpPr txBox="1"/>
           <p:nvPr/>
         </p:nvSpPr>
         <p:spPr>
           <a:xfrm>
-            <a:off x="502920" y="1234440"/>
-            <a:ext cx="5760720" cy="5074920"/>
+            <a:off x="685800" y="1280160"/>
+            <a:ext cx="10515600" cy="640080"/>
           </a:xfrm>
           <a:prstGeom prst="rect">
             <a:avLst/>
@@ -6469,105 +5328,398 @@
           </a:bodyPr>
           <a:lstStyle/>
           <a:p>
-            <a:pPr>
-              <a:spcAft>
-                <a:spcPts val="800"/>
-              </a:spcAft>
-            </a:pPr>
-            <a:r>
-              <a:rPr sz="1500">
+            <a:pPr algn="l"/>
+            <a:r>
+              <a:rPr sz="1500" b="0" i="0">
                 <a:solidFill>
                   <a:srgbClr val="1E2F38"/>
                 </a:solidFill>
                 <a:latin typeface="Calibri"/>
               </a:rPr>
-              <a:t>•  Attend the full Cairo fellowship (1 Sep–31 Oct 2026) with focus on leadership and fundraising readiness</a:t>
-            </a:r>
-          </a:p>
-          <a:p>
-            <a:pPr>
-              <a:spcAft>
-                <a:spcPts val="800"/>
-              </a:spcAft>
-            </a:pPr>
-            <a:r>
-              <a:rPr sz="1500">
+              <a:t>Leadership labs: decision-making under uncertainty in community health markets</a:t>
+            </a:r>
+          </a:p>
+        </p:txBody>
+      </p:sp>
+      <p:sp>
+        <p:nvSpPr>
+          <p:cNvPr id="9" name="Rectangle 8"/>
+          <p:cNvSpPr/>
+          <p:nvPr/>
+        </p:nvSpPr>
+        <p:spPr>
+          <a:xfrm>
+            <a:off x="457200" y="2194560"/>
+            <a:ext cx="11155680" cy="914400"/>
+          </a:xfrm>
+          <a:prstGeom prst="rect">
+            <a:avLst/>
+          </a:prstGeom>
+          <a:solidFill>
+            <a:srgbClr val="FFFFFF"/>
+          </a:solidFill>
+          <a:ln>
+            <a:solidFill>
+              <a:srgbClr val="D0DCDC"/>
+            </a:solidFill>
+          </a:ln>
+        </p:spPr>
+        <p:style>
+          <a:lnRef idx="1">
+            <a:schemeClr val="accent1"/>
+          </a:lnRef>
+          <a:fillRef idx="3">
+            <a:schemeClr val="accent1"/>
+          </a:fillRef>
+          <a:effectRef idx="2">
+            <a:schemeClr val="accent1"/>
+          </a:effectRef>
+          <a:fontRef idx="minor">
+            <a:schemeClr val="lt1"/>
+          </a:fontRef>
+        </p:style>
+        <p:txBody>
+          <a:bodyPr rtlCol="0" anchor="ctr"/>
+          <a:lstStyle/>
+          <a:p>
+            <a:pPr algn="ctr"/>
+          </a:p>
+        </p:txBody>
+      </p:sp>
+      <p:sp>
+        <p:nvSpPr>
+          <p:cNvPr id="10" name="Rectangle 9"/>
+          <p:cNvSpPr/>
+          <p:nvPr/>
+        </p:nvSpPr>
+        <p:spPr>
+          <a:xfrm>
+            <a:off x="457200" y="2194560"/>
+            <a:ext cx="109728" cy="914400"/>
+          </a:xfrm>
+          <a:prstGeom prst="rect">
+            <a:avLst/>
+          </a:prstGeom>
+          <a:solidFill>
+            <a:srgbClr val="0D6E6E"/>
+          </a:solidFill>
+          <a:ln>
+            <a:noFill/>
+          </a:ln>
+        </p:spPr>
+        <p:style>
+          <a:lnRef idx="1">
+            <a:schemeClr val="accent1"/>
+          </a:lnRef>
+          <a:fillRef idx="3">
+            <a:schemeClr val="accent1"/>
+          </a:fillRef>
+          <a:effectRef idx="2">
+            <a:schemeClr val="accent1"/>
+          </a:effectRef>
+          <a:fontRef idx="minor">
+            <a:schemeClr val="lt1"/>
+          </a:fontRef>
+        </p:style>
+        <p:txBody>
+          <a:bodyPr rtlCol="0" anchor="ctr"/>
+          <a:lstStyle/>
+          <a:p>
+            <a:pPr algn="ctr"/>
+          </a:p>
+        </p:txBody>
+      </p:sp>
+      <p:sp>
+        <p:nvSpPr>
+          <p:cNvPr id="11" name="TextBox 10"/>
+          <p:cNvSpPr txBox="1"/>
+          <p:nvPr/>
+        </p:nvSpPr>
+        <p:spPr>
+          <a:xfrm>
+            <a:off x="685800" y="2331720"/>
+            <a:ext cx="10515600" cy="640080"/>
+          </a:xfrm>
+          <a:prstGeom prst="rect">
+            <a:avLst/>
+          </a:prstGeom>
+          <a:noFill/>
+        </p:spPr>
+        <p:txBody>
+          <a:bodyPr wrap="square">
+            <a:spAutoFit/>
+          </a:bodyPr>
+          <a:lstStyle/>
+          <a:p>
+            <a:pPr algn="l"/>
+            <a:r>
+              <a:rPr sz="1500" b="0" i="0">
                 <a:solidFill>
                   <a:srgbClr val="1E2F38"/>
                 </a:solidFill>
                 <a:latin typeface="Calibri"/>
               </a:rPr>
-              <a:t>•  Translate FairBanks Community Reach cascade into investor-ready narrative and metrics</a:t>
-            </a:r>
-          </a:p>
-          <a:p>
-            <a:pPr>
-              <a:spcAft>
-                <a:spcPts val="800"/>
-              </a:spcAft>
-            </a:pPr>
-            <a:r>
-              <a:rPr sz="1500">
+              <a:t>Mentor hours with HealthTech founders and investors in AUC’s ecosystem</a:t>
+            </a:r>
+          </a:p>
+        </p:txBody>
+      </p:sp>
+      <p:sp>
+        <p:nvSpPr>
+          <p:cNvPr id="12" name="Rectangle 11"/>
+          <p:cNvSpPr/>
+          <p:nvPr/>
+        </p:nvSpPr>
+        <p:spPr>
+          <a:xfrm>
+            <a:off x="457200" y="3246120"/>
+            <a:ext cx="11155680" cy="914400"/>
+          </a:xfrm>
+          <a:prstGeom prst="rect">
+            <a:avLst/>
+          </a:prstGeom>
+          <a:solidFill>
+            <a:srgbClr val="FFFFFF"/>
+          </a:solidFill>
+          <a:ln>
+            <a:solidFill>
+              <a:srgbClr val="D0DCDC"/>
+            </a:solidFill>
+          </a:ln>
+        </p:spPr>
+        <p:style>
+          <a:lnRef idx="1">
+            <a:schemeClr val="accent1"/>
+          </a:lnRef>
+          <a:fillRef idx="3">
+            <a:schemeClr val="accent1"/>
+          </a:fillRef>
+          <a:effectRef idx="2">
+            <a:schemeClr val="accent1"/>
+          </a:effectRef>
+          <a:fontRef idx="minor">
+            <a:schemeClr val="lt1"/>
+          </a:fontRef>
+        </p:style>
+        <p:txBody>
+          <a:bodyPr rtlCol="0" anchor="ctr"/>
+          <a:lstStyle/>
+          <a:p>
+            <a:pPr algn="ctr"/>
+          </a:p>
+        </p:txBody>
+      </p:sp>
+      <p:sp>
+        <p:nvSpPr>
+          <p:cNvPr id="13" name="Rectangle 12"/>
+          <p:cNvSpPr/>
+          <p:nvPr/>
+        </p:nvSpPr>
+        <p:spPr>
+          <a:xfrm>
+            <a:off x="457200" y="3246120"/>
+            <a:ext cx="109728" cy="914400"/>
+          </a:xfrm>
+          <a:prstGeom prst="rect">
+            <a:avLst/>
+          </a:prstGeom>
+          <a:solidFill>
+            <a:srgbClr val="0D6E6E"/>
+          </a:solidFill>
+          <a:ln>
+            <a:noFill/>
+          </a:ln>
+        </p:spPr>
+        <p:style>
+          <a:lnRef idx="1">
+            <a:schemeClr val="accent1"/>
+          </a:lnRef>
+          <a:fillRef idx="3">
+            <a:schemeClr val="accent1"/>
+          </a:fillRef>
+          <a:effectRef idx="2">
+            <a:schemeClr val="accent1"/>
+          </a:effectRef>
+          <a:fontRef idx="minor">
+            <a:schemeClr val="lt1"/>
+          </a:fontRef>
+        </p:style>
+        <p:txBody>
+          <a:bodyPr rtlCol="0" anchor="ctr"/>
+          <a:lstStyle/>
+          <a:p>
+            <a:pPr algn="ctr"/>
+          </a:p>
+        </p:txBody>
+      </p:sp>
+      <p:sp>
+        <p:nvSpPr>
+          <p:cNvPr id="14" name="TextBox 13"/>
+          <p:cNvSpPr txBox="1"/>
+          <p:nvPr/>
+        </p:nvSpPr>
+        <p:spPr>
+          <a:xfrm>
+            <a:off x="685800" y="3383280"/>
+            <a:ext cx="10515600" cy="640080"/>
+          </a:xfrm>
+          <a:prstGeom prst="rect">
+            <a:avLst/>
+          </a:prstGeom>
+          <a:noFill/>
+        </p:spPr>
+        <p:txBody>
+          <a:bodyPr wrap="square">
+            <a:spAutoFit/>
+          </a:bodyPr>
+          <a:lstStyle/>
+          <a:p>
+            <a:pPr algn="l"/>
+            <a:r>
+              <a:rPr sz="1500" b="0" i="0">
                 <a:solidFill>
                   <a:srgbClr val="1E2F38"/>
                 </a:solidFill>
                 <a:latin typeface="Calibri"/>
               </a:rPr>
-              <a:t>•  Map partnership opportunities with mentors and peers for CHW tools and district pilots</a:t>
-            </a:r>
-          </a:p>
-          <a:p>
-            <a:pPr>
-              <a:spcAft>
-                <a:spcPts val="800"/>
-              </a:spcAft>
-            </a:pPr>
-            <a:r>
-              <a:rPr sz="1500">
+              <a:t>Cross-cultural collaboration with fellows from Egypt, Denmark links, and beyond</a:t>
+            </a:r>
+          </a:p>
+        </p:txBody>
+      </p:sp>
+      <p:sp>
+        <p:nvSpPr>
+          <p:cNvPr id="15" name="Rectangle 14"/>
+          <p:cNvSpPr/>
+          <p:nvPr/>
+        </p:nvSpPr>
+        <p:spPr>
+          <a:xfrm>
+            <a:off x="457200" y="4297680"/>
+            <a:ext cx="11155680" cy="914400"/>
+          </a:xfrm>
+          <a:prstGeom prst="rect">
+            <a:avLst/>
+          </a:prstGeom>
+          <a:solidFill>
+            <a:srgbClr val="FFFFFF"/>
+          </a:solidFill>
+          <a:ln>
+            <a:solidFill>
+              <a:srgbClr val="D0DCDC"/>
+            </a:solidFill>
+          </a:ln>
+        </p:spPr>
+        <p:style>
+          <a:lnRef idx="1">
+            <a:schemeClr val="accent1"/>
+          </a:lnRef>
+          <a:fillRef idx="3">
+            <a:schemeClr val="accent1"/>
+          </a:fillRef>
+          <a:effectRef idx="2">
+            <a:schemeClr val="accent1"/>
+          </a:effectRef>
+          <a:fontRef idx="minor">
+            <a:schemeClr val="lt1"/>
+          </a:fontRef>
+        </p:style>
+        <p:txBody>
+          <a:bodyPr rtlCol="0" anchor="ctr"/>
+          <a:lstStyle/>
+          <a:p>
+            <a:pPr algn="ctr"/>
+          </a:p>
+        </p:txBody>
+      </p:sp>
+      <p:sp>
+        <p:nvSpPr>
+          <p:cNvPr id="16" name="Rectangle 15"/>
+          <p:cNvSpPr/>
+          <p:nvPr/>
+        </p:nvSpPr>
+        <p:spPr>
+          <a:xfrm>
+            <a:off x="457200" y="4297680"/>
+            <a:ext cx="109728" cy="914400"/>
+          </a:xfrm>
+          <a:prstGeom prst="rect">
+            <a:avLst/>
+          </a:prstGeom>
+          <a:solidFill>
+            <a:srgbClr val="0D6E6E"/>
+          </a:solidFill>
+          <a:ln>
+            <a:noFill/>
+          </a:ln>
+        </p:spPr>
+        <p:style>
+          <a:lnRef idx="1">
+            <a:schemeClr val="accent1"/>
+          </a:lnRef>
+          <a:fillRef idx="3">
+            <a:schemeClr val="accent1"/>
+          </a:fillRef>
+          <a:effectRef idx="2">
+            <a:schemeClr val="accent1"/>
+          </a:effectRef>
+          <a:fontRef idx="minor">
+            <a:schemeClr val="lt1"/>
+          </a:fontRef>
+        </p:style>
+        <p:txBody>
+          <a:bodyPr rtlCol="0" anchor="ctr"/>
+          <a:lstStyle/>
+          <a:p>
+            <a:pPr algn="ctr"/>
+          </a:p>
+        </p:txBody>
+      </p:sp>
+      <p:sp>
+        <p:nvSpPr>
+          <p:cNvPr id="17" name="TextBox 16"/>
+          <p:cNvSpPr txBox="1"/>
+          <p:nvPr/>
+        </p:nvSpPr>
+        <p:spPr>
+          <a:xfrm>
+            <a:off x="685800" y="4434840"/>
+            <a:ext cx="10515600" cy="640080"/>
+          </a:xfrm>
+          <a:prstGeom prst="rect">
+            <a:avLst/>
+          </a:prstGeom>
+          <a:noFill/>
+        </p:spPr>
+        <p:txBody>
+          <a:bodyPr wrap="square">
+            <a:spAutoFit/>
+          </a:bodyPr>
+          <a:lstStyle/>
+          <a:p>
+            <a:pPr algn="l"/>
+            <a:r>
+              <a:rPr sz="1500" b="0" i="0">
                 <a:solidFill>
                   <a:srgbClr val="1E2F38"/>
                 </a:solidFill>
                 <a:latin typeface="Calibri"/>
               </a:rPr>
-              <a:t>•  Return with a 90-day execution plan for FCHIP MVP milestones in Kampala catchments</a:t>
-            </a:r>
-          </a:p>
-        </p:txBody>
-      </p:sp>
-      <p:pic>
-        <p:nvPicPr>
-          <p:cNvPr id="7" name="Picture 6" descr="indoor_training_staff_presenting_01_opt.jpg"/>
-          <p:cNvPicPr>
-            <a:picLocks noChangeAspect="1"/>
-          </p:cNvPicPr>
-          <p:nvPr/>
-        </p:nvPicPr>
-        <p:blipFill>
-          <a:blip r:embed="rId2"/>
-          <a:stretch>
-            <a:fillRect/>
-          </a:stretch>
-        </p:blipFill>
-        <p:spPr>
-          <a:xfrm>
-            <a:off x="6492240" y="2035160"/>
-            <a:ext cx="5212080" cy="3473479"/>
-          </a:xfrm>
-          <a:prstGeom prst="rect">
-            <a:avLst/>
-          </a:prstGeom>
-        </p:spPr>
-      </p:pic>
-      <p:sp>
-        <p:nvSpPr>
-          <p:cNvPr id="8" name="Rectangle 7"/>
+              <a:t>Pitch refinement for FCHIP as a women-led, Africa-rooted intelligence company</a:t>
+            </a:r>
+          </a:p>
+        </p:txBody>
+      </p:sp>
+      <p:sp>
+        <p:nvSpPr>
+          <p:cNvPr id="18" name="Rectangle 17"/>
           <p:cNvSpPr/>
           <p:nvPr/>
         </p:nvSpPr>
         <p:spPr>
           <a:xfrm>
-            <a:off x="0" y="6565392"/>
-            <a:ext cx="12191695" cy="292608"/>
+            <a:off x="0" y="6583680"/>
+            <a:ext cx="12191695" cy="274320"/>
           </a:xfrm>
           <a:prstGeom prst="rect">
             <a:avLst/>
@@ -6578,7 +5730,6 @@
           <a:ln>
             <a:noFill/>
           </a:ln>
-          <a:effectLst/>
         </p:spPr>
         <p:style>
           <a:lnRef idx="1">
@@ -6604,14 +5755,14 @@
       </p:sp>
       <p:sp>
         <p:nvSpPr>
-          <p:cNvPr id="9" name="TextBox 8"/>
+          <p:cNvPr id="19" name="TextBox 18"/>
           <p:cNvSpPr txBox="1"/>
           <p:nvPr/>
         </p:nvSpPr>
         <p:spPr>
           <a:xfrm>
-            <a:off x="365760" y="6574536"/>
-            <a:ext cx="9144000" cy="274320"/>
+            <a:off x="365760" y="6592824"/>
+            <a:ext cx="9144000" cy="256032"/>
           </a:xfrm>
           <a:prstGeom prst="rect">
             <a:avLst/>
@@ -6619,16 +5770,12 @@
           <a:noFill/>
         </p:spPr>
         <p:txBody>
-          <a:bodyPr wrap="square" anchor="ctr">
+          <a:bodyPr wrap="square">
             <a:spAutoFit/>
           </a:bodyPr>
           <a:lstStyle/>
           <a:p>
-            <a:pPr algn="l">
-              <a:spcAft>
-                <a:spcPts val="0"/>
-              </a:spcAft>
-            </a:pPr>
+            <a:pPr algn="l"/>
             <a:r>
               <a:rPr sz="900" b="0" i="0">
                 <a:solidFill>
@@ -6636,21 +5783,21 @@
                 </a:solidFill>
                 <a:latin typeface="Calibri"/>
               </a:rPr>
-              <a:t>FairBanks FCHIP  |  AUC Venture Lab Women Innovation Fellows  |  Your health, our mission.</a:t>
-            </a:r>
-          </a:p>
-        </p:txBody>
-      </p:sp>
-      <p:sp>
-        <p:nvSpPr>
-          <p:cNvPr id="10" name="TextBox 9"/>
+              <a:t>FairBanks FCHIP | AUC Women Innovation Fellowship | Your health, our mission.</a:t>
+            </a:r>
+          </a:p>
+        </p:txBody>
+      </p:sp>
+      <p:sp>
+        <p:nvSpPr>
+          <p:cNvPr id="20" name="TextBox 19"/>
           <p:cNvSpPr txBox="1"/>
           <p:nvPr/>
         </p:nvSpPr>
         <p:spPr>
           <a:xfrm>
-            <a:off x="11094415" y="6574536"/>
-            <a:ext cx="731520" cy="274320"/>
+            <a:off x="11460175" y="6592824"/>
+            <a:ext cx="457200" cy="256032"/>
           </a:xfrm>
           <a:prstGeom prst="rect">
             <a:avLst/>
@@ -6658,16 +5805,12 @@
           <a:noFill/>
         </p:spPr>
         <p:txBody>
-          <a:bodyPr wrap="square" anchor="ctr">
+          <a:bodyPr wrap="square">
             <a:spAutoFit/>
           </a:bodyPr>
           <a:lstStyle/>
           <a:p>
-            <a:pPr algn="r">
-              <a:spcAft>
-                <a:spcPts val="0"/>
-              </a:spcAft>
-            </a:pPr>
+            <a:pPr algn="r"/>
             <a:r>
               <a:rPr sz="900" b="0" i="0">
                 <a:solidFill>
@@ -6707,7 +5850,7 @@
         <p:spPr>
           <a:xfrm>
             <a:off x="0" y="0"/>
-            <a:ext cx="12191695" cy="960120"/>
+            <a:ext cx="12191695" cy="914400"/>
           </a:xfrm>
           <a:prstGeom prst="rect">
             <a:avLst/>
@@ -6718,7 +5861,6 @@
           <a:ln>
             <a:noFill/>
           </a:ln>
-          <a:effectLst/>
         </p:spPr>
         <p:style>
           <a:lnRef idx="1">
@@ -6751,7 +5893,7 @@
         <p:spPr>
           <a:xfrm>
             <a:off x="0" y="0"/>
-            <a:ext cx="164592" cy="960120"/>
+            <a:ext cx="137160" cy="914400"/>
           </a:xfrm>
           <a:prstGeom prst="rect">
             <a:avLst/>
@@ -6762,7 +5904,6 @@
           <a:ln>
             <a:noFill/>
           </a:ln>
-          <a:effectLst/>
         </p:spPr>
         <p:style>
           <a:lnRef idx="1">
@@ -6794,8 +5935,8 @@
         </p:nvSpPr>
         <p:spPr>
           <a:xfrm>
-            <a:off x="457200" y="109728"/>
-            <a:ext cx="10972800" cy="256032"/>
+            <a:off x="411480" y="91440"/>
+            <a:ext cx="10972800" cy="274320"/>
           </a:xfrm>
           <a:prstGeom prst="rect">
             <a:avLst/>
@@ -6803,16 +5944,12 @@
           <a:noFill/>
         </p:spPr>
         <p:txBody>
-          <a:bodyPr wrap="square" anchor="t">
+          <a:bodyPr wrap="square">
             <a:spAutoFit/>
           </a:bodyPr>
           <a:lstStyle/>
           <a:p>
-            <a:pPr algn="l">
-              <a:spcAft>
-                <a:spcPts val="0"/>
-              </a:spcAft>
-            </a:pPr>
+            <a:pPr algn="l"/>
             <a:r>
               <a:rPr sz="1100" b="1" i="0">
                 <a:solidFill>
@@ -6820,7 +5957,7 @@
                 </a:solidFill>
                 <a:latin typeface="Calibri"/>
               </a:rPr>
-              <a:t>DEEP TECHNOLOGY</a:t>
+              <a:t>SHARED OUTCOME</a:t>
             </a:r>
           </a:p>
         </p:txBody>
@@ -6833,8 +5970,8 @@
         </p:nvSpPr>
         <p:spPr>
           <a:xfrm>
-            <a:off x="457200" y="384048"/>
-            <a:ext cx="11247120" cy="475488"/>
+            <a:off x="411480" y="384048"/>
+            <a:ext cx="10972800" cy="457200"/>
           </a:xfrm>
           <a:prstGeom prst="rect">
             <a:avLst/>
@@ -6842,62 +5979,34 @@
           <a:noFill/>
         </p:spPr>
         <p:txBody>
-          <a:bodyPr wrap="square" anchor="t">
+          <a:bodyPr wrap="square">
             <a:spAutoFit/>
           </a:bodyPr>
           <a:lstStyle/>
           <a:p>
-            <a:pPr algn="l">
-              <a:spcAft>
-                <a:spcPts val="0"/>
-              </a:spcAft>
-            </a:pPr>
-            <a:r>
-              <a:rPr sz="2200" b="1" i="0">
+            <a:pPr algn="l"/>
+            <a:r>
+              <a:rPr sz="2400" b="1" i="0">
                 <a:solidFill>
                   <a:srgbClr val="0A1F2E"/>
                 </a:solidFill>
                 <a:latin typeface="Calibri"/>
               </a:rPr>
-              <a:t>Intelligence rooted in African community care</a:t>
-            </a:r>
-          </a:p>
-        </p:txBody>
-      </p:sp>
-      <p:pic>
-        <p:nvPicPr>
-          <p:cNvPr id="6" name="Picture 5" descr="deep_tech_collage_opt.jpg"/>
-          <p:cNvPicPr>
-            <a:picLocks noChangeAspect="1"/>
-          </p:cNvPicPr>
-          <p:nvPr/>
-        </p:nvPicPr>
-        <p:blipFill>
-          <a:blip r:embed="rId2"/>
-          <a:stretch>
-            <a:fillRect/>
-          </a:stretch>
-        </p:blipFill>
-        <p:spPr>
-          <a:xfrm>
-            <a:off x="411480" y="2065630"/>
-            <a:ext cx="5120640" cy="3412540"/>
-          </a:xfrm>
-          <a:prstGeom prst="rect">
-            <a:avLst/>
-          </a:prstGeom>
-        </p:spPr>
-      </p:pic>
-      <p:sp>
-        <p:nvSpPr>
-          <p:cNvPr id="7" name="Rectangle 6"/>
+              <a:t>Stronger founder, stronger continental HealthTech story</a:t>
+            </a:r>
+          </a:p>
+        </p:txBody>
+      </p:sp>
+      <p:sp>
+        <p:nvSpPr>
+          <p:cNvPr id="6" name="Rectangle 5"/>
           <p:cNvSpPr/>
           <p:nvPr/>
         </p:nvSpPr>
         <p:spPr>
           <a:xfrm>
-            <a:off x="5852160" y="1197864"/>
-            <a:ext cx="5852160" cy="766572"/>
+            <a:off x="457200" y="1188720"/>
+            <a:ext cx="5394960" cy="4754880"/>
           </a:xfrm>
           <a:prstGeom prst="rect">
             <a:avLst/>
@@ -6905,12 +6014,11 @@
           <a:solidFill>
             <a:srgbClr val="FFFFFF"/>
           </a:solidFill>
-          <a:ln w="9525">
+          <a:ln>
             <a:solidFill>
               <a:srgbClr val="D0DCDC"/>
             </a:solidFill>
           </a:ln>
-          <a:effectLst/>
         </p:spPr>
         <p:style>
           <a:lnRef idx="1">
@@ -6936,14 +6044,14 @@
       </p:sp>
       <p:sp>
         <p:nvSpPr>
-          <p:cNvPr id="8" name="TextBox 7"/>
+          <p:cNvPr id="7" name="TextBox 6"/>
           <p:cNvSpPr txBox="1"/>
           <p:nvPr/>
         </p:nvSpPr>
         <p:spPr>
           <a:xfrm>
-            <a:off x="6035040" y="1252728"/>
-            <a:ext cx="5486400" cy="274320"/>
+            <a:off x="640080" y="1371600"/>
+            <a:ext cx="5029200" cy="365760"/>
           </a:xfrm>
           <a:prstGeom prst="rect">
             <a:avLst/>
@@ -6951,38 +6059,34 @@
           <a:noFill/>
         </p:spPr>
         <p:txBody>
-          <a:bodyPr wrap="square" anchor="t">
+          <a:bodyPr wrap="square">
             <a:spAutoFit/>
           </a:bodyPr>
           <a:lstStyle/>
           <a:p>
-            <a:pPr algn="l">
-              <a:spcAft>
-                <a:spcPts val="0"/>
-              </a:spcAft>
-            </a:pPr>
-            <a:r>
-              <a:rPr sz="1400" b="1" i="0">
+            <a:pPr algn="l"/>
+            <a:r>
+              <a:rPr sz="1600" b="1" i="0">
                 <a:solidFill>
                   <a:srgbClr val="0D6E6E"/>
                 </a:solidFill>
                 <a:latin typeface="Calibri"/>
               </a:rPr>
-              <a:t>Artificial Intelligence</a:t>
-            </a:r>
-          </a:p>
-        </p:txBody>
-      </p:sp>
-      <p:sp>
-        <p:nvSpPr>
-          <p:cNvPr id="9" name="TextBox 8"/>
+              <a:t>FairBanks gains</a:t>
+            </a:r>
+          </a:p>
+        </p:txBody>
+      </p:sp>
+      <p:sp>
+        <p:nvSpPr>
+          <p:cNvPr id="8" name="TextBox 7"/>
           <p:cNvSpPr txBox="1"/>
           <p:nvPr/>
         </p:nvSpPr>
         <p:spPr>
           <a:xfrm>
-            <a:off x="6035040" y="1527048"/>
-            <a:ext cx="5486400" cy="365760"/>
+            <a:off x="640080" y="1828800"/>
+            <a:ext cx="5029200" cy="3657600"/>
           </a:xfrm>
           <a:prstGeom prst="rect">
             <a:avLst/>
@@ -6990,38 +6094,34 @@
           <a:noFill/>
         </p:spPr>
         <p:txBody>
-          <a:bodyPr wrap="square" anchor="t">
+          <a:bodyPr wrap="square">
             <a:spAutoFit/>
           </a:bodyPr>
           <a:lstStyle/>
           <a:p>
-            <a:pPr algn="l">
-              <a:spcAft>
-                <a:spcPts val="0"/>
-              </a:spcAft>
-            </a:pPr>
-            <a:r>
-              <a:rPr sz="1200" b="0" i="0">
+            <a:pPr algn="l"/>
+            <a:r>
+              <a:rPr sz="1400" b="0" i="0">
                 <a:solidFill>
                   <a:srgbClr val="3A4A54"/>
                 </a:solidFill>
                 <a:latin typeface="Calibri"/>
               </a:rPr>
-              <a:t>Outbreak early warning; maternal and NCD risk scoring</a:t>
-            </a:r>
-          </a:p>
-        </p:txBody>
-      </p:sp>
-      <p:sp>
-        <p:nvSpPr>
-          <p:cNvPr id="10" name="Rectangle 9"/>
+              <a:t>World-class accelerator training, continental visibility, and mentor networks that help FCHIP scale beyond Uganda.</a:t>
+            </a:r>
+          </a:p>
+        </p:txBody>
+      </p:sp>
+      <p:sp>
+        <p:nvSpPr>
+          <p:cNvPr id="9" name="Rectangle 8"/>
           <p:cNvSpPr/>
           <p:nvPr/>
         </p:nvSpPr>
         <p:spPr>
           <a:xfrm>
-            <a:off x="5852160" y="2074164"/>
-            <a:ext cx="5852160" cy="766572"/>
+            <a:off x="6217920" y="1188720"/>
+            <a:ext cx="5394960" cy="4754880"/>
           </a:xfrm>
           <a:prstGeom prst="rect">
             <a:avLst/>
@@ -7029,12 +6129,11 @@
           <a:solidFill>
             <a:srgbClr val="FFFFFF"/>
           </a:solidFill>
-          <a:ln w="9525">
+          <a:ln>
             <a:solidFill>
               <a:srgbClr val="D0DCDC"/>
             </a:solidFill>
           </a:ln>
-          <a:effectLst/>
         </p:spPr>
         <p:style>
           <a:lnRef idx="1">
@@ -7060,14 +6159,14 @@
       </p:sp>
       <p:sp>
         <p:nvSpPr>
-          <p:cNvPr id="11" name="TextBox 10"/>
+          <p:cNvPr id="10" name="TextBox 9"/>
           <p:cNvSpPr txBox="1"/>
           <p:nvPr/>
         </p:nvSpPr>
         <p:spPr>
           <a:xfrm>
-            <a:off x="6035040" y="2129028"/>
-            <a:ext cx="5486400" cy="274320"/>
+            <a:off x="6400800" y="1371600"/>
+            <a:ext cx="5029200" cy="365760"/>
           </a:xfrm>
           <a:prstGeom prst="rect">
             <a:avLst/>
@@ -7075,38 +6174,34 @@
           <a:noFill/>
         </p:spPr>
         <p:txBody>
-          <a:bodyPr wrap="square" anchor="t">
+          <a:bodyPr wrap="square">
             <a:spAutoFit/>
           </a:bodyPr>
           <a:lstStyle/>
           <a:p>
-            <a:pPr algn="l">
-              <a:spcAft>
-                <a:spcPts val="0"/>
-              </a:spcAft>
-            </a:pPr>
-            <a:r>
-              <a:rPr sz="1400" b="1" i="0">
+            <a:pPr algn="l"/>
+            <a:r>
+              <a:rPr sz="1600" b="1" i="0">
                 <a:solidFill>
                   <a:srgbClr val="0D6E6E"/>
                 </a:solidFill>
                 <a:latin typeface="Calibri"/>
               </a:rPr>
-              <a:t>Machine Learning</a:t>
-            </a:r>
-          </a:p>
-        </p:txBody>
-      </p:sp>
-      <p:sp>
-        <p:nvSpPr>
-          <p:cNvPr id="12" name="TextBox 11"/>
+              <a:t>AUC Venture Lab gains</a:t>
+            </a:r>
+          </a:p>
+        </p:txBody>
+      </p:sp>
+      <p:sp>
+        <p:nvSpPr>
+          <p:cNvPr id="11" name="TextBox 10"/>
           <p:cNvSpPr txBox="1"/>
           <p:nvPr/>
         </p:nvSpPr>
         <p:spPr>
           <a:xfrm>
-            <a:off x="6035040" y="2403348"/>
-            <a:ext cx="5486400" cy="365760"/>
+            <a:off x="6400800" y="1828800"/>
+            <a:ext cx="5029200" cy="3657600"/>
           </a:xfrm>
           <a:prstGeom prst="rect">
             <a:avLst/>
@@ -7114,534 +6209,34 @@
           <a:noFill/>
         </p:spPr>
         <p:txBody>
-          <a:bodyPr wrap="square" anchor="t">
+          <a:bodyPr wrap="square">
             <a:spAutoFit/>
           </a:bodyPr>
           <a:lstStyle/>
           <a:p>
-            <a:pPr algn="l">
-              <a:spcAft>
-                <a:spcPts val="0"/>
-              </a:spcAft>
-            </a:pPr>
-            <a:r>
-              <a:rPr sz="1200" b="0" i="0">
+            <a:pPr algn="l"/>
+            <a:r>
+              <a:rPr sz="1400" b="0" i="0">
                 <a:solidFill>
                   <a:srgbClr val="3A4A54"/>
                 </a:solidFill>
                 <a:latin typeface="Calibri"/>
               </a:rPr>
-              <a:t>Learn from community patterns, seasons, and outreach outcomes</a:t>
-            </a:r>
-          </a:p>
-        </p:txBody>
-      </p:sp>
-      <p:sp>
-        <p:nvSpPr>
-          <p:cNvPr id="13" name="Rectangle 12"/>
+              <a:t>A fellow bringing live HealthTech field validation, CHW data pipelines, and a compelling women-innovation story from East Africa.</a:t>
+            </a:r>
+          </a:p>
+        </p:txBody>
+      </p:sp>
+      <p:sp>
+        <p:nvSpPr>
+          <p:cNvPr id="12" name="Rectangle 11"/>
           <p:cNvSpPr/>
           <p:nvPr/>
         </p:nvSpPr>
         <p:spPr>
           <a:xfrm>
-            <a:off x="5852160" y="2950464"/>
-            <a:ext cx="5852160" cy="766572"/>
-          </a:xfrm>
-          <a:prstGeom prst="rect">
-            <a:avLst/>
-          </a:prstGeom>
-          <a:solidFill>
-            <a:srgbClr val="FFFFFF"/>
-          </a:solidFill>
-          <a:ln w="9525">
-            <a:solidFill>
-              <a:srgbClr val="D0DCDC"/>
-            </a:solidFill>
-          </a:ln>
-          <a:effectLst/>
-        </p:spPr>
-        <p:style>
-          <a:lnRef idx="1">
-            <a:schemeClr val="accent1"/>
-          </a:lnRef>
-          <a:fillRef idx="3">
-            <a:schemeClr val="accent1"/>
-          </a:fillRef>
-          <a:effectRef idx="2">
-            <a:schemeClr val="accent1"/>
-          </a:effectRef>
-          <a:fontRef idx="minor">
-            <a:schemeClr val="lt1"/>
-          </a:fontRef>
-        </p:style>
-        <p:txBody>
-          <a:bodyPr rtlCol="0" anchor="ctr"/>
-          <a:lstStyle/>
-          <a:p>
-            <a:pPr algn="ctr"/>
-          </a:p>
-        </p:txBody>
-      </p:sp>
-      <p:sp>
-        <p:nvSpPr>
-          <p:cNvPr id="14" name="TextBox 13"/>
-          <p:cNvSpPr txBox="1"/>
-          <p:nvPr/>
-        </p:nvSpPr>
-        <p:spPr>
-          <a:xfrm>
-            <a:off x="6035040" y="3005328"/>
-            <a:ext cx="5486400" cy="274320"/>
-          </a:xfrm>
-          <a:prstGeom prst="rect">
-            <a:avLst/>
-          </a:prstGeom>
-          <a:noFill/>
-        </p:spPr>
-        <p:txBody>
-          <a:bodyPr wrap="square" anchor="t">
-            <a:spAutoFit/>
-          </a:bodyPr>
-          <a:lstStyle/>
-          <a:p>
-            <a:pPr algn="l">
-              <a:spcAft>
-                <a:spcPts val="0"/>
-              </a:spcAft>
-            </a:pPr>
-            <a:r>
-              <a:rPr sz="1400" b="1" i="0">
-                <a:solidFill>
-                  <a:srgbClr val="0D6E6E"/>
-                </a:solidFill>
-                <a:latin typeface="Calibri"/>
-              </a:rPr>
-              <a:t>GIS Mapping</a:t>
-            </a:r>
-          </a:p>
-        </p:txBody>
-      </p:sp>
-      <p:sp>
-        <p:nvSpPr>
-          <p:cNvPr id="15" name="TextBox 14"/>
-          <p:cNvSpPr txBox="1"/>
-          <p:nvPr/>
-        </p:nvSpPr>
-        <p:spPr>
-          <a:xfrm>
-            <a:off x="6035040" y="3279648"/>
-            <a:ext cx="5486400" cy="365760"/>
-          </a:xfrm>
-          <a:prstGeom prst="rect">
-            <a:avLst/>
-          </a:prstGeom>
-          <a:noFill/>
-        </p:spPr>
-        <p:txBody>
-          <a:bodyPr wrap="square" anchor="t">
-            <a:spAutoFit/>
-          </a:bodyPr>
-          <a:lstStyle/>
-          <a:p>
-            <a:pPr algn="l">
-              <a:spcAft>
-                <a:spcPts val="0"/>
-              </a:spcAft>
-            </a:pPr>
-            <a:r>
-              <a:rPr sz="1200" b="0" i="0">
-                <a:solidFill>
-                  <a:srgbClr val="3A4A54"/>
-                </a:solidFill>
-                <a:latin typeface="Calibri"/>
-              </a:rPr>
-              <a:t>Disease distribution, hotspots, and resource gaps</a:t>
-            </a:r>
-          </a:p>
-        </p:txBody>
-      </p:sp>
-      <p:sp>
-        <p:nvSpPr>
-          <p:cNvPr id="16" name="Rectangle 15"/>
-          <p:cNvSpPr/>
-          <p:nvPr/>
-        </p:nvSpPr>
-        <p:spPr>
-          <a:xfrm>
-            <a:off x="5852160" y="3826764"/>
-            <a:ext cx="5852160" cy="766572"/>
-          </a:xfrm>
-          <a:prstGeom prst="rect">
-            <a:avLst/>
-          </a:prstGeom>
-          <a:solidFill>
-            <a:srgbClr val="FFFFFF"/>
-          </a:solidFill>
-          <a:ln w="9525">
-            <a:solidFill>
-              <a:srgbClr val="D0DCDC"/>
-            </a:solidFill>
-          </a:ln>
-          <a:effectLst/>
-        </p:spPr>
-        <p:style>
-          <a:lnRef idx="1">
-            <a:schemeClr val="accent1"/>
-          </a:lnRef>
-          <a:fillRef idx="3">
-            <a:schemeClr val="accent1"/>
-          </a:fillRef>
-          <a:effectRef idx="2">
-            <a:schemeClr val="accent1"/>
-          </a:effectRef>
-          <a:fontRef idx="minor">
-            <a:schemeClr val="lt1"/>
-          </a:fontRef>
-        </p:style>
-        <p:txBody>
-          <a:bodyPr rtlCol="0" anchor="ctr"/>
-          <a:lstStyle/>
-          <a:p>
-            <a:pPr algn="ctr"/>
-          </a:p>
-        </p:txBody>
-      </p:sp>
-      <p:sp>
-        <p:nvSpPr>
-          <p:cNvPr id="17" name="TextBox 16"/>
-          <p:cNvSpPr txBox="1"/>
-          <p:nvPr/>
-        </p:nvSpPr>
-        <p:spPr>
-          <a:xfrm>
-            <a:off x="6035040" y="3881628"/>
-            <a:ext cx="5486400" cy="274320"/>
-          </a:xfrm>
-          <a:prstGeom prst="rect">
-            <a:avLst/>
-          </a:prstGeom>
-          <a:noFill/>
-        </p:spPr>
-        <p:txBody>
-          <a:bodyPr wrap="square" anchor="t">
-            <a:spAutoFit/>
-          </a:bodyPr>
-          <a:lstStyle/>
-          <a:p>
-            <a:pPr algn="l">
-              <a:spcAft>
-                <a:spcPts val="0"/>
-              </a:spcAft>
-            </a:pPr>
-            <a:r>
-              <a:rPr sz="1400" b="1" i="0">
-                <a:solidFill>
-                  <a:srgbClr val="0D6E6E"/>
-                </a:solidFill>
-                <a:latin typeface="Calibri"/>
-              </a:rPr>
-              <a:t>Mobile Data Collection</a:t>
-            </a:r>
-          </a:p>
-        </p:txBody>
-      </p:sp>
-      <p:sp>
-        <p:nvSpPr>
-          <p:cNvPr id="18" name="TextBox 17"/>
-          <p:cNvSpPr txBox="1"/>
-          <p:nvPr/>
-        </p:nvSpPr>
-        <p:spPr>
-          <a:xfrm>
-            <a:off x="6035040" y="4155948"/>
-            <a:ext cx="5486400" cy="365760"/>
-          </a:xfrm>
-          <a:prstGeom prst="rect">
-            <a:avLst/>
-          </a:prstGeom>
-          <a:noFill/>
-        </p:spPr>
-        <p:txBody>
-          <a:bodyPr wrap="square" anchor="t">
-            <a:spAutoFit/>
-          </a:bodyPr>
-          <a:lstStyle/>
-          <a:p>
-            <a:pPr algn="l">
-              <a:spcAft>
-                <a:spcPts val="0"/>
-              </a:spcAft>
-            </a:pPr>
-            <a:r>
-              <a:rPr sz="1200" b="0" i="0">
-                <a:solidFill>
-                  <a:srgbClr val="3A4A54"/>
-                </a:solidFill>
-                <a:latin typeface="Calibri"/>
-              </a:rPr>
-              <a:t>Offline-capable CHW/VHT capture at household level</a:t>
-            </a:r>
-          </a:p>
-        </p:txBody>
-      </p:sp>
-      <p:sp>
-        <p:nvSpPr>
-          <p:cNvPr id="19" name="Rectangle 18"/>
-          <p:cNvSpPr/>
-          <p:nvPr/>
-        </p:nvSpPr>
-        <p:spPr>
-          <a:xfrm>
-            <a:off x="5852160" y="4703064"/>
-            <a:ext cx="5852160" cy="766572"/>
-          </a:xfrm>
-          <a:prstGeom prst="rect">
-            <a:avLst/>
-          </a:prstGeom>
-          <a:solidFill>
-            <a:srgbClr val="FFFFFF"/>
-          </a:solidFill>
-          <a:ln w="9525">
-            <a:solidFill>
-              <a:srgbClr val="D0DCDC"/>
-            </a:solidFill>
-          </a:ln>
-          <a:effectLst/>
-        </p:spPr>
-        <p:style>
-          <a:lnRef idx="1">
-            <a:schemeClr val="accent1"/>
-          </a:lnRef>
-          <a:fillRef idx="3">
-            <a:schemeClr val="accent1"/>
-          </a:fillRef>
-          <a:effectRef idx="2">
-            <a:schemeClr val="accent1"/>
-          </a:effectRef>
-          <a:fontRef idx="minor">
-            <a:schemeClr val="lt1"/>
-          </a:fontRef>
-        </p:style>
-        <p:txBody>
-          <a:bodyPr rtlCol="0" anchor="ctr"/>
-          <a:lstStyle/>
-          <a:p>
-            <a:pPr algn="ctr"/>
-          </a:p>
-        </p:txBody>
-      </p:sp>
-      <p:sp>
-        <p:nvSpPr>
-          <p:cNvPr id="20" name="TextBox 19"/>
-          <p:cNvSpPr txBox="1"/>
-          <p:nvPr/>
-        </p:nvSpPr>
-        <p:spPr>
-          <a:xfrm>
-            <a:off x="6035040" y="4757928"/>
-            <a:ext cx="5486400" cy="274320"/>
-          </a:xfrm>
-          <a:prstGeom prst="rect">
-            <a:avLst/>
-          </a:prstGeom>
-          <a:noFill/>
-        </p:spPr>
-        <p:txBody>
-          <a:bodyPr wrap="square" anchor="t">
-            <a:spAutoFit/>
-          </a:bodyPr>
-          <a:lstStyle/>
-          <a:p>
-            <a:pPr algn="l">
-              <a:spcAft>
-                <a:spcPts val="0"/>
-              </a:spcAft>
-            </a:pPr>
-            <a:r>
-              <a:rPr sz="1400" b="1" i="0">
-                <a:solidFill>
-                  <a:srgbClr val="0D6E6E"/>
-                </a:solidFill>
-                <a:latin typeface="Calibri"/>
-              </a:rPr>
-              <a:t>Cloud Computing</a:t>
-            </a:r>
-          </a:p>
-        </p:txBody>
-      </p:sp>
-      <p:sp>
-        <p:nvSpPr>
-          <p:cNvPr id="21" name="TextBox 20"/>
-          <p:cNvSpPr txBox="1"/>
-          <p:nvPr/>
-        </p:nvSpPr>
-        <p:spPr>
-          <a:xfrm>
-            <a:off x="6035040" y="5032248"/>
-            <a:ext cx="5486400" cy="365760"/>
-          </a:xfrm>
-          <a:prstGeom prst="rect">
-            <a:avLst/>
-          </a:prstGeom>
-          <a:noFill/>
-        </p:spPr>
-        <p:txBody>
-          <a:bodyPr wrap="square" anchor="t">
-            <a:spAutoFit/>
-          </a:bodyPr>
-          <a:lstStyle/>
-          <a:p>
-            <a:pPr algn="l">
-              <a:spcAft>
-                <a:spcPts val="0"/>
-              </a:spcAft>
-            </a:pPr>
-            <a:r>
-              <a:rPr sz="1200" b="0" i="0">
-                <a:solidFill>
-                  <a:srgbClr val="3A4A54"/>
-                </a:solidFill>
-                <a:latin typeface="Calibri"/>
-              </a:rPr>
-              <a:t>Secure sync across facilities and partners</a:t>
-            </a:r>
-          </a:p>
-        </p:txBody>
-      </p:sp>
-      <p:sp>
-        <p:nvSpPr>
-          <p:cNvPr id="22" name="Rectangle 21"/>
-          <p:cNvSpPr/>
-          <p:nvPr/>
-        </p:nvSpPr>
-        <p:spPr>
-          <a:xfrm>
-            <a:off x="5852160" y="5579364"/>
-            <a:ext cx="5852160" cy="766572"/>
-          </a:xfrm>
-          <a:prstGeom prst="rect">
-            <a:avLst/>
-          </a:prstGeom>
-          <a:solidFill>
-            <a:srgbClr val="FFFFFF"/>
-          </a:solidFill>
-          <a:ln w="9525">
-            <a:solidFill>
-              <a:srgbClr val="D0DCDC"/>
-            </a:solidFill>
-          </a:ln>
-          <a:effectLst/>
-        </p:spPr>
-        <p:style>
-          <a:lnRef idx="1">
-            <a:schemeClr val="accent1"/>
-          </a:lnRef>
-          <a:fillRef idx="3">
-            <a:schemeClr val="accent1"/>
-          </a:fillRef>
-          <a:effectRef idx="2">
-            <a:schemeClr val="accent1"/>
-          </a:effectRef>
-          <a:fontRef idx="minor">
-            <a:schemeClr val="lt1"/>
-          </a:fontRef>
-        </p:style>
-        <p:txBody>
-          <a:bodyPr rtlCol="0" anchor="ctr"/>
-          <a:lstStyle/>
-          <a:p>
-            <a:pPr algn="ctr"/>
-          </a:p>
-        </p:txBody>
-      </p:sp>
-      <p:sp>
-        <p:nvSpPr>
-          <p:cNvPr id="23" name="TextBox 22"/>
-          <p:cNvSpPr txBox="1"/>
-          <p:nvPr/>
-        </p:nvSpPr>
-        <p:spPr>
-          <a:xfrm>
-            <a:off x="6035040" y="5634228"/>
-            <a:ext cx="5486400" cy="274320"/>
-          </a:xfrm>
-          <a:prstGeom prst="rect">
-            <a:avLst/>
-          </a:prstGeom>
-          <a:noFill/>
-        </p:spPr>
-        <p:txBody>
-          <a:bodyPr wrap="square" anchor="t">
-            <a:spAutoFit/>
-          </a:bodyPr>
-          <a:lstStyle/>
-          <a:p>
-            <a:pPr algn="l">
-              <a:spcAft>
-                <a:spcPts val="0"/>
-              </a:spcAft>
-            </a:pPr>
-            <a:r>
-              <a:rPr sz="1400" b="1" i="0">
-                <a:solidFill>
-                  <a:srgbClr val="0D6E6E"/>
-                </a:solidFill>
-                <a:latin typeface="Calibri"/>
-              </a:rPr>
-              <a:t>Analytics Dashboards</a:t>
-            </a:r>
-          </a:p>
-        </p:txBody>
-      </p:sp>
-      <p:sp>
-        <p:nvSpPr>
-          <p:cNvPr id="24" name="TextBox 23"/>
-          <p:cNvSpPr txBox="1"/>
-          <p:nvPr/>
-        </p:nvSpPr>
-        <p:spPr>
-          <a:xfrm>
-            <a:off x="6035040" y="5908548"/>
-            <a:ext cx="5486400" cy="365760"/>
-          </a:xfrm>
-          <a:prstGeom prst="rect">
-            <a:avLst/>
-          </a:prstGeom>
-          <a:noFill/>
-        </p:spPr>
-        <p:txBody>
-          <a:bodyPr wrap="square" anchor="t">
-            <a:spAutoFit/>
-          </a:bodyPr>
-          <a:lstStyle/>
-          <a:p>
-            <a:pPr algn="l">
-              <a:spcAft>
-                <a:spcPts val="0"/>
-              </a:spcAft>
-            </a:pPr>
-            <a:r>
-              <a:rPr sz="1200" b="0" i="0">
-                <a:solidFill>
-                  <a:srgbClr val="3A4A54"/>
-                </a:solidFill>
-                <a:latin typeface="Calibri"/>
-              </a:rPr>
-              <a:t>Real-time views for clinics, districts, and NGOs</a:t>
-            </a:r>
-          </a:p>
-        </p:txBody>
-      </p:sp>
-      <p:sp>
-        <p:nvSpPr>
-          <p:cNvPr id="25" name="Rectangle 24"/>
-          <p:cNvSpPr/>
-          <p:nvPr/>
-        </p:nvSpPr>
-        <p:spPr>
-          <a:xfrm>
-            <a:off x="0" y="6565392"/>
-            <a:ext cx="12191695" cy="292608"/>
+            <a:off x="0" y="6583680"/>
+            <a:ext cx="12191695" cy="274320"/>
           </a:xfrm>
           <a:prstGeom prst="rect">
             <a:avLst/>
@@ -7652,7 +6247,6 @@
           <a:ln>
             <a:noFill/>
           </a:ln>
-          <a:effectLst/>
         </p:spPr>
         <p:style>
           <a:lnRef idx="1">
@@ -7678,14 +6272,14 @@
       </p:sp>
       <p:sp>
         <p:nvSpPr>
-          <p:cNvPr id="26" name="TextBox 25"/>
+          <p:cNvPr id="13" name="TextBox 12"/>
           <p:cNvSpPr txBox="1"/>
           <p:nvPr/>
         </p:nvSpPr>
         <p:spPr>
           <a:xfrm>
-            <a:off x="365760" y="6574536"/>
-            <a:ext cx="9144000" cy="274320"/>
+            <a:off x="365760" y="6592824"/>
+            <a:ext cx="9144000" cy="256032"/>
           </a:xfrm>
           <a:prstGeom prst="rect">
             <a:avLst/>
@@ -7693,16 +6287,12 @@
           <a:noFill/>
         </p:spPr>
         <p:txBody>
-          <a:bodyPr wrap="square" anchor="ctr">
+          <a:bodyPr wrap="square">
             <a:spAutoFit/>
           </a:bodyPr>
           <a:lstStyle/>
           <a:p>
-            <a:pPr algn="l">
-              <a:spcAft>
-                <a:spcPts val="0"/>
-              </a:spcAft>
-            </a:pPr>
+            <a:pPr algn="l"/>
             <a:r>
               <a:rPr sz="900" b="0" i="0">
                 <a:solidFill>
@@ -7710,21 +6300,21 @@
                 </a:solidFill>
                 <a:latin typeface="Calibri"/>
               </a:rPr>
-              <a:t>FairBanks FCHIP  |  AUC Venture Lab Women Innovation Fellows  |  Your health, our mission.</a:t>
-            </a:r>
-          </a:p>
-        </p:txBody>
-      </p:sp>
-      <p:sp>
-        <p:nvSpPr>
-          <p:cNvPr id="27" name="TextBox 26"/>
+              <a:t>FairBanks FCHIP | AUC Women Innovation Fellowship | Your health, our mission.</a:t>
+            </a:r>
+          </a:p>
+        </p:txBody>
+      </p:sp>
+      <p:sp>
+        <p:nvSpPr>
+          <p:cNvPr id="14" name="TextBox 13"/>
           <p:cNvSpPr txBox="1"/>
           <p:nvPr/>
         </p:nvSpPr>
         <p:spPr>
           <a:xfrm>
-            <a:off x="11094415" y="6574536"/>
-            <a:ext cx="731520" cy="274320"/>
+            <a:off x="11460175" y="6592824"/>
+            <a:ext cx="457200" cy="256032"/>
           </a:xfrm>
           <a:prstGeom prst="rect">
             <a:avLst/>
@@ -7732,16 +6322,12 @@
           <a:noFill/>
         </p:spPr>
         <p:txBody>
-          <a:bodyPr wrap="square" anchor="ctr">
+          <a:bodyPr wrap="square">
             <a:spAutoFit/>
           </a:bodyPr>
           <a:lstStyle/>
           <a:p>
-            <a:pPr algn="r">
-              <a:spcAft>
-                <a:spcPts val="0"/>
-              </a:spcAft>
-            </a:pPr>
+            <a:pPr algn="r"/>
             <a:r>
               <a:rPr sz="900" b="0" i="0">
                 <a:solidFill>
@@ -7772,294 +6358,9 @@
         <p:nvPr/>
       </p:nvGrpSpPr>
       <p:grpSpPr/>
-      <p:sp>
-        <p:nvSpPr>
-          <p:cNvPr id="2" name="Rectangle 1"/>
-          <p:cNvSpPr/>
-          <p:nvPr/>
-        </p:nvSpPr>
-        <p:spPr>
-          <a:xfrm>
-            <a:off x="0" y="0"/>
-            <a:ext cx="12191695" cy="960120"/>
-          </a:xfrm>
-          <a:prstGeom prst="rect">
-            <a:avLst/>
-          </a:prstGeom>
-          <a:solidFill>
-            <a:srgbClr val="F7F5F0"/>
-          </a:solidFill>
-          <a:ln>
-            <a:noFill/>
-          </a:ln>
-          <a:effectLst/>
-        </p:spPr>
-        <p:style>
-          <a:lnRef idx="1">
-            <a:schemeClr val="accent1"/>
-          </a:lnRef>
-          <a:fillRef idx="3">
-            <a:schemeClr val="accent1"/>
-          </a:fillRef>
-          <a:effectRef idx="2">
-            <a:schemeClr val="accent1"/>
-          </a:effectRef>
-          <a:fontRef idx="minor">
-            <a:schemeClr val="lt1"/>
-          </a:fontRef>
-        </p:style>
-        <p:txBody>
-          <a:bodyPr rtlCol="0" anchor="ctr"/>
-          <a:lstStyle/>
-          <a:p>
-            <a:pPr algn="ctr"/>
-          </a:p>
-        </p:txBody>
-      </p:sp>
-      <p:sp>
-        <p:nvSpPr>
-          <p:cNvPr id="3" name="Rectangle 2"/>
-          <p:cNvSpPr/>
-          <p:nvPr/>
-        </p:nvSpPr>
-        <p:spPr>
-          <a:xfrm>
-            <a:off x="0" y="0"/>
-            <a:ext cx="164592" cy="960120"/>
-          </a:xfrm>
-          <a:prstGeom prst="rect">
-            <a:avLst/>
-          </a:prstGeom>
-          <a:solidFill>
-            <a:srgbClr val="0D6E6E"/>
-          </a:solidFill>
-          <a:ln>
-            <a:noFill/>
-          </a:ln>
-          <a:effectLst/>
-        </p:spPr>
-        <p:style>
-          <a:lnRef idx="1">
-            <a:schemeClr val="accent1"/>
-          </a:lnRef>
-          <a:fillRef idx="3">
-            <a:schemeClr val="accent1"/>
-          </a:fillRef>
-          <a:effectRef idx="2">
-            <a:schemeClr val="accent1"/>
-          </a:effectRef>
-          <a:fontRef idx="minor">
-            <a:schemeClr val="lt1"/>
-          </a:fontRef>
-        </p:style>
-        <p:txBody>
-          <a:bodyPr rtlCol="0" anchor="ctr"/>
-          <a:lstStyle/>
-          <a:p>
-            <a:pPr algn="ctr"/>
-          </a:p>
-        </p:txBody>
-      </p:sp>
-      <p:sp>
-        <p:nvSpPr>
-          <p:cNvPr id="4" name="TextBox 3"/>
-          <p:cNvSpPr txBox="1"/>
-          <p:nvPr/>
-        </p:nvSpPr>
-        <p:spPr>
-          <a:xfrm>
-            <a:off x="457200" y="109728"/>
-            <a:ext cx="10972800" cy="256032"/>
-          </a:xfrm>
-          <a:prstGeom prst="rect">
-            <a:avLst/>
-          </a:prstGeom>
-          <a:noFill/>
-        </p:spPr>
-        <p:txBody>
-          <a:bodyPr wrap="square" anchor="t">
-            <a:spAutoFit/>
-          </a:bodyPr>
-          <a:lstStyle/>
-          <a:p>
-            <a:pPr algn="l">
-              <a:spcAft>
-                <a:spcPts val="0"/>
-              </a:spcAft>
-            </a:pPr>
-            <a:r>
-              <a:rPr sz="1100" b="1" i="0">
-                <a:solidFill>
-                  <a:srgbClr val="C45C26"/>
-                </a:solidFill>
-                <a:latin typeface="Calibri"/>
-              </a:rPr>
-              <a:t>OUR MODEL</a:t>
-            </a:r>
-          </a:p>
-        </p:txBody>
-      </p:sp>
-      <p:sp>
-        <p:nvSpPr>
-          <p:cNvPr id="5" name="TextBox 4"/>
-          <p:cNvSpPr txBox="1"/>
-          <p:nvPr/>
-        </p:nvSpPr>
-        <p:spPr>
-          <a:xfrm>
-            <a:off x="457200" y="384048"/>
-            <a:ext cx="11247120" cy="475488"/>
-          </a:xfrm>
-          <a:prstGeom prst="rect">
-            <a:avLst/>
-          </a:prstGeom>
-          <a:noFill/>
-        </p:spPr>
-        <p:txBody>
-          <a:bodyPr wrap="square" anchor="t">
-            <a:spAutoFit/>
-          </a:bodyPr>
-          <a:lstStyle/>
-          <a:p>
-            <a:pPr algn="l">
-              <a:spcAft>
-                <a:spcPts val="0"/>
-              </a:spcAft>
-            </a:pPr>
-            <a:r>
-              <a:rPr sz="2200" b="1" i="0">
-                <a:solidFill>
-                  <a:srgbClr val="0A1F2E"/>
-                </a:solidFill>
-                <a:latin typeface="Calibri"/>
-              </a:rPr>
-              <a:t>Communities first — intelligence that serves care</a:t>
-            </a:r>
-          </a:p>
-        </p:txBody>
-      </p:sp>
-      <p:sp>
-        <p:nvSpPr>
-          <p:cNvPr id="6" name="TextBox 5"/>
-          <p:cNvSpPr txBox="1"/>
-          <p:nvPr/>
-        </p:nvSpPr>
-        <p:spPr>
-          <a:xfrm>
-            <a:off x="502920" y="1234440"/>
-            <a:ext cx="5760720" cy="5074920"/>
-          </a:xfrm>
-          <a:prstGeom prst="rect">
-            <a:avLst/>
-          </a:prstGeom>
-          <a:noFill/>
-        </p:spPr>
-        <p:txBody>
-          <a:bodyPr wrap="square">
-            <a:spAutoFit/>
-          </a:bodyPr>
-          <a:lstStyle/>
-          <a:p>
-            <a:pPr>
-              <a:spcAft>
-                <a:spcPts val="800"/>
-              </a:spcAft>
-            </a:pPr>
-            <a:r>
-              <a:rPr sz="1400">
-                <a:solidFill>
-                  <a:srgbClr val="1E2F38"/>
-                </a:solidFill>
-                <a:latin typeface="Calibri"/>
-              </a:rPr>
-              <a:t>•  Community members identify needs and own solutions</a:t>
-            </a:r>
-          </a:p>
-          <a:p>
-            <a:pPr>
-              <a:spcAft>
-                <a:spcPts val="800"/>
-              </a:spcAft>
-            </a:pPr>
-            <a:r>
-              <a:rPr sz="1400">
-                <a:solidFill>
-                  <a:srgbClr val="1E2F38"/>
-                </a:solidFill>
-                <a:latin typeface="Calibri"/>
-              </a:rPr>
-              <a:t>•  CHWs / VHTs bridge homes to clinics</a:t>
-            </a:r>
-          </a:p>
-          <a:p>
-            <a:pPr>
-              <a:spcAft>
-                <a:spcPts val="800"/>
-              </a:spcAft>
-            </a:pPr>
-            <a:r>
-              <a:rPr sz="1400">
-                <a:solidFill>
-                  <a:srgbClr val="1E2F38"/>
-                </a:solidFill>
-                <a:latin typeface="Calibri"/>
-              </a:rPr>
-              <a:t>•  FairBanks Community Reach programmes deliver outreach</a:t>
-            </a:r>
-          </a:p>
-          <a:p>
-            <a:pPr>
-              <a:spcAft>
-                <a:spcPts val="800"/>
-              </a:spcAft>
-            </a:pPr>
-            <a:r>
-              <a:rPr sz="1400">
-                <a:solidFill>
-                  <a:srgbClr val="1E2F38"/>
-                </a:solidFill>
-                <a:latin typeface="Calibri"/>
-              </a:rPr>
-              <a:t>•  FairBanks Medical Centre provides clinical care</a:t>
-            </a:r>
-          </a:p>
-          <a:p>
-            <a:pPr>
-              <a:spcAft>
-                <a:spcPts val="800"/>
-              </a:spcAft>
-            </a:pPr>
-            <a:r>
-              <a:rPr sz="1400">
-                <a:solidFill>
-                  <a:srgbClr val="1E2F38"/>
-                </a:solidFill>
-                <a:latin typeface="Calibri"/>
-              </a:rPr>
-              <a:t>•  Research, partnerships, and skills strengthen the system</a:t>
-            </a:r>
-          </a:p>
-          <a:p>
-            <a:pPr>
-              <a:spcAft>
-                <a:spcPts val="800"/>
-              </a:spcAft>
-            </a:pPr>
-            <a:r>
-              <a:rPr sz="1400">
-                <a:solidFill>
-                  <a:srgbClr val="1E2F38"/>
-                </a:solidFill>
-                <a:latin typeface="Calibri"/>
-              </a:rPr>
-              <a:t>•  Livelihoods and empowerment make health gains last</a:t>
-            </a:r>
-          </a:p>
-        </p:txBody>
-      </p:sp>
       <p:pic>
         <p:nvPicPr>
-          <p:cNvPr id="7" name="Picture 6" descr="gis_hotspots_opt.jpg"/>
+          <p:cNvPr id="2" name="Picture 1" descr="outreach_audience_full_group_01_opt.jpg"/>
           <p:cNvPicPr>
             <a:picLocks noChangeAspect="1"/>
           </p:cNvPicPr>
@@ -8073,8 +6374,8 @@
         </p:blipFill>
         <p:spPr>
           <a:xfrm>
-            <a:off x="6492240" y="2035160"/>
-            <a:ext cx="5212080" cy="3473479"/>
+            <a:off x="0" y="0"/>
+            <a:ext cx="12191695" cy="6858000"/>
           </a:xfrm>
           <a:prstGeom prst="rect">
             <a:avLst/>
@@ -8083,14 +6384,14 @@
       </p:pic>
       <p:sp>
         <p:nvSpPr>
-          <p:cNvPr id="8" name="Rectangle 7"/>
+          <p:cNvPr id="3" name="Rectangle 2"/>
           <p:cNvSpPr/>
           <p:nvPr/>
         </p:nvSpPr>
         <p:spPr>
           <a:xfrm>
-            <a:off x="0" y="6565392"/>
-            <a:ext cx="12191695" cy="292608"/>
+            <a:off x="0" y="4297680"/>
+            <a:ext cx="12191695" cy="2560320"/>
           </a:xfrm>
           <a:prstGeom prst="rect">
             <a:avLst/>
@@ -8101,7 +6402,6 @@
           <a:ln>
             <a:noFill/>
           </a:ln>
-          <a:effectLst/>
         </p:spPr>
         <p:style>
           <a:lnRef idx="1">
@@ -8127,14 +6427,14 @@
       </p:sp>
       <p:sp>
         <p:nvSpPr>
-          <p:cNvPr id="9" name="TextBox 8"/>
+          <p:cNvPr id="4" name="TextBox 3"/>
           <p:cNvSpPr txBox="1"/>
           <p:nvPr/>
         </p:nvSpPr>
         <p:spPr>
           <a:xfrm>
-            <a:off x="365760" y="6574536"/>
-            <a:ext cx="9144000" cy="274320"/>
+            <a:off x="548640" y="4663440"/>
+            <a:ext cx="10972800" cy="502920"/>
           </a:xfrm>
           <a:prstGeom prst="rect">
             <a:avLst/>
@@ -8142,38 +6442,34 @@
           <a:noFill/>
         </p:spPr>
         <p:txBody>
-          <a:bodyPr wrap="square" anchor="ctr">
+          <a:bodyPr wrap="square">
             <a:spAutoFit/>
           </a:bodyPr>
           <a:lstStyle/>
           <a:p>
-            <a:pPr algn="l">
-              <a:spcAft>
-                <a:spcPts val="0"/>
-              </a:spcAft>
-            </a:pPr>
-            <a:r>
-              <a:rPr sz="900" b="0" i="0">
+            <a:pPr algn="l"/>
+            <a:r>
+              <a:rPr sz="2400" b="1" i="0">
                 <a:solidFill>
                   <a:srgbClr val="FFFFFF"/>
                 </a:solidFill>
                 <a:latin typeface="Calibri"/>
               </a:rPr>
-              <a:t>FairBanks FCHIP  |  AUC Venture Lab Women Innovation Fellows  |  Your health, our mission.</a:t>
-            </a:r>
-          </a:p>
-        </p:txBody>
-      </p:sp>
-      <p:sp>
-        <p:nvSpPr>
-          <p:cNvPr id="10" name="TextBox 9"/>
+              <a:t>Ready for Cairo — women-led HealthTech with community roots.</a:t>
+            </a:r>
+          </a:p>
+        </p:txBody>
+      </p:sp>
+      <p:sp>
+        <p:nvSpPr>
+          <p:cNvPr id="5" name="TextBox 4"/>
           <p:cNvSpPr txBox="1"/>
           <p:nvPr/>
         </p:nvSpPr>
         <p:spPr>
           <a:xfrm>
-            <a:off x="11094415" y="6574536"/>
-            <a:ext cx="731520" cy="274320"/>
+            <a:off x="548640" y="5486400"/>
+            <a:ext cx="10972800" cy="320040"/>
           </a:xfrm>
           <a:prstGeom prst="rect">
             <a:avLst/>
@@ -8181,24 +6477,55 @@
           <a:noFill/>
         </p:spPr>
         <p:txBody>
-          <a:bodyPr wrap="square" anchor="ctr">
+          <a:bodyPr wrap="square">
             <a:spAutoFit/>
           </a:bodyPr>
           <a:lstStyle/>
           <a:p>
-            <a:pPr algn="r">
-              <a:spcAft>
-                <a:spcPts val="0"/>
-              </a:spcAft>
-            </a:pPr>
-            <a:r>
-              <a:rPr sz="900" b="0" i="0">
+            <a:pPr algn="l"/>
+            <a:r>
+              <a:rPr sz="1400" b="1" i="0">
                 <a:solidFill>
                   <a:srgbClr val="FFFFFF"/>
                 </a:solidFill>
                 <a:latin typeface="Calibri"/>
               </a:rPr>
-              <a:t>9</a:t>
+              <a:t>Your health, our mission.</a:t>
+            </a:r>
+          </a:p>
+        </p:txBody>
+      </p:sp>
+      <p:sp>
+        <p:nvSpPr>
+          <p:cNvPr id="6" name="TextBox 5"/>
+          <p:cNvSpPr txBox="1"/>
+          <p:nvPr/>
+        </p:nvSpPr>
+        <p:spPr>
+          <a:xfrm>
+            <a:off x="548640" y="6035040"/>
+            <a:ext cx="10972800" cy="274320"/>
+          </a:xfrm>
+          <a:prstGeom prst="rect">
+            <a:avLst/>
+          </a:prstGeom>
+          <a:noFill/>
+        </p:spPr>
+        <p:txBody>
+          <a:bodyPr wrap="square">
+            <a:spAutoFit/>
+          </a:bodyPr>
+          <a:lstStyle/>
+          <a:p>
+            <a:pPr algn="l"/>
+            <a:r>
+              <a:rPr sz="1200" b="0" i="0">
+                <a:solidFill>
+                  <a:srgbClr val="D0E8E8"/>
+                </a:solidFill>
+                <a:latin typeface="Calibri"/>
+              </a:rPr>
+              <a:t>Application deadline: 25 July 2026</a:t>
             </a:r>
           </a:p>
         </p:txBody>

--- a/applications/auc/documents/auc_ppt.pptx
+++ b/applications/auc/documents/auc_ppt.pptx
@@ -3207,7 +3207,7 @@
         <p:spPr>
           <a:xfrm>
             <a:off x="548640" y="4389120"/>
-            <a:ext cx="10972800" cy="594360"/>
+            <a:ext cx="10972800" cy="502920"/>
           </a:xfrm>
           <a:prstGeom prst="rect">
             <a:avLst/>
@@ -3222,7 +3222,7 @@
           <a:p>
             <a:pPr algn="l"/>
             <a:r>
-              <a:rPr sz="2600" b="1" i="0">
+              <a:rPr sz="2400" b="1" i="0">
                 <a:solidFill>
                   <a:srgbClr val="FFFFFF"/>
                 </a:solidFill>
@@ -3241,8 +3241,8 @@
         </p:nvSpPr>
         <p:spPr>
           <a:xfrm>
-            <a:off x="548640" y="5166360"/>
-            <a:ext cx="10972800" cy="365760"/>
+            <a:off x="548640" y="4892040"/>
+            <a:ext cx="10972800" cy="274320"/>
           </a:xfrm>
           <a:prstGeom prst="rect">
             <a:avLst/>
@@ -3257,6 +3257,41 @@
           <a:p>
             <a:pPr algn="l"/>
             <a:r>
+              <a:rPr sz="1300" b="1" i="1">
+                <a:solidFill>
+                  <a:srgbClr val="F2C79B"/>
+                </a:solidFill>
+                <a:latin typeface="Calibri"/>
+              </a:rPr>
+              <a:t>FairBanks Community Health Intelligence Platform (FCHIP)</a:t>
+            </a:r>
+          </a:p>
+        </p:txBody>
+      </p:sp>
+      <p:sp>
+        <p:nvSpPr>
+          <p:cNvPr id="7" name="TextBox 6"/>
+          <p:cNvSpPr txBox="1"/>
+          <p:nvPr/>
+        </p:nvSpPr>
+        <p:spPr>
+          <a:xfrm>
+            <a:off x="548640" y="5257800"/>
+            <a:ext cx="10972800" cy="320040"/>
+          </a:xfrm>
+          <a:prstGeom prst="rect">
+            <a:avLst/>
+          </a:prstGeom>
+          <a:noFill/>
+        </p:spPr>
+        <p:txBody>
+          <a:bodyPr wrap="square">
+            <a:spAutoFit/>
+          </a:bodyPr>
+          <a:lstStyle/>
+          <a:p>
+            <a:pPr algn="l"/>
+            <a:r>
               <a:rPr sz="1400" b="1" i="0">
                 <a:solidFill>
                   <a:srgbClr val="FFFFFF"/>
@@ -3270,7 +3305,7 @@
       </p:sp>
       <p:sp>
         <p:nvSpPr>
-          <p:cNvPr id="7" name="TextBox 6"/>
+          <p:cNvPr id="8" name="TextBox 7"/>
           <p:cNvSpPr txBox="1"/>
           <p:nvPr/>
         </p:nvSpPr>

--- a/applications/auc/documents/auc_ppt.pptx
+++ b/applications/auc/documents/auc_ppt.pptx
@@ -3185,7 +3185,17 @@
           </a:bodyPr>
           <a:lstStyle/>
           <a:p>
-            <a:pPr algn="l"/>
+            <a:pPr algn="l">
+              <a:lnSpc>
+                <a:spcPct val="115000"/>
+              </a:lnSpc>
+              <a:spcBef>
+                <a:spcPts val="0"/>
+              </a:spcBef>
+              <a:spcAft>
+                <a:spcPts val="200"/>
+              </a:spcAft>
+            </a:pPr>
             <a:r>
               <a:rPr sz="1300" b="1" i="0">
                 <a:solidFill>
@@ -3220,7 +3230,17 @@
           </a:bodyPr>
           <a:lstStyle/>
           <a:p>
-            <a:pPr algn="l"/>
+            <a:pPr algn="l">
+              <a:lnSpc>
+                <a:spcPct val="115000"/>
+              </a:lnSpc>
+              <a:spcBef>
+                <a:spcPts val="0"/>
+              </a:spcBef>
+              <a:spcAft>
+                <a:spcPts val="200"/>
+              </a:spcAft>
+            </a:pPr>
             <a:r>
               <a:rPr sz="2400" b="1" i="0">
                 <a:solidFill>
@@ -3255,7 +3275,17 @@
           </a:bodyPr>
           <a:lstStyle/>
           <a:p>
-            <a:pPr algn="l"/>
+            <a:pPr algn="l">
+              <a:lnSpc>
+                <a:spcPct val="115000"/>
+              </a:lnSpc>
+              <a:spcBef>
+                <a:spcPts val="0"/>
+              </a:spcBef>
+              <a:spcAft>
+                <a:spcPts val="200"/>
+              </a:spcAft>
+            </a:pPr>
             <a:r>
               <a:rPr sz="1300" b="1" i="1">
                 <a:solidFill>
@@ -3290,7 +3320,17 @@
           </a:bodyPr>
           <a:lstStyle/>
           <a:p>
-            <a:pPr algn="l"/>
+            <a:pPr algn="l">
+              <a:lnSpc>
+                <a:spcPct val="115000"/>
+              </a:lnSpc>
+              <a:spcBef>
+                <a:spcPts val="0"/>
+              </a:spcBef>
+              <a:spcAft>
+                <a:spcPts val="200"/>
+              </a:spcAft>
+            </a:pPr>
             <a:r>
               <a:rPr sz="1400" b="1" i="0">
                 <a:solidFill>
@@ -3325,7 +3365,17 @@
           </a:bodyPr>
           <a:lstStyle/>
           <a:p>
-            <a:pPr algn="l"/>
+            <a:pPr algn="l">
+              <a:lnSpc>
+                <a:spcPct val="115000"/>
+              </a:lnSpc>
+              <a:spcBef>
+                <a:spcPts val="0"/>
+              </a:spcBef>
+              <a:spcAft>
+                <a:spcPts val="200"/>
+              </a:spcAft>
+            </a:pPr>
             <a:r>
               <a:rPr sz="1200" b="0" i="0">
                 <a:solidFill>
@@ -3464,7 +3514,17 @@
           </a:bodyPr>
           <a:lstStyle/>
           <a:p>
-            <a:pPr algn="l"/>
+            <a:pPr algn="l">
+              <a:lnSpc>
+                <a:spcPct val="115000"/>
+              </a:lnSpc>
+              <a:spcBef>
+                <a:spcPts val="0"/>
+              </a:spcBef>
+              <a:spcAft>
+                <a:spcPts val="200"/>
+              </a:spcAft>
+            </a:pPr>
             <a:r>
               <a:rPr sz="1100" b="1" i="0">
                 <a:solidFill>
@@ -3499,7 +3559,17 @@
           </a:bodyPr>
           <a:lstStyle/>
           <a:p>
-            <a:pPr algn="l"/>
+            <a:pPr algn="l">
+              <a:lnSpc>
+                <a:spcPct val="115000"/>
+              </a:lnSpc>
+              <a:spcBef>
+                <a:spcPts val="0"/>
+              </a:spcBef>
+              <a:spcAft>
+                <a:spcPts val="200"/>
+              </a:spcAft>
+            </a:pPr>
             <a:r>
               <a:rPr sz="2400" b="1" i="0">
                 <a:solidFill>
@@ -3534,17 +3604,69 @@
           </a:bodyPr>
           <a:lstStyle/>
           <a:p>
-            <a:pPr algn="l"/>
-            <a:r>
-              <a:rPr sz="1600" b="0" i="0">
+            <a:pPr algn="l">
+              <a:lnSpc>
+                <a:spcPct val="128000"/>
+              </a:lnSpc>
+              <a:spcBef>
+                <a:spcPts val="0"/>
+              </a:spcBef>
+              <a:spcAft>
+                <a:spcPts val="1400"/>
+              </a:spcAft>
+            </a:pPr>
+            <a:r>
+              <a:rPr sz="2600" b="0" i="0">
                 <a:solidFill>
                   <a:srgbClr val="3A4A54"/>
                 </a:solidFill>
                 <a:latin typeface="Calibri"/>
               </a:rPr>
-              <a:t>HealthTech that serves Africa needs leadership training and cross-regional networks — not code alone.
-AUC Venture Lab is Africa’s top accelerator heritage (440+ startups). Cairo connects North and East Africa.
-I bring live community health operations from Uganda; I seek mentor access and investor-ready discipline.</a:t>
+              <a:t>HealthTech that serves Africa needs leadership training and cross-regional networks — not code alone.</a:t>
+            </a:r>
+          </a:p>
+          <a:p>
+            <a:pPr algn="l">
+              <a:lnSpc>
+                <a:spcPct val="128000"/>
+              </a:lnSpc>
+              <a:spcBef>
+                <a:spcPts val="0"/>
+              </a:spcBef>
+              <a:spcAft>
+                <a:spcPts val="1400"/>
+              </a:spcAft>
+            </a:pPr>
+            <a:r>
+              <a:rPr sz="2600" b="0" i="0">
+                <a:solidFill>
+                  <a:srgbClr val="3A4A54"/>
+                </a:solidFill>
+                <a:latin typeface="Calibri"/>
+              </a:rPr>
+              <a:t>AUC Venture Lab is Africa’s top accelerator heritage (440+ startups). Cairo connects North and East Africa.</a:t>
+            </a:r>
+          </a:p>
+          <a:p>
+            <a:pPr algn="l">
+              <a:lnSpc>
+                <a:spcPct val="128000"/>
+              </a:lnSpc>
+              <a:spcBef>
+                <a:spcPts val="0"/>
+              </a:spcBef>
+              <a:spcAft>
+                <a:spcPts val="200"/>
+              </a:spcAft>
+            </a:pPr>
+            <a:r>
+              <a:rPr sz="2600" b="0" i="0">
+                <a:solidFill>
+                  <a:srgbClr val="3A4A54"/>
+                </a:solidFill>
+                <a:latin typeface="Calibri"/>
+              </a:rPr>
+              <a:t>I bring live community health operations from Uganda; I seek mentor access and investor-ready discipline.</a:t>
             </a:r>
           </a:p>
         </p:txBody>
@@ -3638,7 +3760,17 @@
           </a:bodyPr>
           <a:lstStyle/>
           <a:p>
-            <a:pPr algn="l"/>
+            <a:pPr algn="l">
+              <a:lnSpc>
+                <a:spcPct val="115000"/>
+              </a:lnSpc>
+              <a:spcBef>
+                <a:spcPts val="0"/>
+              </a:spcBef>
+              <a:spcAft>
+                <a:spcPts val="200"/>
+              </a:spcAft>
+            </a:pPr>
             <a:r>
               <a:rPr sz="900" b="0" i="0">
                 <a:solidFill>
@@ -3673,7 +3805,17 @@
           </a:bodyPr>
           <a:lstStyle/>
           <a:p>
-            <a:pPr algn="r"/>
+            <a:pPr algn="r">
+              <a:lnSpc>
+                <a:spcPct val="115000"/>
+              </a:lnSpc>
+              <a:spcBef>
+                <a:spcPts val="0"/>
+              </a:spcBef>
+              <a:spcAft>
+                <a:spcPts val="200"/>
+              </a:spcAft>
+            </a:pPr>
             <a:r>
               <a:rPr sz="900" b="0" i="0">
                 <a:solidFill>
@@ -3812,7 +3954,17 @@
           </a:bodyPr>
           <a:lstStyle/>
           <a:p>
-            <a:pPr algn="l"/>
+            <a:pPr algn="l">
+              <a:lnSpc>
+                <a:spcPct val="115000"/>
+              </a:lnSpc>
+              <a:spcBef>
+                <a:spcPts val="0"/>
+              </a:spcBef>
+              <a:spcAft>
+                <a:spcPts val="200"/>
+              </a:spcAft>
+            </a:pPr>
             <a:r>
               <a:rPr sz="1100" b="1" i="0">
                 <a:solidFill>
@@ -3847,7 +3999,17 @@
           </a:bodyPr>
           <a:lstStyle/>
           <a:p>
-            <a:pPr algn="l"/>
+            <a:pPr algn="l">
+              <a:lnSpc>
+                <a:spcPct val="115000"/>
+              </a:lnSpc>
+              <a:spcBef>
+                <a:spcPts val="0"/>
+              </a:spcBef>
+              <a:spcAft>
+                <a:spcPts val="200"/>
+              </a:spcAft>
+            </a:pPr>
             <a:r>
               <a:rPr sz="2400" b="1" i="0">
                 <a:solidFill>
@@ -3906,18 +4068,91 @@
           </a:bodyPr>
           <a:lstStyle/>
           <a:p>
-            <a:pPr algn="l"/>
-            <a:r>
-              <a:rPr sz="1700" b="0" i="0">
+            <a:pPr algn="l">
+              <a:lnSpc>
+                <a:spcPct val="128000"/>
+              </a:lnSpc>
+              <a:spcBef>
+                <a:spcPts val="0"/>
+              </a:spcBef>
+              <a:spcAft>
+                <a:spcPts val="1400"/>
+              </a:spcAft>
+            </a:pPr>
+            <a:r>
+              <a:rPr sz="2600" b="0" i="0">
                 <a:solidFill>
                   <a:srgbClr val="1E2F38"/>
                 </a:solidFill>
                 <a:latin typeface="Calibri"/>
               </a:rPr>
-              <a:t>• CHW/VHT partnerships in Kampala communities
-• Maternal, adolescent, and chronic-care programmes
-• Clinical + community + product leadership combined
-• Decisions shaped by people who need care first</a:t>
+              <a:t>• CHW/VHT partnerships in Kampala communities</a:t>
+            </a:r>
+          </a:p>
+          <a:p>
+            <a:pPr algn="l">
+              <a:lnSpc>
+                <a:spcPct val="128000"/>
+              </a:lnSpc>
+              <a:spcBef>
+                <a:spcPts val="0"/>
+              </a:spcBef>
+              <a:spcAft>
+                <a:spcPts val="1400"/>
+              </a:spcAft>
+            </a:pPr>
+            <a:r>
+              <a:rPr sz="2600" b="0" i="0">
+                <a:solidFill>
+                  <a:srgbClr val="1E2F38"/>
+                </a:solidFill>
+                <a:latin typeface="Calibri"/>
+              </a:rPr>
+              <a:t>• Maternal, adolescent, and chronic-care programmes</a:t>
+            </a:r>
+          </a:p>
+          <a:p>
+            <a:pPr algn="l">
+              <a:lnSpc>
+                <a:spcPct val="128000"/>
+              </a:lnSpc>
+              <a:spcBef>
+                <a:spcPts val="0"/>
+              </a:spcBef>
+              <a:spcAft>
+                <a:spcPts val="1400"/>
+              </a:spcAft>
+            </a:pPr>
+            <a:r>
+              <a:rPr sz="2600" b="0" i="0">
+                <a:solidFill>
+                  <a:srgbClr val="1E2F38"/>
+                </a:solidFill>
+                <a:latin typeface="Calibri"/>
+              </a:rPr>
+              <a:t>• Clinical + community + product leadership combined</a:t>
+            </a:r>
+          </a:p>
+          <a:p>
+            <a:pPr algn="l">
+              <a:lnSpc>
+                <a:spcPct val="128000"/>
+              </a:lnSpc>
+              <a:spcBef>
+                <a:spcPts val="0"/>
+              </a:spcBef>
+              <a:spcAft>
+                <a:spcPts val="200"/>
+              </a:spcAft>
+            </a:pPr>
+            <a:r>
+              <a:rPr sz="2600" b="0" i="0">
+                <a:solidFill>
+                  <a:srgbClr val="1E2F38"/>
+                </a:solidFill>
+                <a:latin typeface="Calibri"/>
+              </a:rPr>
+              <a:t>• Decisions shaped by people who need care first</a:t>
             </a:r>
           </a:p>
         </p:txBody>
@@ -3987,7 +4222,17 @@
           </a:bodyPr>
           <a:lstStyle/>
           <a:p>
-            <a:pPr algn="l"/>
+            <a:pPr algn="l">
+              <a:lnSpc>
+                <a:spcPct val="115000"/>
+              </a:lnSpc>
+              <a:spcBef>
+                <a:spcPts val="0"/>
+              </a:spcBef>
+              <a:spcAft>
+                <a:spcPts val="200"/>
+              </a:spcAft>
+            </a:pPr>
             <a:r>
               <a:rPr sz="900" b="0" i="0">
                 <a:solidFill>
@@ -4022,7 +4267,17 @@
           </a:bodyPr>
           <a:lstStyle/>
           <a:p>
-            <a:pPr algn="r"/>
+            <a:pPr algn="r">
+              <a:lnSpc>
+                <a:spcPct val="115000"/>
+              </a:lnSpc>
+              <a:spcBef>
+                <a:spcPts val="0"/>
+              </a:spcBef>
+              <a:spcAft>
+                <a:spcPts val="200"/>
+              </a:spcAft>
+            </a:pPr>
             <a:r>
               <a:rPr sz="900" b="0" i="0">
                 <a:solidFill>
@@ -4161,7 +4416,17 @@
           </a:bodyPr>
           <a:lstStyle/>
           <a:p>
-            <a:pPr algn="l"/>
+            <a:pPr algn="l">
+              <a:lnSpc>
+                <a:spcPct val="115000"/>
+              </a:lnSpc>
+              <a:spcBef>
+                <a:spcPts val="0"/>
+              </a:spcBef>
+              <a:spcAft>
+                <a:spcPts val="200"/>
+              </a:spcAft>
+            </a:pPr>
             <a:r>
               <a:rPr sz="1100" b="1" i="0">
                 <a:solidFill>
@@ -4196,7 +4461,17 @@
           </a:bodyPr>
           <a:lstStyle/>
           <a:p>
-            <a:pPr algn="l"/>
+            <a:pPr algn="l">
+              <a:lnSpc>
+                <a:spcPct val="115000"/>
+              </a:lnSpc>
+              <a:spcBef>
+                <a:spcPts val="0"/>
+              </a:spcBef>
+              <a:spcAft>
+                <a:spcPts val="200"/>
+              </a:spcAft>
+            </a:pPr>
             <a:r>
               <a:rPr sz="2400" b="1" i="0">
                 <a:solidFill>
@@ -4255,16 +4530,47 @@
           </a:bodyPr>
           <a:lstStyle/>
           <a:p>
-            <a:pPr algn="l"/>
-            <a:r>
-              <a:rPr sz="1500" b="0" i="0">
+            <a:pPr algn="l">
+              <a:lnSpc>
+                <a:spcPct val="128000"/>
+              </a:lnSpc>
+              <a:spcBef>
+                <a:spcPts val="0"/>
+              </a:spcBef>
+              <a:spcAft>
+                <a:spcPts val="1400"/>
+              </a:spcAft>
+            </a:pPr>
+            <a:r>
+              <a:rPr sz="2600" b="0" i="0">
                 <a:solidFill>
                   <a:srgbClr val="3A4A54"/>
                 </a:solidFill>
                 <a:latin typeface="Calibri"/>
               </a:rPr>
-              <a:t>Offline capture → cloud intelligence → alerts to CHWs, clinics, districts.
-Predict outbreaks, maternal risk, NCD hotspots, child health gaps, stock-outs.</a:t>
+              <a:t>Offline capture → cloud intelligence → alerts to CHWs, clinics, districts.</a:t>
+            </a:r>
+          </a:p>
+          <a:p>
+            <a:pPr algn="l">
+              <a:lnSpc>
+                <a:spcPct val="128000"/>
+              </a:lnSpc>
+              <a:spcBef>
+                <a:spcPts val="0"/>
+              </a:spcBef>
+              <a:spcAft>
+                <a:spcPts val="200"/>
+              </a:spcAft>
+            </a:pPr>
+            <a:r>
+              <a:rPr sz="2600" b="0" i="0">
+                <a:solidFill>
+                  <a:srgbClr val="3A4A54"/>
+                </a:solidFill>
+                <a:latin typeface="Calibri"/>
+              </a:rPr>
+              <a:t>Predict outbreaks, maternal risk, NCD hotspots, child health gaps, stock-outs.</a:t>
             </a:r>
           </a:p>
         </p:txBody>
@@ -4334,7 +4640,17 @@
           </a:bodyPr>
           <a:lstStyle/>
           <a:p>
-            <a:pPr algn="l"/>
+            <a:pPr algn="l">
+              <a:lnSpc>
+                <a:spcPct val="115000"/>
+              </a:lnSpc>
+              <a:spcBef>
+                <a:spcPts val="0"/>
+              </a:spcBef>
+              <a:spcAft>
+                <a:spcPts val="200"/>
+              </a:spcAft>
+            </a:pPr>
             <a:r>
               <a:rPr sz="900" b="0" i="0">
                 <a:solidFill>
@@ -4369,7 +4685,17 @@
           </a:bodyPr>
           <a:lstStyle/>
           <a:p>
-            <a:pPr algn="r"/>
+            <a:pPr algn="r">
+              <a:lnSpc>
+                <a:spcPct val="115000"/>
+              </a:lnSpc>
+              <a:spcBef>
+                <a:spcPts val="0"/>
+              </a:spcBef>
+              <a:spcAft>
+                <a:spcPts val="200"/>
+              </a:spcAft>
+            </a:pPr>
             <a:r>
               <a:rPr sz="900" b="0" i="0">
                 <a:solidFill>
@@ -4508,7 +4834,17 @@
           </a:bodyPr>
           <a:lstStyle/>
           <a:p>
-            <a:pPr algn="l"/>
+            <a:pPr algn="l">
+              <a:lnSpc>
+                <a:spcPct val="115000"/>
+              </a:lnSpc>
+              <a:spcBef>
+                <a:spcPts val="0"/>
+              </a:spcBef>
+              <a:spcAft>
+                <a:spcPts val="200"/>
+              </a:spcAft>
+            </a:pPr>
             <a:r>
               <a:rPr sz="1100" b="1" i="0">
                 <a:solidFill>
@@ -4543,7 +4879,17 @@
           </a:bodyPr>
           <a:lstStyle/>
           <a:p>
-            <a:pPr algn="l"/>
+            <a:pPr algn="l">
+              <a:lnSpc>
+                <a:spcPct val="115000"/>
+              </a:lnSpc>
+              <a:spcBef>
+                <a:spcPts val="0"/>
+              </a:spcBef>
+              <a:spcAft>
+                <a:spcPts val="200"/>
+              </a:spcAft>
+            </a:pPr>
             <a:r>
               <a:rPr sz="2400" b="1" i="0">
                 <a:solidFill>
@@ -4578,16 +4924,47 @@
           </a:bodyPr>
           <a:lstStyle/>
           <a:p>
-            <a:pPr algn="l"/>
-            <a:r>
-              <a:rPr sz="1800" b="0" i="0">
+            <a:pPr algn="l">
+              <a:lnSpc>
+                <a:spcPct val="128000"/>
+              </a:lnSpc>
+              <a:spcBef>
+                <a:spcPts val="0"/>
+              </a:spcBef>
+              <a:spcAft>
+                <a:spcPts val="1400"/>
+              </a:spcAft>
+            </a:pPr>
+            <a:r>
+              <a:rPr sz="2600" b="0" i="0">
                 <a:solidFill>
                   <a:srgbClr val="1E2F38"/>
                 </a:solidFill>
                 <a:latin typeface="Calibri"/>
               </a:rPr>
-              <a:t>Leadership development · Mentor hours · Ecosystem engagement · Cross-cultural collaboration
-From live pilot toward investment-ready venture across East Africa.</a:t>
+              <a:t>Leadership development · Mentor hours · Ecosystem engagement · Cross-cultural collaboration</a:t>
+            </a:r>
+          </a:p>
+          <a:p>
+            <a:pPr algn="l">
+              <a:lnSpc>
+                <a:spcPct val="128000"/>
+              </a:lnSpc>
+              <a:spcBef>
+                <a:spcPts val="0"/>
+              </a:spcBef>
+              <a:spcAft>
+                <a:spcPts val="200"/>
+              </a:spcAft>
+            </a:pPr>
+            <a:r>
+              <a:rPr sz="2600" b="0" i="0">
+                <a:solidFill>
+                  <a:srgbClr val="1E2F38"/>
+                </a:solidFill>
+                <a:latin typeface="Calibri"/>
+              </a:rPr>
+              <a:t>From live pilot toward investment-ready venture across East Africa.</a:t>
             </a:r>
           </a:p>
         </p:txBody>
@@ -4681,7 +5058,17 @@
           </a:bodyPr>
           <a:lstStyle/>
           <a:p>
-            <a:pPr algn="l"/>
+            <a:pPr algn="l">
+              <a:lnSpc>
+                <a:spcPct val="115000"/>
+              </a:lnSpc>
+              <a:spcBef>
+                <a:spcPts val="0"/>
+              </a:spcBef>
+              <a:spcAft>
+                <a:spcPts val="200"/>
+              </a:spcAft>
+            </a:pPr>
             <a:r>
               <a:rPr sz="900" b="0" i="0">
                 <a:solidFill>
@@ -4716,7 +5103,17 @@
           </a:bodyPr>
           <a:lstStyle/>
           <a:p>
-            <a:pPr algn="r"/>
+            <a:pPr algn="r">
+              <a:lnSpc>
+                <a:spcPct val="115000"/>
+              </a:lnSpc>
+              <a:spcBef>
+                <a:spcPts val="0"/>
+              </a:spcBef>
+              <a:spcAft>
+                <a:spcPts val="200"/>
+              </a:spcAft>
+            </a:pPr>
             <a:r>
               <a:rPr sz="900" b="0" i="0">
                 <a:solidFill>
@@ -4855,7 +5252,17 @@
           </a:bodyPr>
           <a:lstStyle/>
           <a:p>
-            <a:pPr algn="l"/>
+            <a:pPr algn="l">
+              <a:lnSpc>
+                <a:spcPct val="115000"/>
+              </a:lnSpc>
+              <a:spcBef>
+                <a:spcPts val="0"/>
+              </a:spcBef>
+              <a:spcAft>
+                <a:spcPts val="200"/>
+              </a:spcAft>
+            </a:pPr>
             <a:r>
               <a:rPr sz="1100" b="1" i="0">
                 <a:solidFill>
@@ -4890,7 +5297,17 @@
           </a:bodyPr>
           <a:lstStyle/>
           <a:p>
-            <a:pPr algn="l"/>
+            <a:pPr algn="l">
+              <a:lnSpc>
+                <a:spcPct val="115000"/>
+              </a:lnSpc>
+              <a:spcBef>
+                <a:spcPts val="0"/>
+              </a:spcBef>
+              <a:spcAft>
+                <a:spcPts val="200"/>
+              </a:spcAft>
+            </a:pPr>
             <a:r>
               <a:rPr sz="2400" b="1" i="0">
                 <a:solidFill>
@@ -4949,19 +5366,113 @@
           </a:bodyPr>
           <a:lstStyle/>
           <a:p>
-            <a:pPr algn="l"/>
-            <a:r>
-              <a:rPr sz="1700" b="0" i="0">
+            <a:pPr algn="l">
+              <a:lnSpc>
+                <a:spcPct val="128000"/>
+              </a:lnSpc>
+              <a:spcBef>
+                <a:spcPts val="0"/>
+              </a:spcBef>
+              <a:spcAft>
+                <a:spcPts val="1400"/>
+              </a:spcAft>
+            </a:pPr>
+            <a:r>
+              <a:rPr sz="2600" b="0" i="0">
                 <a:solidFill>
                   <a:srgbClr val="1E2F38"/>
                 </a:solidFill>
                 <a:latin typeface="Calibri"/>
               </a:rPr>
-              <a:t>• Functioning medical centre + pharmacy
-• Live outreach data pipelines
-• Trusted community relationships
-• FCHIP field validation
-• Grassroots ↔ continental bridge</a:t>
+              <a:t>• Functioning medical centre + pharmacy</a:t>
+            </a:r>
+          </a:p>
+          <a:p>
+            <a:pPr algn="l">
+              <a:lnSpc>
+                <a:spcPct val="128000"/>
+              </a:lnSpc>
+              <a:spcBef>
+                <a:spcPts val="0"/>
+              </a:spcBef>
+              <a:spcAft>
+                <a:spcPts val="1400"/>
+              </a:spcAft>
+            </a:pPr>
+            <a:r>
+              <a:rPr sz="2600" b="0" i="0">
+                <a:solidFill>
+                  <a:srgbClr val="1E2F38"/>
+                </a:solidFill>
+                <a:latin typeface="Calibri"/>
+              </a:rPr>
+              <a:t>• Live outreach data pipelines</a:t>
+            </a:r>
+          </a:p>
+          <a:p>
+            <a:pPr algn="l">
+              <a:lnSpc>
+                <a:spcPct val="128000"/>
+              </a:lnSpc>
+              <a:spcBef>
+                <a:spcPts val="0"/>
+              </a:spcBef>
+              <a:spcAft>
+                <a:spcPts val="1400"/>
+              </a:spcAft>
+            </a:pPr>
+            <a:r>
+              <a:rPr sz="2600" b="0" i="0">
+                <a:solidFill>
+                  <a:srgbClr val="1E2F38"/>
+                </a:solidFill>
+                <a:latin typeface="Calibri"/>
+              </a:rPr>
+              <a:t>• Trusted community relationships</a:t>
+            </a:r>
+          </a:p>
+          <a:p>
+            <a:pPr algn="l">
+              <a:lnSpc>
+                <a:spcPct val="128000"/>
+              </a:lnSpc>
+              <a:spcBef>
+                <a:spcPts val="0"/>
+              </a:spcBef>
+              <a:spcAft>
+                <a:spcPts val="1400"/>
+              </a:spcAft>
+            </a:pPr>
+            <a:r>
+              <a:rPr sz="2600" b="0" i="0">
+                <a:solidFill>
+                  <a:srgbClr val="1E2F38"/>
+                </a:solidFill>
+                <a:latin typeface="Calibri"/>
+              </a:rPr>
+              <a:t>• FCHIP field validation</a:t>
+            </a:r>
+          </a:p>
+          <a:p>
+            <a:pPr algn="l">
+              <a:lnSpc>
+                <a:spcPct val="128000"/>
+              </a:lnSpc>
+              <a:spcBef>
+                <a:spcPts val="0"/>
+              </a:spcBef>
+              <a:spcAft>
+                <a:spcPts val="200"/>
+              </a:spcAft>
+            </a:pPr>
+            <a:r>
+              <a:rPr sz="2600" b="0" i="0">
+                <a:solidFill>
+                  <a:srgbClr val="1E2F38"/>
+                </a:solidFill>
+                <a:latin typeface="Calibri"/>
+              </a:rPr>
+              <a:t>• Grassroots ↔ continental bridge</a:t>
             </a:r>
           </a:p>
         </p:txBody>
@@ -5031,7 +5542,17 @@
           </a:bodyPr>
           <a:lstStyle/>
           <a:p>
-            <a:pPr algn="l"/>
+            <a:pPr algn="l">
+              <a:lnSpc>
+                <a:spcPct val="115000"/>
+              </a:lnSpc>
+              <a:spcBef>
+                <a:spcPts val="0"/>
+              </a:spcBef>
+              <a:spcAft>
+                <a:spcPts val="200"/>
+              </a:spcAft>
+            </a:pPr>
             <a:r>
               <a:rPr sz="900" b="0" i="0">
                 <a:solidFill>
@@ -5066,7 +5587,17 @@
           </a:bodyPr>
           <a:lstStyle/>
           <a:p>
-            <a:pPr algn="r"/>
+            <a:pPr algn="r">
+              <a:lnSpc>
+                <a:spcPct val="115000"/>
+              </a:lnSpc>
+              <a:spcBef>
+                <a:spcPts val="0"/>
+              </a:spcBef>
+              <a:spcAft>
+                <a:spcPts val="200"/>
+              </a:spcAft>
+            </a:pPr>
             <a:r>
               <a:rPr sz="900" b="0" i="0">
                 <a:solidFill>
@@ -5205,7 +5736,17 @@
           </a:bodyPr>
           <a:lstStyle/>
           <a:p>
-            <a:pPr algn="l"/>
+            <a:pPr algn="l">
+              <a:lnSpc>
+                <a:spcPct val="115000"/>
+              </a:lnSpc>
+              <a:spcBef>
+                <a:spcPts val="0"/>
+              </a:spcBef>
+              <a:spcAft>
+                <a:spcPts val="200"/>
+              </a:spcAft>
+            </a:pPr>
             <a:r>
               <a:rPr sz="1100" b="1" i="0">
                 <a:solidFill>
@@ -5240,7 +5781,17 @@
           </a:bodyPr>
           <a:lstStyle/>
           <a:p>
-            <a:pPr algn="l"/>
+            <a:pPr algn="l">
+              <a:lnSpc>
+                <a:spcPct val="115000"/>
+              </a:lnSpc>
+              <a:spcBef>
+                <a:spcPts val="0"/>
+              </a:spcBef>
+              <a:spcAft>
+                <a:spcPts val="200"/>
+              </a:spcAft>
+            </a:pPr>
             <a:r>
               <a:rPr sz="2400" b="1" i="0">
                 <a:solidFill>
@@ -5363,9 +5914,19 @@
           </a:bodyPr>
           <a:lstStyle/>
           <a:p>
-            <a:pPr algn="l"/>
-            <a:r>
-              <a:rPr sz="1500" b="0" i="0">
+            <a:pPr algn="l">
+              <a:lnSpc>
+                <a:spcPct val="115000"/>
+              </a:lnSpc>
+              <a:spcBef>
+                <a:spcPts val="0"/>
+              </a:spcBef>
+              <a:spcAft>
+                <a:spcPts val="200"/>
+              </a:spcAft>
+            </a:pPr>
+            <a:r>
+              <a:rPr sz="1900" b="0" i="0">
                 <a:solidFill>
                   <a:srgbClr val="1E2F38"/>
                 </a:solidFill>
@@ -5486,9 +6047,19 @@
           </a:bodyPr>
           <a:lstStyle/>
           <a:p>
-            <a:pPr algn="l"/>
-            <a:r>
-              <a:rPr sz="1500" b="0" i="0">
+            <a:pPr algn="l">
+              <a:lnSpc>
+                <a:spcPct val="115000"/>
+              </a:lnSpc>
+              <a:spcBef>
+                <a:spcPts val="0"/>
+              </a:spcBef>
+              <a:spcAft>
+                <a:spcPts val="200"/>
+              </a:spcAft>
+            </a:pPr>
+            <a:r>
+              <a:rPr sz="1900" b="0" i="0">
                 <a:solidFill>
                   <a:srgbClr val="1E2F38"/>
                 </a:solidFill>
@@ -5609,9 +6180,19 @@
           </a:bodyPr>
           <a:lstStyle/>
           <a:p>
-            <a:pPr algn="l"/>
-            <a:r>
-              <a:rPr sz="1500" b="0" i="0">
+            <a:pPr algn="l">
+              <a:lnSpc>
+                <a:spcPct val="115000"/>
+              </a:lnSpc>
+              <a:spcBef>
+                <a:spcPts val="0"/>
+              </a:spcBef>
+              <a:spcAft>
+                <a:spcPts val="200"/>
+              </a:spcAft>
+            </a:pPr>
+            <a:r>
+              <a:rPr sz="1900" b="0" i="0">
                 <a:solidFill>
                   <a:srgbClr val="1E2F38"/>
                 </a:solidFill>
@@ -5732,9 +6313,19 @@
           </a:bodyPr>
           <a:lstStyle/>
           <a:p>
-            <a:pPr algn="l"/>
-            <a:r>
-              <a:rPr sz="1500" b="0" i="0">
+            <a:pPr algn="l">
+              <a:lnSpc>
+                <a:spcPct val="115000"/>
+              </a:lnSpc>
+              <a:spcBef>
+                <a:spcPts val="0"/>
+              </a:spcBef>
+              <a:spcAft>
+                <a:spcPts val="200"/>
+              </a:spcAft>
+            </a:pPr>
+            <a:r>
+              <a:rPr sz="1900" b="0" i="0">
                 <a:solidFill>
                   <a:srgbClr val="1E2F38"/>
                 </a:solidFill>
@@ -5810,7 +6401,17 @@
           </a:bodyPr>
           <a:lstStyle/>
           <a:p>
-            <a:pPr algn="l"/>
+            <a:pPr algn="l">
+              <a:lnSpc>
+                <a:spcPct val="115000"/>
+              </a:lnSpc>
+              <a:spcBef>
+                <a:spcPts val="0"/>
+              </a:spcBef>
+              <a:spcAft>
+                <a:spcPts val="200"/>
+              </a:spcAft>
+            </a:pPr>
             <a:r>
               <a:rPr sz="900" b="0" i="0">
                 <a:solidFill>
@@ -5845,7 +6446,17 @@
           </a:bodyPr>
           <a:lstStyle/>
           <a:p>
-            <a:pPr algn="r"/>
+            <a:pPr algn="r">
+              <a:lnSpc>
+                <a:spcPct val="115000"/>
+              </a:lnSpc>
+              <a:spcBef>
+                <a:spcPts val="0"/>
+              </a:spcBef>
+              <a:spcAft>
+                <a:spcPts val="200"/>
+              </a:spcAft>
+            </a:pPr>
             <a:r>
               <a:rPr sz="900" b="0" i="0">
                 <a:solidFill>
@@ -5984,7 +6595,17 @@
           </a:bodyPr>
           <a:lstStyle/>
           <a:p>
-            <a:pPr algn="l"/>
+            <a:pPr algn="l">
+              <a:lnSpc>
+                <a:spcPct val="115000"/>
+              </a:lnSpc>
+              <a:spcBef>
+                <a:spcPts val="0"/>
+              </a:spcBef>
+              <a:spcAft>
+                <a:spcPts val="200"/>
+              </a:spcAft>
+            </a:pPr>
             <a:r>
               <a:rPr sz="1100" b="1" i="0">
                 <a:solidFill>
@@ -6019,7 +6640,17 @@
           </a:bodyPr>
           <a:lstStyle/>
           <a:p>
-            <a:pPr algn="l"/>
+            <a:pPr algn="l">
+              <a:lnSpc>
+                <a:spcPct val="115000"/>
+              </a:lnSpc>
+              <a:spcBef>
+                <a:spcPts val="0"/>
+              </a:spcBef>
+              <a:spcAft>
+                <a:spcPts val="200"/>
+              </a:spcAft>
+            </a:pPr>
             <a:r>
               <a:rPr sz="2400" b="1" i="0">
                 <a:solidFill>
@@ -6099,7 +6730,17 @@
           </a:bodyPr>
           <a:lstStyle/>
           <a:p>
-            <a:pPr algn="l"/>
+            <a:pPr algn="l">
+              <a:lnSpc>
+                <a:spcPct val="115000"/>
+              </a:lnSpc>
+              <a:spcBef>
+                <a:spcPts val="0"/>
+              </a:spcBef>
+              <a:spcAft>
+                <a:spcPts val="200"/>
+              </a:spcAft>
+            </a:pPr>
             <a:r>
               <a:rPr sz="1600" b="1" i="0">
                 <a:solidFill>
@@ -6134,9 +6775,19 @@
           </a:bodyPr>
           <a:lstStyle/>
           <a:p>
-            <a:pPr algn="l"/>
-            <a:r>
-              <a:rPr sz="1400" b="0" i="0">
+            <a:pPr algn="l">
+              <a:lnSpc>
+                <a:spcPct val="128000"/>
+              </a:lnSpc>
+              <a:spcBef>
+                <a:spcPts val="0"/>
+              </a:spcBef>
+              <a:spcAft>
+                <a:spcPts val="200"/>
+              </a:spcAft>
+            </a:pPr>
+            <a:r>
+              <a:rPr sz="2600" b="0" i="0">
                 <a:solidFill>
                   <a:srgbClr val="3A4A54"/>
                 </a:solidFill>
@@ -6214,7 +6865,17 @@
           </a:bodyPr>
           <a:lstStyle/>
           <a:p>
-            <a:pPr algn="l"/>
+            <a:pPr algn="l">
+              <a:lnSpc>
+                <a:spcPct val="115000"/>
+              </a:lnSpc>
+              <a:spcBef>
+                <a:spcPts val="0"/>
+              </a:spcBef>
+              <a:spcAft>
+                <a:spcPts val="200"/>
+              </a:spcAft>
+            </a:pPr>
             <a:r>
               <a:rPr sz="1600" b="1" i="0">
                 <a:solidFill>
@@ -6249,9 +6910,19 @@
           </a:bodyPr>
           <a:lstStyle/>
           <a:p>
-            <a:pPr algn="l"/>
-            <a:r>
-              <a:rPr sz="1400" b="0" i="0">
+            <a:pPr algn="l">
+              <a:lnSpc>
+                <a:spcPct val="128000"/>
+              </a:lnSpc>
+              <a:spcBef>
+                <a:spcPts val="0"/>
+              </a:spcBef>
+              <a:spcAft>
+                <a:spcPts val="200"/>
+              </a:spcAft>
+            </a:pPr>
+            <a:r>
+              <a:rPr sz="2600" b="0" i="0">
                 <a:solidFill>
                   <a:srgbClr val="3A4A54"/>
                 </a:solidFill>
@@ -6327,7 +6998,17 @@
           </a:bodyPr>
           <a:lstStyle/>
           <a:p>
-            <a:pPr algn="l"/>
+            <a:pPr algn="l">
+              <a:lnSpc>
+                <a:spcPct val="115000"/>
+              </a:lnSpc>
+              <a:spcBef>
+                <a:spcPts val="0"/>
+              </a:spcBef>
+              <a:spcAft>
+                <a:spcPts val="200"/>
+              </a:spcAft>
+            </a:pPr>
             <a:r>
               <a:rPr sz="900" b="0" i="0">
                 <a:solidFill>
@@ -6362,7 +7043,17 @@
           </a:bodyPr>
           <a:lstStyle/>
           <a:p>
-            <a:pPr algn="r"/>
+            <a:pPr algn="r">
+              <a:lnSpc>
+                <a:spcPct val="115000"/>
+              </a:lnSpc>
+              <a:spcBef>
+                <a:spcPts val="0"/>
+              </a:spcBef>
+              <a:spcAft>
+                <a:spcPts val="200"/>
+              </a:spcAft>
+            </a:pPr>
             <a:r>
               <a:rPr sz="900" b="0" i="0">
                 <a:solidFill>
@@ -6482,7 +7173,17 @@
           </a:bodyPr>
           <a:lstStyle/>
           <a:p>
-            <a:pPr algn="l"/>
+            <a:pPr algn="l">
+              <a:lnSpc>
+                <a:spcPct val="115000"/>
+              </a:lnSpc>
+              <a:spcBef>
+                <a:spcPts val="0"/>
+              </a:spcBef>
+              <a:spcAft>
+                <a:spcPts val="200"/>
+              </a:spcAft>
+            </a:pPr>
             <a:r>
               <a:rPr sz="2400" b="1" i="0">
                 <a:solidFill>
@@ -6517,7 +7218,17 @@
           </a:bodyPr>
           <a:lstStyle/>
           <a:p>
-            <a:pPr algn="l"/>
+            <a:pPr algn="l">
+              <a:lnSpc>
+                <a:spcPct val="115000"/>
+              </a:lnSpc>
+              <a:spcBef>
+                <a:spcPts val="0"/>
+              </a:spcBef>
+              <a:spcAft>
+                <a:spcPts val="200"/>
+              </a:spcAft>
+            </a:pPr>
             <a:r>
               <a:rPr sz="1400" b="1" i="0">
                 <a:solidFill>
@@ -6552,7 +7263,17 @@
           </a:bodyPr>
           <a:lstStyle/>
           <a:p>
-            <a:pPr algn="l"/>
+            <a:pPr algn="l">
+              <a:lnSpc>
+                <a:spcPct val="115000"/>
+              </a:lnSpc>
+              <a:spcBef>
+                <a:spcPts val="0"/>
+              </a:spcBef>
+              <a:spcAft>
+                <a:spcPts val="200"/>
+              </a:spcAft>
+            </a:pPr>
             <a:r>
               <a:rPr sz="1200" b="0" i="0">
                 <a:solidFill>

--- a/applications/auc/documents/auc_ppt.pptx
+++ b/applications/auc/documents/auc_ppt.pptx
@@ -3393,6 +3393,96 @@
   <p:clrMapOvr>
     <a:masterClrMapping/>
   </p:clrMapOvr>
+  <p:timing>
+    <p:tnLst>
+      <p:par>
+        <p:cTn id="1" dur="indefinite" restart="never" nodeType="tmRoot">
+          <p:childTnLst>
+            <p:seq concurrent="true" nextAc="seek">
+              <p:cTn id="2" dur="indefinite" nodeType="mainSeq">
+                <p:childTnLst>
+                  <p:par>
+                    <p:cTn id="9" fill="hold">
+                      <p:stCondLst>
+                        <p:cond delay="0"/>
+                      </p:stCondLst>
+                      <p:childTnLst>
+                        <p:par>
+                          <p:cTn id="3" presetID="10" presetClass="entr" presetSubtype="0" fill="hold" nodeType="withEffect">
+                            <p:stCondLst>
+                              <p:cond delay="0"/>
+                            </p:stCondLst>
+                            <p:childTnLst>
+                              <p:animEffect transition="in" filter="fade">
+                                <p:cBhvr>
+                                  <p:cTn id="4" dur="450"/>
+                                  <p:tgtEl>
+                                    <p:spTgt spid="2"/>
+                                  </p:tgtEl>
+                                </p:cBhvr>
+                              </p:animEffect>
+                            </p:childTnLst>
+                          </p:cTn>
+                        </p:par>
+                        <p:par>
+                          <p:cTn id="5" presetID="10" presetClass="entr" presetSubtype="0" fill="hold" nodeType="withEffect">
+                            <p:stCondLst>
+                              <p:cond delay="200"/>
+                            </p:stCondLst>
+                            <p:childTnLst>
+                              <p:animEffect transition="in" filter="fade">
+                                <p:cBhvr>
+                                  <p:cTn id="6" dur="450"/>
+                                  <p:tgtEl>
+                                    <p:spTgt spid="3"/>
+                                  </p:tgtEl>
+                                </p:cBhvr>
+                              </p:animEffect>
+                            </p:childTnLst>
+                          </p:cTn>
+                        </p:par>
+                        <p:par>
+                          <p:cTn id="7" presetID="10" presetClass="entr" presetSubtype="0" fill="hold" nodeType="withEffect">
+                            <p:stCondLst>
+                              <p:cond delay="200"/>
+                            </p:stCondLst>
+                            <p:childTnLst>
+                              <p:animEffect transition="in" filter="fade">
+                                <p:cBhvr>
+                                  <p:cTn id="8" dur="450"/>
+                                  <p:tgtEl>
+                                    <p:spTgt spid="4"/>
+                                  </p:tgtEl>
+                                </p:cBhvr>
+                              </p:animEffect>
+                            </p:childTnLst>
+                          </p:cTn>
+                        </p:par>
+                      </p:childTnLst>
+                    </p:cTn>
+                  </p:par>
+                </p:childTnLst>
+              </p:cTn>
+              <p:prevCondLst>
+                <p:cond evt="onPrev" delay="0">
+                  <p:tgtEl>
+                    <p:sldTgt/>
+                  </p:tgtEl>
+                </p:cond>
+              </p:prevCondLst>
+              <p:nextCondLst>
+                <p:cond evt="onNext" delay="0">
+                  <p:tgtEl>
+                    <p:sldTgt/>
+                  </p:tgtEl>
+                </p:cond>
+              </p:nextCondLst>
+            </p:seq>
+          </p:childTnLst>
+        </p:cTn>
+      </p:par>
+    </p:tnLst>
+  </p:timing>
 </p:sld>
 </file>
 
@@ -3833,6 +3923,96 @@
   <p:clrMapOvr>
     <a:masterClrMapping/>
   </p:clrMapOvr>
+  <p:timing>
+    <p:tnLst>
+      <p:par>
+        <p:cTn id="1" dur="indefinite" restart="never" nodeType="tmRoot">
+          <p:childTnLst>
+            <p:seq concurrent="true" nextAc="seek">
+              <p:cTn id="2" dur="indefinite" nodeType="mainSeq">
+                <p:childTnLst>
+                  <p:par>
+                    <p:cTn id="9" fill="hold">
+                      <p:stCondLst>
+                        <p:cond delay="0"/>
+                      </p:stCondLst>
+                      <p:childTnLst>
+                        <p:par>
+                          <p:cTn id="3" presetID="10" presetClass="entr" presetSubtype="0" fill="hold" nodeType="withEffect">
+                            <p:stCondLst>
+                              <p:cond delay="0"/>
+                            </p:stCondLst>
+                            <p:childTnLst>
+                              <p:animEffect transition="in" filter="fade">
+                                <p:cBhvr>
+                                  <p:cTn id="4" dur="450"/>
+                                  <p:tgtEl>
+                                    <p:spTgt spid="2"/>
+                                  </p:tgtEl>
+                                </p:cBhvr>
+                              </p:animEffect>
+                            </p:childTnLst>
+                          </p:cTn>
+                        </p:par>
+                        <p:par>
+                          <p:cTn id="5" presetID="10" presetClass="entr" presetSubtype="0" fill="hold" nodeType="withEffect">
+                            <p:stCondLst>
+                              <p:cond delay="200"/>
+                            </p:stCondLst>
+                            <p:childTnLst>
+                              <p:animEffect transition="in" filter="fade">
+                                <p:cBhvr>
+                                  <p:cTn id="6" dur="450"/>
+                                  <p:tgtEl>
+                                    <p:spTgt spid="3"/>
+                                  </p:tgtEl>
+                                </p:cBhvr>
+                              </p:animEffect>
+                            </p:childTnLst>
+                          </p:cTn>
+                        </p:par>
+                        <p:par>
+                          <p:cTn id="7" presetID="10" presetClass="entr" presetSubtype="0" fill="hold" nodeType="withEffect">
+                            <p:stCondLst>
+                              <p:cond delay="200"/>
+                            </p:stCondLst>
+                            <p:childTnLst>
+                              <p:animEffect transition="in" filter="fade">
+                                <p:cBhvr>
+                                  <p:cTn id="8" dur="450"/>
+                                  <p:tgtEl>
+                                    <p:spTgt spid="4"/>
+                                  </p:tgtEl>
+                                </p:cBhvr>
+                              </p:animEffect>
+                            </p:childTnLst>
+                          </p:cTn>
+                        </p:par>
+                      </p:childTnLst>
+                    </p:cTn>
+                  </p:par>
+                </p:childTnLst>
+              </p:cTn>
+              <p:prevCondLst>
+                <p:cond evt="onPrev" delay="0">
+                  <p:tgtEl>
+                    <p:sldTgt/>
+                  </p:tgtEl>
+                </p:cond>
+              </p:prevCondLst>
+              <p:nextCondLst>
+                <p:cond evt="onNext" delay="0">
+                  <p:tgtEl>
+                    <p:sldTgt/>
+                  </p:tgtEl>
+                </p:cond>
+              </p:nextCondLst>
+            </p:seq>
+          </p:childTnLst>
+        </p:cTn>
+      </p:par>
+    </p:tnLst>
+  </p:timing>
 </p:sld>
 </file>
 
@@ -4295,6 +4475,96 @@
   <p:clrMapOvr>
     <a:masterClrMapping/>
   </p:clrMapOvr>
+  <p:timing>
+    <p:tnLst>
+      <p:par>
+        <p:cTn id="1" dur="indefinite" restart="never" nodeType="tmRoot">
+          <p:childTnLst>
+            <p:seq concurrent="true" nextAc="seek">
+              <p:cTn id="2" dur="indefinite" nodeType="mainSeq">
+                <p:childTnLst>
+                  <p:par>
+                    <p:cTn id="9" fill="hold">
+                      <p:stCondLst>
+                        <p:cond delay="0"/>
+                      </p:stCondLst>
+                      <p:childTnLst>
+                        <p:par>
+                          <p:cTn id="3" presetID="10" presetClass="entr" presetSubtype="0" fill="hold" nodeType="withEffect">
+                            <p:stCondLst>
+                              <p:cond delay="0"/>
+                            </p:stCondLst>
+                            <p:childTnLst>
+                              <p:animEffect transition="in" filter="fade">
+                                <p:cBhvr>
+                                  <p:cTn id="4" dur="450"/>
+                                  <p:tgtEl>
+                                    <p:spTgt spid="2"/>
+                                  </p:tgtEl>
+                                </p:cBhvr>
+                              </p:animEffect>
+                            </p:childTnLst>
+                          </p:cTn>
+                        </p:par>
+                        <p:par>
+                          <p:cTn id="5" presetID="10" presetClass="entr" presetSubtype="0" fill="hold" nodeType="withEffect">
+                            <p:stCondLst>
+                              <p:cond delay="200"/>
+                            </p:stCondLst>
+                            <p:childTnLst>
+                              <p:animEffect transition="in" filter="fade">
+                                <p:cBhvr>
+                                  <p:cTn id="6" dur="450"/>
+                                  <p:tgtEl>
+                                    <p:spTgt spid="3"/>
+                                  </p:tgtEl>
+                                </p:cBhvr>
+                              </p:animEffect>
+                            </p:childTnLst>
+                          </p:cTn>
+                        </p:par>
+                        <p:par>
+                          <p:cTn id="7" presetID="10" presetClass="entr" presetSubtype="0" fill="hold" nodeType="withEffect">
+                            <p:stCondLst>
+                              <p:cond delay="200"/>
+                            </p:stCondLst>
+                            <p:childTnLst>
+                              <p:animEffect transition="in" filter="fade">
+                                <p:cBhvr>
+                                  <p:cTn id="8" dur="450"/>
+                                  <p:tgtEl>
+                                    <p:spTgt spid="4"/>
+                                  </p:tgtEl>
+                                </p:cBhvr>
+                              </p:animEffect>
+                            </p:childTnLst>
+                          </p:cTn>
+                        </p:par>
+                      </p:childTnLst>
+                    </p:cTn>
+                  </p:par>
+                </p:childTnLst>
+              </p:cTn>
+              <p:prevCondLst>
+                <p:cond evt="onPrev" delay="0">
+                  <p:tgtEl>
+                    <p:sldTgt/>
+                  </p:tgtEl>
+                </p:cond>
+              </p:prevCondLst>
+              <p:nextCondLst>
+                <p:cond evt="onNext" delay="0">
+                  <p:tgtEl>
+                    <p:sldTgt/>
+                  </p:tgtEl>
+                </p:cond>
+              </p:nextCondLst>
+            </p:seq>
+          </p:childTnLst>
+        </p:cTn>
+      </p:par>
+    </p:tnLst>
+  </p:timing>
 </p:sld>
 </file>
 
@@ -4713,6 +4983,96 @@
   <p:clrMapOvr>
     <a:masterClrMapping/>
   </p:clrMapOvr>
+  <p:timing>
+    <p:tnLst>
+      <p:par>
+        <p:cTn id="1" dur="indefinite" restart="never" nodeType="tmRoot">
+          <p:childTnLst>
+            <p:seq concurrent="true" nextAc="seek">
+              <p:cTn id="2" dur="indefinite" nodeType="mainSeq">
+                <p:childTnLst>
+                  <p:par>
+                    <p:cTn id="9" fill="hold">
+                      <p:stCondLst>
+                        <p:cond delay="0"/>
+                      </p:stCondLst>
+                      <p:childTnLst>
+                        <p:par>
+                          <p:cTn id="3" presetID="10" presetClass="entr" presetSubtype="0" fill="hold" nodeType="withEffect">
+                            <p:stCondLst>
+                              <p:cond delay="0"/>
+                            </p:stCondLst>
+                            <p:childTnLst>
+                              <p:animEffect transition="in" filter="fade">
+                                <p:cBhvr>
+                                  <p:cTn id="4" dur="450"/>
+                                  <p:tgtEl>
+                                    <p:spTgt spid="2"/>
+                                  </p:tgtEl>
+                                </p:cBhvr>
+                              </p:animEffect>
+                            </p:childTnLst>
+                          </p:cTn>
+                        </p:par>
+                        <p:par>
+                          <p:cTn id="5" presetID="10" presetClass="entr" presetSubtype="0" fill="hold" nodeType="withEffect">
+                            <p:stCondLst>
+                              <p:cond delay="200"/>
+                            </p:stCondLst>
+                            <p:childTnLst>
+                              <p:animEffect transition="in" filter="fade">
+                                <p:cBhvr>
+                                  <p:cTn id="6" dur="450"/>
+                                  <p:tgtEl>
+                                    <p:spTgt spid="3"/>
+                                  </p:tgtEl>
+                                </p:cBhvr>
+                              </p:animEffect>
+                            </p:childTnLst>
+                          </p:cTn>
+                        </p:par>
+                        <p:par>
+                          <p:cTn id="7" presetID="10" presetClass="entr" presetSubtype="0" fill="hold" nodeType="withEffect">
+                            <p:stCondLst>
+                              <p:cond delay="200"/>
+                            </p:stCondLst>
+                            <p:childTnLst>
+                              <p:animEffect transition="in" filter="fade">
+                                <p:cBhvr>
+                                  <p:cTn id="8" dur="450"/>
+                                  <p:tgtEl>
+                                    <p:spTgt spid="4"/>
+                                  </p:tgtEl>
+                                </p:cBhvr>
+                              </p:animEffect>
+                            </p:childTnLst>
+                          </p:cTn>
+                        </p:par>
+                      </p:childTnLst>
+                    </p:cTn>
+                  </p:par>
+                </p:childTnLst>
+              </p:cTn>
+              <p:prevCondLst>
+                <p:cond evt="onPrev" delay="0">
+                  <p:tgtEl>
+                    <p:sldTgt/>
+                  </p:tgtEl>
+                </p:cond>
+              </p:prevCondLst>
+              <p:nextCondLst>
+                <p:cond evt="onNext" delay="0">
+                  <p:tgtEl>
+                    <p:sldTgt/>
+                  </p:tgtEl>
+                </p:cond>
+              </p:nextCondLst>
+            </p:seq>
+          </p:childTnLst>
+        </p:cTn>
+      </p:par>
+    </p:tnLst>
+  </p:timing>
 </p:sld>
 </file>
 
@@ -5131,6 +5491,96 @@
   <p:clrMapOvr>
     <a:masterClrMapping/>
   </p:clrMapOvr>
+  <p:timing>
+    <p:tnLst>
+      <p:par>
+        <p:cTn id="1" dur="indefinite" restart="never" nodeType="tmRoot">
+          <p:childTnLst>
+            <p:seq concurrent="true" nextAc="seek">
+              <p:cTn id="2" dur="indefinite" nodeType="mainSeq">
+                <p:childTnLst>
+                  <p:par>
+                    <p:cTn id="9" fill="hold">
+                      <p:stCondLst>
+                        <p:cond delay="0"/>
+                      </p:stCondLst>
+                      <p:childTnLst>
+                        <p:par>
+                          <p:cTn id="3" presetID="10" presetClass="entr" presetSubtype="0" fill="hold" nodeType="withEffect">
+                            <p:stCondLst>
+                              <p:cond delay="0"/>
+                            </p:stCondLst>
+                            <p:childTnLst>
+                              <p:animEffect transition="in" filter="fade">
+                                <p:cBhvr>
+                                  <p:cTn id="4" dur="450"/>
+                                  <p:tgtEl>
+                                    <p:spTgt spid="2"/>
+                                  </p:tgtEl>
+                                </p:cBhvr>
+                              </p:animEffect>
+                            </p:childTnLst>
+                          </p:cTn>
+                        </p:par>
+                        <p:par>
+                          <p:cTn id="5" presetID="10" presetClass="entr" presetSubtype="0" fill="hold" nodeType="withEffect">
+                            <p:stCondLst>
+                              <p:cond delay="200"/>
+                            </p:stCondLst>
+                            <p:childTnLst>
+                              <p:animEffect transition="in" filter="fade">
+                                <p:cBhvr>
+                                  <p:cTn id="6" dur="450"/>
+                                  <p:tgtEl>
+                                    <p:spTgt spid="3"/>
+                                  </p:tgtEl>
+                                </p:cBhvr>
+                              </p:animEffect>
+                            </p:childTnLst>
+                          </p:cTn>
+                        </p:par>
+                        <p:par>
+                          <p:cTn id="7" presetID="10" presetClass="entr" presetSubtype="0" fill="hold" nodeType="withEffect">
+                            <p:stCondLst>
+                              <p:cond delay="200"/>
+                            </p:stCondLst>
+                            <p:childTnLst>
+                              <p:animEffect transition="in" filter="fade">
+                                <p:cBhvr>
+                                  <p:cTn id="8" dur="450"/>
+                                  <p:tgtEl>
+                                    <p:spTgt spid="4"/>
+                                  </p:tgtEl>
+                                </p:cBhvr>
+                              </p:animEffect>
+                            </p:childTnLst>
+                          </p:cTn>
+                        </p:par>
+                      </p:childTnLst>
+                    </p:cTn>
+                  </p:par>
+                </p:childTnLst>
+              </p:cTn>
+              <p:prevCondLst>
+                <p:cond evt="onPrev" delay="0">
+                  <p:tgtEl>
+                    <p:sldTgt/>
+                  </p:tgtEl>
+                </p:cond>
+              </p:prevCondLst>
+              <p:nextCondLst>
+                <p:cond evt="onNext" delay="0">
+                  <p:tgtEl>
+                    <p:sldTgt/>
+                  </p:tgtEl>
+                </p:cond>
+              </p:nextCondLst>
+            </p:seq>
+          </p:childTnLst>
+        </p:cTn>
+      </p:par>
+    </p:tnLst>
+  </p:timing>
 </p:sld>
 </file>
 
@@ -5615,6 +6065,96 @@
   <p:clrMapOvr>
     <a:masterClrMapping/>
   </p:clrMapOvr>
+  <p:timing>
+    <p:tnLst>
+      <p:par>
+        <p:cTn id="1" dur="indefinite" restart="never" nodeType="tmRoot">
+          <p:childTnLst>
+            <p:seq concurrent="true" nextAc="seek">
+              <p:cTn id="2" dur="indefinite" nodeType="mainSeq">
+                <p:childTnLst>
+                  <p:par>
+                    <p:cTn id="9" fill="hold">
+                      <p:stCondLst>
+                        <p:cond delay="0"/>
+                      </p:stCondLst>
+                      <p:childTnLst>
+                        <p:par>
+                          <p:cTn id="3" presetID="10" presetClass="entr" presetSubtype="0" fill="hold" nodeType="withEffect">
+                            <p:stCondLst>
+                              <p:cond delay="0"/>
+                            </p:stCondLst>
+                            <p:childTnLst>
+                              <p:animEffect transition="in" filter="fade">
+                                <p:cBhvr>
+                                  <p:cTn id="4" dur="450"/>
+                                  <p:tgtEl>
+                                    <p:spTgt spid="2"/>
+                                  </p:tgtEl>
+                                </p:cBhvr>
+                              </p:animEffect>
+                            </p:childTnLst>
+                          </p:cTn>
+                        </p:par>
+                        <p:par>
+                          <p:cTn id="5" presetID="10" presetClass="entr" presetSubtype="0" fill="hold" nodeType="withEffect">
+                            <p:stCondLst>
+                              <p:cond delay="200"/>
+                            </p:stCondLst>
+                            <p:childTnLst>
+                              <p:animEffect transition="in" filter="fade">
+                                <p:cBhvr>
+                                  <p:cTn id="6" dur="450"/>
+                                  <p:tgtEl>
+                                    <p:spTgt spid="3"/>
+                                  </p:tgtEl>
+                                </p:cBhvr>
+                              </p:animEffect>
+                            </p:childTnLst>
+                          </p:cTn>
+                        </p:par>
+                        <p:par>
+                          <p:cTn id="7" presetID="10" presetClass="entr" presetSubtype="0" fill="hold" nodeType="withEffect">
+                            <p:stCondLst>
+                              <p:cond delay="200"/>
+                            </p:stCondLst>
+                            <p:childTnLst>
+                              <p:animEffect transition="in" filter="fade">
+                                <p:cBhvr>
+                                  <p:cTn id="8" dur="450"/>
+                                  <p:tgtEl>
+                                    <p:spTgt spid="4"/>
+                                  </p:tgtEl>
+                                </p:cBhvr>
+                              </p:animEffect>
+                            </p:childTnLst>
+                          </p:cTn>
+                        </p:par>
+                      </p:childTnLst>
+                    </p:cTn>
+                  </p:par>
+                </p:childTnLst>
+              </p:cTn>
+              <p:prevCondLst>
+                <p:cond evt="onPrev" delay="0">
+                  <p:tgtEl>
+                    <p:sldTgt/>
+                  </p:tgtEl>
+                </p:cond>
+              </p:prevCondLst>
+              <p:nextCondLst>
+                <p:cond evt="onNext" delay="0">
+                  <p:tgtEl>
+                    <p:sldTgt/>
+                  </p:tgtEl>
+                </p:cond>
+              </p:nextCondLst>
+            </p:seq>
+          </p:childTnLst>
+        </p:cTn>
+      </p:par>
+    </p:tnLst>
+  </p:timing>
 </p:sld>
 </file>
 
@@ -6474,6 +7014,96 @@
   <p:clrMapOvr>
     <a:masterClrMapping/>
   </p:clrMapOvr>
+  <p:timing>
+    <p:tnLst>
+      <p:par>
+        <p:cTn id="1" dur="indefinite" restart="never" nodeType="tmRoot">
+          <p:childTnLst>
+            <p:seq concurrent="true" nextAc="seek">
+              <p:cTn id="2" dur="indefinite" nodeType="mainSeq">
+                <p:childTnLst>
+                  <p:par>
+                    <p:cTn id="9" fill="hold">
+                      <p:stCondLst>
+                        <p:cond delay="0"/>
+                      </p:stCondLst>
+                      <p:childTnLst>
+                        <p:par>
+                          <p:cTn id="3" presetID="10" presetClass="entr" presetSubtype="0" fill="hold" nodeType="withEffect">
+                            <p:stCondLst>
+                              <p:cond delay="0"/>
+                            </p:stCondLst>
+                            <p:childTnLst>
+                              <p:animEffect transition="in" filter="fade">
+                                <p:cBhvr>
+                                  <p:cTn id="4" dur="450"/>
+                                  <p:tgtEl>
+                                    <p:spTgt spid="2"/>
+                                  </p:tgtEl>
+                                </p:cBhvr>
+                              </p:animEffect>
+                            </p:childTnLst>
+                          </p:cTn>
+                        </p:par>
+                        <p:par>
+                          <p:cTn id="5" presetID="10" presetClass="entr" presetSubtype="0" fill="hold" nodeType="withEffect">
+                            <p:stCondLst>
+                              <p:cond delay="200"/>
+                            </p:stCondLst>
+                            <p:childTnLst>
+                              <p:animEffect transition="in" filter="fade">
+                                <p:cBhvr>
+                                  <p:cTn id="6" dur="450"/>
+                                  <p:tgtEl>
+                                    <p:spTgt spid="3"/>
+                                  </p:tgtEl>
+                                </p:cBhvr>
+                              </p:animEffect>
+                            </p:childTnLst>
+                          </p:cTn>
+                        </p:par>
+                        <p:par>
+                          <p:cTn id="7" presetID="10" presetClass="entr" presetSubtype="0" fill="hold" nodeType="withEffect">
+                            <p:stCondLst>
+                              <p:cond delay="200"/>
+                            </p:stCondLst>
+                            <p:childTnLst>
+                              <p:animEffect transition="in" filter="fade">
+                                <p:cBhvr>
+                                  <p:cTn id="8" dur="450"/>
+                                  <p:tgtEl>
+                                    <p:spTgt spid="4"/>
+                                  </p:tgtEl>
+                                </p:cBhvr>
+                              </p:animEffect>
+                            </p:childTnLst>
+                          </p:cTn>
+                        </p:par>
+                      </p:childTnLst>
+                    </p:cTn>
+                  </p:par>
+                </p:childTnLst>
+              </p:cTn>
+              <p:prevCondLst>
+                <p:cond evt="onPrev" delay="0">
+                  <p:tgtEl>
+                    <p:sldTgt/>
+                  </p:tgtEl>
+                </p:cond>
+              </p:prevCondLst>
+              <p:nextCondLst>
+                <p:cond evt="onNext" delay="0">
+                  <p:tgtEl>
+                    <p:sldTgt/>
+                  </p:tgtEl>
+                </p:cond>
+              </p:nextCondLst>
+            </p:seq>
+          </p:childTnLst>
+        </p:cTn>
+      </p:par>
+    </p:tnLst>
+  </p:timing>
 </p:sld>
 </file>
 
@@ -7071,6 +7701,96 @@
   <p:clrMapOvr>
     <a:masterClrMapping/>
   </p:clrMapOvr>
+  <p:timing>
+    <p:tnLst>
+      <p:par>
+        <p:cTn id="1" dur="indefinite" restart="never" nodeType="tmRoot">
+          <p:childTnLst>
+            <p:seq concurrent="true" nextAc="seek">
+              <p:cTn id="2" dur="indefinite" nodeType="mainSeq">
+                <p:childTnLst>
+                  <p:par>
+                    <p:cTn id="9" fill="hold">
+                      <p:stCondLst>
+                        <p:cond delay="0"/>
+                      </p:stCondLst>
+                      <p:childTnLst>
+                        <p:par>
+                          <p:cTn id="3" presetID="10" presetClass="entr" presetSubtype="0" fill="hold" nodeType="withEffect">
+                            <p:stCondLst>
+                              <p:cond delay="0"/>
+                            </p:stCondLst>
+                            <p:childTnLst>
+                              <p:animEffect transition="in" filter="fade">
+                                <p:cBhvr>
+                                  <p:cTn id="4" dur="450"/>
+                                  <p:tgtEl>
+                                    <p:spTgt spid="2"/>
+                                  </p:tgtEl>
+                                </p:cBhvr>
+                              </p:animEffect>
+                            </p:childTnLst>
+                          </p:cTn>
+                        </p:par>
+                        <p:par>
+                          <p:cTn id="5" presetID="10" presetClass="entr" presetSubtype="0" fill="hold" nodeType="withEffect">
+                            <p:stCondLst>
+                              <p:cond delay="200"/>
+                            </p:stCondLst>
+                            <p:childTnLst>
+                              <p:animEffect transition="in" filter="fade">
+                                <p:cBhvr>
+                                  <p:cTn id="6" dur="450"/>
+                                  <p:tgtEl>
+                                    <p:spTgt spid="3"/>
+                                  </p:tgtEl>
+                                </p:cBhvr>
+                              </p:animEffect>
+                            </p:childTnLst>
+                          </p:cTn>
+                        </p:par>
+                        <p:par>
+                          <p:cTn id="7" presetID="10" presetClass="entr" presetSubtype="0" fill="hold" nodeType="withEffect">
+                            <p:stCondLst>
+                              <p:cond delay="200"/>
+                            </p:stCondLst>
+                            <p:childTnLst>
+                              <p:animEffect transition="in" filter="fade">
+                                <p:cBhvr>
+                                  <p:cTn id="8" dur="450"/>
+                                  <p:tgtEl>
+                                    <p:spTgt spid="4"/>
+                                  </p:tgtEl>
+                                </p:cBhvr>
+                              </p:animEffect>
+                            </p:childTnLst>
+                          </p:cTn>
+                        </p:par>
+                      </p:childTnLst>
+                    </p:cTn>
+                  </p:par>
+                </p:childTnLst>
+              </p:cTn>
+              <p:prevCondLst>
+                <p:cond evt="onPrev" delay="0">
+                  <p:tgtEl>
+                    <p:sldTgt/>
+                  </p:tgtEl>
+                </p:cond>
+              </p:prevCondLst>
+              <p:nextCondLst>
+                <p:cond evt="onNext" delay="0">
+                  <p:tgtEl>
+                    <p:sldTgt/>
+                  </p:tgtEl>
+                </p:cond>
+              </p:nextCondLst>
+            </p:seq>
+          </p:childTnLst>
+        </p:cTn>
+      </p:par>
+    </p:tnLst>
+  </p:timing>
 </p:sld>
 </file>
 
@@ -7291,6 +8011,96 @@
   <p:clrMapOvr>
     <a:masterClrMapping/>
   </p:clrMapOvr>
+  <p:timing>
+    <p:tnLst>
+      <p:par>
+        <p:cTn id="1" dur="indefinite" restart="never" nodeType="tmRoot">
+          <p:childTnLst>
+            <p:seq concurrent="true" nextAc="seek">
+              <p:cTn id="2" dur="indefinite" nodeType="mainSeq">
+                <p:childTnLst>
+                  <p:par>
+                    <p:cTn id="9" fill="hold">
+                      <p:stCondLst>
+                        <p:cond delay="0"/>
+                      </p:stCondLst>
+                      <p:childTnLst>
+                        <p:par>
+                          <p:cTn id="3" presetID="10" presetClass="entr" presetSubtype="0" fill="hold" nodeType="withEffect">
+                            <p:stCondLst>
+                              <p:cond delay="0"/>
+                            </p:stCondLst>
+                            <p:childTnLst>
+                              <p:animEffect transition="in" filter="fade">
+                                <p:cBhvr>
+                                  <p:cTn id="4" dur="450"/>
+                                  <p:tgtEl>
+                                    <p:spTgt spid="2"/>
+                                  </p:tgtEl>
+                                </p:cBhvr>
+                              </p:animEffect>
+                            </p:childTnLst>
+                          </p:cTn>
+                        </p:par>
+                        <p:par>
+                          <p:cTn id="5" presetID="10" presetClass="entr" presetSubtype="0" fill="hold" nodeType="withEffect">
+                            <p:stCondLst>
+                              <p:cond delay="200"/>
+                            </p:stCondLst>
+                            <p:childTnLst>
+                              <p:animEffect transition="in" filter="fade">
+                                <p:cBhvr>
+                                  <p:cTn id="6" dur="450"/>
+                                  <p:tgtEl>
+                                    <p:spTgt spid="3"/>
+                                  </p:tgtEl>
+                                </p:cBhvr>
+                              </p:animEffect>
+                            </p:childTnLst>
+                          </p:cTn>
+                        </p:par>
+                        <p:par>
+                          <p:cTn id="7" presetID="10" presetClass="entr" presetSubtype="0" fill="hold" nodeType="withEffect">
+                            <p:stCondLst>
+                              <p:cond delay="200"/>
+                            </p:stCondLst>
+                            <p:childTnLst>
+                              <p:animEffect transition="in" filter="fade">
+                                <p:cBhvr>
+                                  <p:cTn id="8" dur="450"/>
+                                  <p:tgtEl>
+                                    <p:spTgt spid="4"/>
+                                  </p:tgtEl>
+                                </p:cBhvr>
+                              </p:animEffect>
+                            </p:childTnLst>
+                          </p:cTn>
+                        </p:par>
+                      </p:childTnLst>
+                    </p:cTn>
+                  </p:par>
+                </p:childTnLst>
+              </p:cTn>
+              <p:prevCondLst>
+                <p:cond evt="onPrev" delay="0">
+                  <p:tgtEl>
+                    <p:sldTgt/>
+                  </p:tgtEl>
+                </p:cond>
+              </p:prevCondLst>
+              <p:nextCondLst>
+                <p:cond evt="onNext" delay="0">
+                  <p:tgtEl>
+                    <p:sldTgt/>
+                  </p:tgtEl>
+                </p:cond>
+              </p:nextCondLst>
+            </p:seq>
+          </p:childTnLst>
+        </p:cTn>
+      </p:par>
+    </p:tnLst>
+  </p:timing>
 </p:sld>
 </file>
 
